--- a/MESENERGIA_Presentacion_Clientes.pptx
+++ b/MESENERGIA_Presentacion_Clientes.pptx
@@ -12,9 +12,11 @@
     <p:sldId id="260" r:id="rId6"/>
     <p:sldId id="261" r:id="rId7"/>
     <p:sldId id="262" r:id="rId8"/>
+    <p:sldId id="263" r:id="rId9"/>
+    <p:sldId id="264" r:id="rId10"/>
   </p:sldIdLst>
   <p:notesMasterIdLst>
-    <p:notesMasterId r:id="rId9"/>
+    <p:notesMasterId r:id="rId11"/>
   </p:notesMasterIdLst>
   <p:sldSz cx="12192000" cy="6858000"/>
   <p:notesSz cx="6858000" cy="12192000"/>
@@ -113,27 +115,29 @@
   <p:extLst>
     <p:ext uri="{521415D9-36F7-43E2-AB2F-B90AF26B5E84}">
       <p14:sectionLst xmlns:p14="http://schemas.microsoft.com/office/powerpoint/2010/main">
-        <p14:section name="Portada" id="{6227495a-6417-ef05-3b32-89de043c5430}">
+        <p14:section name="Portada" id="{7755e44f-df72-b5bf-1a4d-2cc9d34a6b63}">
           <p14:sldIdLst>
             <p14:sldId id="256"/>
           </p14:sldIdLst>
         </p14:section>
-        <p14:section name="Nuestras bases" id="{4ac7999f-2549-7ef4-cb46-7343c1957dde}">
+        <p14:section name="Nuestras bases" id="{2e33d63f-9f24-4274-f07a-914ffd19fdd1}">
           <p14:sldIdLst>
             <p14:sldId id="257"/>
             <p14:sldId id="258"/>
             <p14:sldId id="259"/>
             <p14:sldId id="260"/>
+            <p14:sldId id="261"/>
+            <p14:sldId id="262"/>
           </p14:sldIdLst>
         </p14:section>
-        <p14:section name="Por qué MESENERGIA" id="{fed80802-4c4e-5089-edc0-abfb06dcd982}">
+        <p14:section name="Por qué MESENERGIA" id="{91aa3e7e-cbe3-babd-e2cc-38ee04a55a5c}">
           <p14:sldIdLst>
-            <p14:sldId id="261"/>
+            <p14:sldId id="263"/>
           </p14:sldIdLst>
         </p14:section>
-        <p14:section name="Contacto" id="{893d599c-c92e-8245-2cef-08b6f8d7ae40}">
+        <p14:section name="Contacto" id="{a5794862-e700-c239-c407-a9044c94f928}">
           <p14:sldIdLst>
-            <p14:sldId id="262"/>
+            <p14:sldId id="264"/>
           </p14:sldIdLst>
         </p14:section>
       </p14:sectionLst>
@@ -1092,6 +1096,182 @@
             <a:fld id="{F7021451-1387-4CA6-816F-3879F97B5CBC}" type="slidenum">
               <a:rPr lang="en-US"/>
               <a:t>7</a:t>
+            </a:fld>
+            <a:endParaRPr lang="en-US"/>
+          </a:p>
+        </p:txBody>
+      </p:sp>
+    </p:spTree>
+    <p:extLst>
+      <p:ext uri="{BB962C8B-B14F-4D97-AF65-F5344CB8AC3E}">
+        <p14:creationId xmlns:p14="http://schemas.microsoft.com/office/powerpoint/2010/main" val="1024086991"/>
+      </p:ext>
+    </p:extLst>
+  </p:cSld>
+  <p:clrMapOvr>
+    <a:masterClrMapping/>
+  </p:clrMapOvr>
+</p:notes>
+</file>
+
+<file path=ppt/notesSlides/notesSlide8.xml><?xml version="1.0" encoding="utf-8"?>
+<p:notes xmlns:a="http://schemas.openxmlformats.org/drawingml/2006/main" xmlns:r="http://schemas.openxmlformats.org/officeDocument/2006/relationships" xmlns:p="http://schemas.openxmlformats.org/presentationml/2006/main">
+  <p:cSld>
+    <p:spTree>
+      <p:nvGrpSpPr>
+        <p:cNvPr id="1" name=""/>
+        <p:cNvGrpSpPr/>
+        <p:nvPr/>
+      </p:nvGrpSpPr>
+      <p:grpSpPr>
+        <a:xfrm>
+          <a:off x="0" y="0"/>
+          <a:ext cx="0" cy="0"/>
+          <a:chOff x="0" y="0"/>
+          <a:chExt cx="0" cy="0"/>
+        </a:xfrm>
+      </p:grpSpPr>
+      <p:sp>
+        <p:nvSpPr>
+          <p:cNvPr id="2" name="Slide Image Placeholder 1"/>
+          <p:cNvSpPr>
+            <a:spLocks noGrp="1" noRot="1" noChangeAspect="1"/>
+          </p:cNvSpPr>
+          <p:nvPr>
+            <p:ph type="sldImg"/>
+          </p:nvPr>
+        </p:nvSpPr>
+        <p:spPr/>
+      </p:sp>
+      <p:sp>
+        <p:nvSpPr>
+          <p:cNvPr id="3" name="Notes Placeholder 2"/>
+          <p:cNvSpPr>
+            <a:spLocks noGrp="1"/>
+          </p:cNvSpPr>
+          <p:nvPr>
+            <p:ph type="body" idx="1"/>
+          </p:nvPr>
+        </p:nvSpPr>
+        <p:spPr/>
+        <p:txBody>
+          <a:bodyPr/>
+          <a:lstStyle/>
+          <a:p>
+            <a:r>
+              <a:rPr lang="en-US" dirty="0"/>
+              <a:t/>
+            </a:r>
+            <a:endParaRPr lang="en-US" dirty="0"/>
+          </a:p>
+        </p:txBody>
+      </p:sp>
+      <p:sp>
+        <p:nvSpPr>
+          <p:cNvPr id="4" name="Slide Number Placeholder 3"/>
+          <p:cNvSpPr>
+            <a:spLocks noGrp="1"/>
+          </p:cNvSpPr>
+          <p:nvPr>
+            <p:ph type="sldNum" sz="quarter" idx="10"/>
+          </p:nvPr>
+        </p:nvSpPr>
+        <p:spPr/>
+        <p:txBody>
+          <a:bodyPr/>
+          <a:lstStyle/>
+          <a:p>
+            <a:fld id="{F7021451-1387-4CA6-816F-3879F97B5CBC}" type="slidenum">
+              <a:rPr lang="en-US"/>
+              <a:t>8</a:t>
+            </a:fld>
+            <a:endParaRPr lang="en-US"/>
+          </a:p>
+        </p:txBody>
+      </p:sp>
+    </p:spTree>
+    <p:extLst>
+      <p:ext uri="{BB962C8B-B14F-4D97-AF65-F5344CB8AC3E}">
+        <p14:creationId xmlns:p14="http://schemas.microsoft.com/office/powerpoint/2010/main" val="1024086991"/>
+      </p:ext>
+    </p:extLst>
+  </p:cSld>
+  <p:clrMapOvr>
+    <a:masterClrMapping/>
+  </p:clrMapOvr>
+</p:notes>
+</file>
+
+<file path=ppt/notesSlides/notesSlide9.xml><?xml version="1.0" encoding="utf-8"?>
+<p:notes xmlns:a="http://schemas.openxmlformats.org/drawingml/2006/main" xmlns:r="http://schemas.openxmlformats.org/officeDocument/2006/relationships" xmlns:p="http://schemas.openxmlformats.org/presentationml/2006/main">
+  <p:cSld>
+    <p:spTree>
+      <p:nvGrpSpPr>
+        <p:cNvPr id="1" name=""/>
+        <p:cNvGrpSpPr/>
+        <p:nvPr/>
+      </p:nvGrpSpPr>
+      <p:grpSpPr>
+        <a:xfrm>
+          <a:off x="0" y="0"/>
+          <a:ext cx="0" cy="0"/>
+          <a:chOff x="0" y="0"/>
+          <a:chExt cx="0" cy="0"/>
+        </a:xfrm>
+      </p:grpSpPr>
+      <p:sp>
+        <p:nvSpPr>
+          <p:cNvPr id="2" name="Slide Image Placeholder 1"/>
+          <p:cNvSpPr>
+            <a:spLocks noGrp="1" noRot="1" noChangeAspect="1"/>
+          </p:cNvSpPr>
+          <p:nvPr>
+            <p:ph type="sldImg"/>
+          </p:nvPr>
+        </p:nvSpPr>
+        <p:spPr/>
+      </p:sp>
+      <p:sp>
+        <p:nvSpPr>
+          <p:cNvPr id="3" name="Notes Placeholder 2"/>
+          <p:cNvSpPr>
+            <a:spLocks noGrp="1"/>
+          </p:cNvSpPr>
+          <p:nvPr>
+            <p:ph type="body" idx="1"/>
+          </p:nvPr>
+        </p:nvSpPr>
+        <p:spPr/>
+        <p:txBody>
+          <a:bodyPr/>
+          <a:lstStyle/>
+          <a:p>
+            <a:r>
+              <a:rPr lang="en-US" dirty="0"/>
+              <a:t/>
+            </a:r>
+            <a:endParaRPr lang="en-US" dirty="0"/>
+          </a:p>
+        </p:txBody>
+      </p:sp>
+      <p:sp>
+        <p:nvSpPr>
+          <p:cNvPr id="4" name="Slide Number Placeholder 3"/>
+          <p:cNvSpPr>
+            <a:spLocks noGrp="1"/>
+          </p:cNvSpPr>
+          <p:nvPr>
+            <p:ph type="sldNum" sz="quarter" idx="10"/>
+          </p:nvPr>
+        </p:nvSpPr>
+        <p:spPr/>
+        <p:txBody>
+          <a:bodyPr/>
+          <a:lstStyle/>
+          <a:p>
+            <a:fld id="{F7021451-1387-4CA6-816F-3879F97B5CBC}" type="slidenum">
+              <a:rPr lang="en-US"/>
+              <a:t>9</a:t>
             </a:fld>
             <a:endParaRPr lang="en-US"/>
           </a:p>
@@ -1925,7 +2105,7 @@
                   <a:schemeClr val="tx2"/>
                 </a:solidFill>
               </a:rPr>
-              <a:t>Las 3 bases de nuestro negocio</a:t>
+              <a:t>¿Quiénes somos?</a:t>
             </a:r>
             <a:endParaRPr lang="en-US" sz="3000" dirty="0"/>
           </a:p>
@@ -1933,22 +2113,80 @@
       </p:sp>
       <p:sp>
         <p:nvSpPr>
-          <p:cNvPr id="3" name="Shape 1"/>
+          <p:cNvPr id="3" name="Text 1"/>
+          <p:cNvSpPr txBox="1"/>
+          <p:nvPr/>
+        </p:nvSpPr>
+        <p:spPr>
+          <a:xfrm>
+            <a:off x="457200" y="1645920"/>
+            <a:ext cx="11247120" cy="731520"/>
+          </a:xfrm>
+          <a:prstGeom prst="rect">
+            <a:avLst/>
+          </a:prstGeom>
+          <a:noFill/>
+          <a:ln/>
+        </p:spPr>
+        <p:txBody>
+          <a:bodyPr wrap="square" lIns="0" tIns="0" rIns="0" bIns="0" rtlCol="0" anchor="ctr"/>
+          <a:lstStyle/>
+          <a:p>
+            <a:pPr indent="0" marL="0">
+              <a:buNone/>
+            </a:pPr>
+            <a:r>
+              <a:rPr lang="en-US" sz="1500" dirty="0">
+                <a:solidFill>
+                  <a:srgbClr val="5D6472"/>
+                </a:solidFill>
+              </a:rPr>
+              <a:t>Asesoría energética con más de 10 años de experiencia y más de 10.000 clientes satisfechos. </a:t>
+            </a:r>
+            <a:pPr indent="0" marL="0">
+              <a:buNone/>
+            </a:pPr>
+            <a:r>
+              <a:rPr lang="en-US" sz="1500" b="1" dirty="0">
+                <a:solidFill>
+                  <a:srgbClr val="1F3260"/>
+                </a:solidFill>
+              </a:rPr>
+              <a:t>Acuerdos master con las principales comercializadoras del país</a:t>
+            </a:r>
+            <a:pPr indent="0" marL="0">
+              <a:buNone/>
+            </a:pPr>
+            <a:r>
+              <a:rPr lang="en-US" sz="1500" dirty="0">
+                <a:solidFill>
+                  <a:srgbClr val="5D6472"/>
+                </a:solidFill>
+              </a:rPr>
+              <a:t> para conseguir las mejores condiciones para nuestros clientes.</a:t>
+            </a:r>
+            <a:endParaRPr lang="en-US" sz="1500" dirty="0"/>
+          </a:p>
+        </p:txBody>
+      </p:sp>
+      <p:sp>
+        <p:nvSpPr>
+          <p:cNvPr id="4" name="Shape 2"/>
           <p:cNvSpPr/>
           <p:nvPr/>
         </p:nvSpPr>
         <p:spPr>
           <a:xfrm>
-            <a:off x="457200" y="1920240"/>
-            <a:ext cx="3520440" cy="4114800"/>
+            <a:off x="457200" y="2606040"/>
+            <a:ext cx="3520440" cy="1051560"/>
           </a:xfrm>
           <a:prstGeom prst="roundRect">
             <a:avLst>
-              <a:gd name="adj" fmla="val 3896"/>
+              <a:gd name="adj" fmla="val 8696"/>
             </a:avLst>
           </a:prstGeom>
           <a:solidFill>
-            <a:srgbClr val="F4F6F9"/>
+            <a:srgbClr val="FFFFFF"/>
           </a:solidFill>
           <a:ln w="12700">
             <a:solidFill>
@@ -1956,31 +2194,18 @@
             </a:solidFill>
             <a:prstDash val="solid"/>
           </a:ln>
-        </p:spPr>
-      </p:sp>
-      <p:sp>
-        <p:nvSpPr>
-          <p:cNvPr id="4" name="Shape 2"/>
-          <p:cNvSpPr/>
-          <p:nvPr/>
-        </p:nvSpPr>
-        <p:spPr>
-          <a:xfrm>
-            <a:off x="777240" y="2240280"/>
-            <a:ext cx="914400" cy="914400"/>
-          </a:xfrm>
-          <a:prstGeom prst="ellipse">
-            <a:avLst/>
-          </a:prstGeom>
-          <a:solidFill>
-            <a:srgbClr val="4E8A2B"/>
-          </a:solidFill>
-          <a:ln/>
+          <a:effectLst>
+            <a:outerShdw sx="100000" sy="100000" kx="0" ky="0" algn="bl" rotWithShape="0" blurRad="76200" dist="25400" dir="5400000">
+              <a:srgbClr val="1F3260">
+                <a:alpha val="8000"/>
+              </a:srgbClr>
+            </a:outerShdw>
+          </a:effectLst>
         </p:spPr>
       </p:sp>
       <p:pic>
         <p:nvPicPr>
-          <p:cNvPr id="5" name="Image 0" descr="preencoded.png">    </p:cNvPr>
+          <p:cNvPr id="5" name="Image 0" descr="logos/l4.png">    </p:cNvPr>
           <p:cNvPicPr>
             <a:picLocks noChangeAspect="1"/>
           </p:cNvPicPr>
@@ -1988,14 +2213,13 @@
         </p:nvPicPr>
         <p:blipFill>
           <a:blip r:embed="rId1"/>
-          <a:stretch>
-            <a:fillRect/>
-          </a:stretch>
+          <a:srcRect l="0" r="0" t="0" b="0"/>
+          <a:stretch/>
         </p:blipFill>
         <p:spPr>
           <a:xfrm>
-            <a:off x="1005840" y="2468880"/>
-            <a:ext cx="457200" cy="457200"/>
+            <a:off x="822960" y="2743200"/>
+            <a:ext cx="2788920" cy="777240"/>
           </a:xfrm>
           <a:prstGeom prst="rect">
             <a:avLst/>
@@ -2004,130 +2228,22 @@
       </p:pic>
       <p:sp>
         <p:nvSpPr>
-          <p:cNvPr id="6" name="Text 3"/>
-          <p:cNvSpPr txBox="1"/>
-          <p:nvPr/>
-        </p:nvSpPr>
-        <p:spPr>
-          <a:xfrm>
-            <a:off x="2651760" y="2240280"/>
-            <a:ext cx="1005840" cy="731520"/>
-          </a:xfrm>
-          <a:prstGeom prst="rect">
-            <a:avLst/>
-          </a:prstGeom>
-          <a:noFill/>
-          <a:ln/>
-        </p:spPr>
-        <p:txBody>
-          <a:bodyPr wrap="square" lIns="0" tIns="0" rIns="0" bIns="0" rtlCol="0" anchor="ctr"/>
-          <a:lstStyle/>
-          <a:p>
-            <a:pPr algn="r" indent="0" marL="0">
-              <a:buNone/>
-            </a:pPr>
-            <a:r>
-              <a:rPr lang="en-US" sz="3600" b="1" dirty="0">
-                <a:solidFill>
-                  <a:srgbClr val="DCE3EC"/>
-                </a:solidFill>
-              </a:rPr>
-              <a:t>01</a:t>
-            </a:r>
-            <a:endParaRPr lang="en-US" sz="3600" dirty="0"/>
-          </a:p>
-        </p:txBody>
-      </p:sp>
-      <p:sp>
-        <p:nvSpPr>
-          <p:cNvPr id="7" name="Text 4"/>
-          <p:cNvSpPr txBox="1"/>
-          <p:nvPr/>
-        </p:nvSpPr>
-        <p:spPr>
-          <a:xfrm>
-            <a:off x="777240" y="3429000"/>
-            <a:ext cx="2926080" cy="1005840"/>
-          </a:xfrm>
-          <a:prstGeom prst="rect">
-            <a:avLst/>
-          </a:prstGeom>
-          <a:noFill/>
-          <a:ln/>
-        </p:spPr>
-        <p:txBody>
-          <a:bodyPr wrap="square" lIns="0" tIns="0" rIns="0" bIns="0" rtlCol="0" anchor="t"/>
-          <a:lstStyle/>
-          <a:p>
-            <a:pPr indent="0" marL="0">
-              <a:buNone/>
-            </a:pPr>
-            <a:r>
-              <a:rPr lang="en-US" sz="1800" b="1" dirty="0">
-                <a:solidFill>
-                  <a:srgbClr val="4E8A2B"/>
-                </a:solidFill>
-              </a:rPr>
-              <a:t>Si no hay ahorro, no hay gestión</a:t>
-            </a:r>
-            <a:endParaRPr lang="en-US" sz="1800" dirty="0"/>
-          </a:p>
-        </p:txBody>
-      </p:sp>
-      <p:sp>
-        <p:nvSpPr>
-          <p:cNvPr id="8" name="Text 5"/>
-          <p:cNvSpPr txBox="1"/>
-          <p:nvPr/>
-        </p:nvSpPr>
-        <p:spPr>
-          <a:xfrm>
-            <a:off x="777240" y="4526280"/>
-            <a:ext cx="2926080" cy="1280160"/>
-          </a:xfrm>
-          <a:prstGeom prst="rect">
-            <a:avLst/>
-          </a:prstGeom>
-          <a:noFill/>
-          <a:ln/>
-        </p:spPr>
-        <p:txBody>
-          <a:bodyPr wrap="square" lIns="0" tIns="0" rIns="0" bIns="0" rtlCol="0" anchor="t"/>
-          <a:lstStyle/>
-          <a:p>
-            <a:pPr indent="0" marL="0">
-              <a:buNone/>
-            </a:pPr>
-            <a:r>
-              <a:rPr lang="en-US" sz="1400" dirty="0">
-                <a:solidFill>
-                  <a:srgbClr val="5D6472"/>
-                </a:solidFill>
-              </a:rPr>
-              <a:t>Solo cambiamos tu contrato si te ahorra dinero. Si no hay ahorro, te lo decimos.</a:t>
-            </a:r>
-            <a:endParaRPr lang="en-US" sz="1400" dirty="0"/>
-          </a:p>
-        </p:txBody>
-      </p:sp>
-      <p:sp>
-        <p:nvSpPr>
-          <p:cNvPr id="9" name="Shape 6"/>
+          <p:cNvPr id="6" name="Shape 3"/>
           <p:cNvSpPr/>
           <p:nvPr/>
         </p:nvSpPr>
         <p:spPr>
           <a:xfrm>
-            <a:off x="4251960" y="1920240"/>
-            <a:ext cx="3520440" cy="4114800"/>
+            <a:off x="4251960" y="2606040"/>
+            <a:ext cx="3520440" cy="1051560"/>
           </a:xfrm>
           <a:prstGeom prst="roundRect">
             <a:avLst>
-              <a:gd name="adj" fmla="val 3896"/>
+              <a:gd name="adj" fmla="val 8696"/>
             </a:avLst>
           </a:prstGeom>
           <a:solidFill>
-            <a:srgbClr val="F4F6F9"/>
+            <a:srgbClr val="FFFFFF"/>
           </a:solidFill>
           <a:ln w="12700">
             <a:solidFill>
@@ -2135,31 +2251,18 @@
             </a:solidFill>
             <a:prstDash val="solid"/>
           </a:ln>
-        </p:spPr>
-      </p:sp>
-      <p:sp>
-        <p:nvSpPr>
-          <p:cNvPr id="10" name="Shape 7"/>
-          <p:cNvSpPr/>
-          <p:nvPr/>
-        </p:nvSpPr>
-        <p:spPr>
-          <a:xfrm>
-            <a:off x="4572000" y="2240280"/>
-            <a:ext cx="914400" cy="914400"/>
-          </a:xfrm>
-          <a:prstGeom prst="ellipse">
-            <a:avLst/>
-          </a:prstGeom>
-          <a:solidFill>
-            <a:srgbClr val="C46E17"/>
-          </a:solidFill>
-          <a:ln/>
+          <a:effectLst>
+            <a:outerShdw sx="100000" sy="100000" kx="0" ky="0" algn="bl" rotWithShape="0" blurRad="76200" dist="25400" dir="5400000">
+              <a:srgbClr val="1F3260">
+                <a:alpha val="8000"/>
+              </a:srgbClr>
+            </a:outerShdw>
+          </a:effectLst>
         </p:spPr>
       </p:sp>
       <p:pic>
         <p:nvPicPr>
-          <p:cNvPr id="11" name="Image 1" descr="preencoded.png">    </p:cNvPr>
+          <p:cNvPr id="7" name="Image 1" descr="logos/l3.png">    </p:cNvPr>
           <p:cNvPicPr>
             <a:picLocks noChangeAspect="1"/>
           </p:cNvPicPr>
@@ -2167,14 +2270,13 @@
         </p:nvPicPr>
         <p:blipFill>
           <a:blip r:embed="rId2"/>
-          <a:stretch>
-            <a:fillRect/>
-          </a:stretch>
+          <a:srcRect l="0" r="0" t="0" b="0"/>
+          <a:stretch/>
         </p:blipFill>
         <p:spPr>
           <a:xfrm>
-            <a:off x="4800600" y="2468880"/>
-            <a:ext cx="457200" cy="457200"/>
+            <a:off x="4617720" y="2743200"/>
+            <a:ext cx="2788920" cy="777240"/>
           </a:xfrm>
           <a:prstGeom prst="rect">
             <a:avLst/>
@@ -2183,130 +2285,22 @@
       </p:pic>
       <p:sp>
         <p:nvSpPr>
-          <p:cNvPr id="12" name="Text 8"/>
-          <p:cNvSpPr txBox="1"/>
-          <p:nvPr/>
-        </p:nvSpPr>
-        <p:spPr>
-          <a:xfrm>
-            <a:off x="6446520" y="2240280"/>
-            <a:ext cx="1005840" cy="731520"/>
-          </a:xfrm>
-          <a:prstGeom prst="rect">
-            <a:avLst/>
-          </a:prstGeom>
-          <a:noFill/>
-          <a:ln/>
-        </p:spPr>
-        <p:txBody>
-          <a:bodyPr wrap="square" lIns="0" tIns="0" rIns="0" bIns="0" rtlCol="0" anchor="ctr"/>
-          <a:lstStyle/>
-          <a:p>
-            <a:pPr algn="r" indent="0" marL="0">
-              <a:buNone/>
-            </a:pPr>
-            <a:r>
-              <a:rPr lang="en-US" sz="3600" b="1" dirty="0">
-                <a:solidFill>
-                  <a:srgbClr val="DCE3EC"/>
-                </a:solidFill>
-              </a:rPr>
-              <a:t>02</a:t>
-            </a:r>
-            <a:endParaRPr lang="en-US" sz="3600" dirty="0"/>
-          </a:p>
-        </p:txBody>
-      </p:sp>
-      <p:sp>
-        <p:nvSpPr>
-          <p:cNvPr id="13" name="Text 9"/>
-          <p:cNvSpPr txBox="1"/>
-          <p:nvPr/>
-        </p:nvSpPr>
-        <p:spPr>
-          <a:xfrm>
-            <a:off x="4572000" y="3429000"/>
-            <a:ext cx="2926080" cy="1005840"/>
-          </a:xfrm>
-          <a:prstGeom prst="rect">
-            <a:avLst/>
-          </a:prstGeom>
-          <a:noFill/>
-          <a:ln/>
-        </p:spPr>
-        <p:txBody>
-          <a:bodyPr wrap="square" lIns="0" tIns="0" rIns="0" bIns="0" rtlCol="0" anchor="t"/>
-          <a:lstStyle/>
-          <a:p>
-            <a:pPr indent="0" marL="0">
-              <a:buNone/>
-            </a:pPr>
-            <a:r>
-              <a:rPr lang="en-US" sz="1800" b="1" dirty="0">
-                <a:solidFill>
-                  <a:srgbClr val="C46E17"/>
-                </a:solidFill>
-              </a:rPr>
-              <a:t>Asesoramiento energético y en telecomunicaciones</a:t>
-            </a:r>
-            <a:endParaRPr lang="en-US" sz="1800" dirty="0"/>
-          </a:p>
-        </p:txBody>
-      </p:sp>
-      <p:sp>
-        <p:nvSpPr>
-          <p:cNvPr id="14" name="Text 10"/>
-          <p:cNvSpPr txBox="1"/>
-          <p:nvPr/>
-        </p:nvSpPr>
-        <p:spPr>
-          <a:xfrm>
-            <a:off x="4572000" y="4526280"/>
-            <a:ext cx="2926080" cy="1280160"/>
-          </a:xfrm>
-          <a:prstGeom prst="rect">
-            <a:avLst/>
-          </a:prstGeom>
-          <a:noFill/>
-          <a:ln/>
-        </p:spPr>
-        <p:txBody>
-          <a:bodyPr wrap="square" lIns="0" tIns="0" rIns="0" bIns="0" rtlCol="0" anchor="t"/>
-          <a:lstStyle/>
-          <a:p>
-            <a:pPr indent="0" marL="0">
-              <a:buNone/>
-            </a:pPr>
-            <a:r>
-              <a:rPr lang="en-US" sz="1400" dirty="0">
-                <a:solidFill>
-                  <a:srgbClr val="5D6472"/>
-                </a:solidFill>
-              </a:rPr>
-              <a:t>Luz, gas, fotovoltaica, baterías, fibra y móvil: un único asesor para todo.</a:t>
-            </a:r>
-            <a:endParaRPr lang="en-US" sz="1400" dirty="0"/>
-          </a:p>
-        </p:txBody>
-      </p:sp>
-      <p:sp>
-        <p:nvSpPr>
-          <p:cNvPr id="15" name="Shape 11"/>
+          <p:cNvPr id="8" name="Shape 4"/>
           <p:cNvSpPr/>
           <p:nvPr/>
         </p:nvSpPr>
         <p:spPr>
           <a:xfrm>
-            <a:off x="8046720" y="1920240"/>
-            <a:ext cx="3520440" cy="4114800"/>
+            <a:off x="8046720" y="2606040"/>
+            <a:ext cx="3520440" cy="1051560"/>
           </a:xfrm>
           <a:prstGeom prst="roundRect">
             <a:avLst>
-              <a:gd name="adj" fmla="val 3896"/>
+              <a:gd name="adj" fmla="val 8696"/>
             </a:avLst>
           </a:prstGeom>
           <a:solidFill>
-            <a:srgbClr val="F4F6F9"/>
+            <a:srgbClr val="FFFFFF"/>
           </a:solidFill>
           <a:ln w="12700">
             <a:solidFill>
@@ -2314,31 +2308,18 @@
             </a:solidFill>
             <a:prstDash val="solid"/>
           </a:ln>
-        </p:spPr>
-      </p:sp>
-      <p:sp>
-        <p:nvSpPr>
-          <p:cNvPr id="16" name="Shape 12"/>
-          <p:cNvSpPr/>
-          <p:nvPr/>
-        </p:nvSpPr>
-        <p:spPr>
-          <a:xfrm>
-            <a:off x="8366760" y="2240280"/>
-            <a:ext cx="914400" cy="914400"/>
-          </a:xfrm>
-          <a:prstGeom prst="ellipse">
-            <a:avLst/>
-          </a:prstGeom>
-          <a:solidFill>
-            <a:srgbClr val="1F3260"/>
-          </a:solidFill>
-          <a:ln/>
+          <a:effectLst>
+            <a:outerShdw sx="100000" sy="100000" kx="0" ky="0" algn="bl" rotWithShape="0" blurRad="76200" dist="25400" dir="5400000">
+              <a:srgbClr val="1F3260">
+                <a:alpha val="8000"/>
+              </a:srgbClr>
+            </a:outerShdw>
+          </a:effectLst>
         </p:spPr>
       </p:sp>
       <p:pic>
         <p:nvPicPr>
-          <p:cNvPr id="17" name="Image 2" descr="preencoded.png">    </p:cNvPr>
+          <p:cNvPr id="9" name="Image 2" descr="logos/l9.png">    </p:cNvPr>
           <p:cNvPicPr>
             <a:picLocks noChangeAspect="1"/>
           </p:cNvPicPr>
@@ -2346,14 +2327,13 @@
         </p:nvPicPr>
         <p:blipFill>
           <a:blip r:embed="rId3"/>
-          <a:stretch>
-            <a:fillRect/>
-          </a:stretch>
+          <a:srcRect l="0" r="0" t="0" b="0"/>
+          <a:stretch/>
         </p:blipFill>
         <p:spPr>
           <a:xfrm>
-            <a:off x="8595360" y="2468880"/>
-            <a:ext cx="457200" cy="457200"/>
+            <a:off x="8412480" y="2743200"/>
+            <a:ext cx="2788920" cy="777240"/>
           </a:xfrm>
           <a:prstGeom prst="rect">
             <a:avLst/>
@@ -2362,112 +2342,346 @@
       </p:pic>
       <p:sp>
         <p:nvSpPr>
-          <p:cNvPr id="18" name="Text 13"/>
-          <p:cNvSpPr txBox="1"/>
-          <p:nvPr/>
-        </p:nvSpPr>
-        <p:spPr>
-          <a:xfrm>
-            <a:off x="10241280" y="2240280"/>
-            <a:ext cx="1005840" cy="731520"/>
-          </a:xfrm>
-          <a:prstGeom prst="rect">
-            <a:avLst/>
-          </a:prstGeom>
-          <a:noFill/>
-          <a:ln/>
-        </p:spPr>
-        <p:txBody>
-          <a:bodyPr wrap="square" lIns="0" tIns="0" rIns="0" bIns="0" rtlCol="0" anchor="ctr"/>
-          <a:lstStyle/>
-          <a:p>
-            <a:pPr algn="r" indent="0" marL="0">
-              <a:buNone/>
-            </a:pPr>
-            <a:r>
-              <a:rPr lang="en-US" sz="3600" b="1" dirty="0">
-                <a:solidFill>
-                  <a:srgbClr val="DCE3EC"/>
-                </a:solidFill>
-              </a:rPr>
-              <a:t>03</a:t>
-            </a:r>
-            <a:endParaRPr lang="en-US" sz="3600" dirty="0"/>
-          </a:p>
-        </p:txBody>
-      </p:sp>
-      <p:sp>
-        <p:nvSpPr>
-          <p:cNvPr id="19" name="Text 14"/>
-          <p:cNvSpPr txBox="1"/>
-          <p:nvPr/>
-        </p:nvSpPr>
-        <p:spPr>
-          <a:xfrm>
-            <a:off x="8366760" y="3429000"/>
-            <a:ext cx="2926080" cy="1005840"/>
-          </a:xfrm>
-          <a:prstGeom prst="rect">
-            <a:avLst/>
-          </a:prstGeom>
-          <a:noFill/>
-          <a:ln/>
-        </p:spPr>
-        <p:txBody>
-          <a:bodyPr wrap="square" lIns="0" tIns="0" rIns="0" bIns="0" rtlCol="0" anchor="t"/>
-          <a:lstStyle/>
-          <a:p>
-            <a:pPr indent="0" marL="0">
-              <a:buNone/>
-            </a:pPr>
-            <a:r>
-              <a:rPr lang="en-US" sz="1800" b="1" dirty="0">
-                <a:solidFill>
-                  <a:srgbClr val="1F3260"/>
-                </a:solidFill>
-              </a:rPr>
-              <a:t>Contacto directo con distribución y canales principales</a:t>
-            </a:r>
-            <a:endParaRPr lang="en-US" sz="1800" dirty="0"/>
-          </a:p>
-        </p:txBody>
-      </p:sp>
-      <p:sp>
-        <p:nvSpPr>
-          <p:cNvPr id="20" name="Text 15"/>
-          <p:cNvSpPr txBox="1"/>
-          <p:nvPr/>
-        </p:nvSpPr>
-        <p:spPr>
-          <a:xfrm>
-            <a:off x="8366760" y="4526280"/>
-            <a:ext cx="2926080" cy="1280160"/>
-          </a:xfrm>
-          <a:prstGeom prst="rect">
-            <a:avLst/>
-          </a:prstGeom>
-          <a:noFill/>
-          <a:ln/>
-        </p:spPr>
-        <p:txBody>
-          <a:bodyPr wrap="square" lIns="0" tIns="0" rIns="0" bIns="0" rtlCol="0" anchor="t"/>
-          <a:lstStyle/>
-          <a:p>
-            <a:pPr indent="0" marL="0">
-              <a:buNone/>
-            </a:pPr>
-            <a:r>
-              <a:rPr lang="en-US" sz="1400" dirty="0">
-                <a:solidFill>
-                  <a:srgbClr val="5D6472"/>
-                </a:solidFill>
-              </a:rPr>
-              <a:t>Trato directo con distribuidoras, comercializadoras y operadoras: gestiones más rápidas.</a:t>
-            </a:r>
-            <a:endParaRPr lang="en-US" sz="1400" dirty="0"/>
-          </a:p>
-        </p:txBody>
-      </p:sp>
+          <p:cNvPr id="10" name="Shape 5"/>
+          <p:cNvSpPr/>
+          <p:nvPr/>
+        </p:nvSpPr>
+        <p:spPr>
+          <a:xfrm>
+            <a:off x="457200" y="3840480"/>
+            <a:ext cx="3520440" cy="1051560"/>
+          </a:xfrm>
+          <a:prstGeom prst="roundRect">
+            <a:avLst>
+              <a:gd name="adj" fmla="val 8696"/>
+            </a:avLst>
+          </a:prstGeom>
+          <a:solidFill>
+            <a:srgbClr val="FFFFFF"/>
+          </a:solidFill>
+          <a:ln w="12700">
+            <a:solidFill>
+              <a:srgbClr val="DCE3EC"/>
+            </a:solidFill>
+            <a:prstDash val="solid"/>
+          </a:ln>
+          <a:effectLst>
+            <a:outerShdw sx="100000" sy="100000" kx="0" ky="0" algn="bl" rotWithShape="0" blurRad="76200" dist="25400" dir="5400000">
+              <a:srgbClr val="1F3260">
+                <a:alpha val="8000"/>
+              </a:srgbClr>
+            </a:outerShdw>
+          </a:effectLst>
+        </p:spPr>
+      </p:sp>
+      <p:pic>
+        <p:nvPicPr>
+          <p:cNvPr id="11" name="Image 3" descr="logos/l5.png">    </p:cNvPr>
+          <p:cNvPicPr>
+            <a:picLocks noChangeAspect="1"/>
+          </p:cNvPicPr>
+          <p:nvPr/>
+        </p:nvPicPr>
+        <p:blipFill>
+          <a:blip r:embed="rId4"/>
+          <a:srcRect l="0" r="0" t="0" b="0"/>
+          <a:stretch/>
+        </p:blipFill>
+        <p:spPr>
+          <a:xfrm>
+            <a:off x="822960" y="3977640"/>
+            <a:ext cx="2788920" cy="777240"/>
+          </a:xfrm>
+          <a:prstGeom prst="rect">
+            <a:avLst/>
+          </a:prstGeom>
+        </p:spPr>
+      </p:pic>
+      <p:sp>
+        <p:nvSpPr>
+          <p:cNvPr id="12" name="Shape 6"/>
+          <p:cNvSpPr/>
+          <p:nvPr/>
+        </p:nvSpPr>
+        <p:spPr>
+          <a:xfrm>
+            <a:off x="4251960" y="3840480"/>
+            <a:ext cx="3520440" cy="1051560"/>
+          </a:xfrm>
+          <a:prstGeom prst="roundRect">
+            <a:avLst>
+              <a:gd name="adj" fmla="val 8696"/>
+            </a:avLst>
+          </a:prstGeom>
+          <a:solidFill>
+            <a:srgbClr val="FFFFFF"/>
+          </a:solidFill>
+          <a:ln w="12700">
+            <a:solidFill>
+              <a:srgbClr val="DCE3EC"/>
+            </a:solidFill>
+            <a:prstDash val="solid"/>
+          </a:ln>
+          <a:effectLst>
+            <a:outerShdw sx="100000" sy="100000" kx="0" ky="0" algn="bl" rotWithShape="0" blurRad="76200" dist="25400" dir="5400000">
+              <a:srgbClr val="1F3260">
+                <a:alpha val="8000"/>
+              </a:srgbClr>
+            </a:outerShdw>
+          </a:effectLst>
+        </p:spPr>
+      </p:sp>
+      <p:pic>
+        <p:nvPicPr>
+          <p:cNvPr id="13" name="Image 4" descr="logos/l13.png">    </p:cNvPr>
+          <p:cNvPicPr>
+            <a:picLocks noChangeAspect="1"/>
+          </p:cNvPicPr>
+          <p:nvPr/>
+        </p:nvPicPr>
+        <p:blipFill>
+          <a:blip r:embed="rId5"/>
+          <a:srcRect l="0" r="0" t="0" b="0"/>
+          <a:stretch/>
+        </p:blipFill>
+        <p:spPr>
+          <a:xfrm>
+            <a:off x="4617720" y="3977640"/>
+            <a:ext cx="2788920" cy="777240"/>
+          </a:xfrm>
+          <a:prstGeom prst="rect">
+            <a:avLst/>
+          </a:prstGeom>
+        </p:spPr>
+      </p:pic>
+      <p:sp>
+        <p:nvSpPr>
+          <p:cNvPr id="14" name="Shape 7"/>
+          <p:cNvSpPr/>
+          <p:nvPr/>
+        </p:nvSpPr>
+        <p:spPr>
+          <a:xfrm>
+            <a:off x="8046720" y="3840480"/>
+            <a:ext cx="3520440" cy="1051560"/>
+          </a:xfrm>
+          <a:prstGeom prst="roundRect">
+            <a:avLst>
+              <a:gd name="adj" fmla="val 8696"/>
+            </a:avLst>
+          </a:prstGeom>
+          <a:solidFill>
+            <a:srgbClr val="FFFFFF"/>
+          </a:solidFill>
+          <a:ln w="12700">
+            <a:solidFill>
+              <a:srgbClr val="DCE3EC"/>
+            </a:solidFill>
+            <a:prstDash val="solid"/>
+          </a:ln>
+          <a:effectLst>
+            <a:outerShdw sx="100000" sy="100000" kx="0" ky="0" algn="bl" rotWithShape="0" blurRad="76200" dist="25400" dir="5400000">
+              <a:srgbClr val="1F3260">
+                <a:alpha val="8000"/>
+              </a:srgbClr>
+            </a:outerShdw>
+          </a:effectLst>
+        </p:spPr>
+      </p:sp>
+      <p:pic>
+        <p:nvPicPr>
+          <p:cNvPr id="15" name="Image 5" descr="logos/l7.png">    </p:cNvPr>
+          <p:cNvPicPr>
+            <a:picLocks noChangeAspect="1"/>
+          </p:cNvPicPr>
+          <p:nvPr/>
+        </p:nvPicPr>
+        <p:blipFill>
+          <a:blip r:embed="rId6"/>
+          <a:srcRect l="0" r="0" t="0" b="0"/>
+          <a:stretch/>
+        </p:blipFill>
+        <p:spPr>
+          <a:xfrm>
+            <a:off x="8412480" y="3977640"/>
+            <a:ext cx="2788920" cy="777240"/>
+          </a:xfrm>
+          <a:prstGeom prst="rect">
+            <a:avLst/>
+          </a:prstGeom>
+        </p:spPr>
+      </p:pic>
+      <p:sp>
+        <p:nvSpPr>
+          <p:cNvPr id="16" name="Shape 8"/>
+          <p:cNvSpPr/>
+          <p:nvPr/>
+        </p:nvSpPr>
+        <p:spPr>
+          <a:xfrm>
+            <a:off x="457200" y="5074920"/>
+            <a:ext cx="3520440" cy="1051560"/>
+          </a:xfrm>
+          <a:prstGeom prst="roundRect">
+            <a:avLst>
+              <a:gd name="adj" fmla="val 8696"/>
+            </a:avLst>
+          </a:prstGeom>
+          <a:solidFill>
+            <a:srgbClr val="FFFFFF"/>
+          </a:solidFill>
+          <a:ln w="12700">
+            <a:solidFill>
+              <a:srgbClr val="DCE3EC"/>
+            </a:solidFill>
+            <a:prstDash val="solid"/>
+          </a:ln>
+          <a:effectLst>
+            <a:outerShdw sx="100000" sy="100000" kx="0" ky="0" algn="bl" rotWithShape="0" blurRad="76200" dist="25400" dir="5400000">
+              <a:srgbClr val="1F3260">
+                <a:alpha val="8000"/>
+              </a:srgbClr>
+            </a:outerShdw>
+          </a:effectLst>
+        </p:spPr>
+      </p:sp>
+      <p:pic>
+        <p:nvPicPr>
+          <p:cNvPr id="17" name="Image 6" descr="logos/l10.png">    </p:cNvPr>
+          <p:cNvPicPr>
+            <a:picLocks noChangeAspect="1"/>
+          </p:cNvPicPr>
+          <p:nvPr/>
+        </p:nvPicPr>
+        <p:blipFill>
+          <a:blip r:embed="rId7"/>
+          <a:srcRect l="0" r="0" t="0" b="0"/>
+          <a:stretch/>
+        </p:blipFill>
+        <p:spPr>
+          <a:xfrm>
+            <a:off x="822960" y="5212080"/>
+            <a:ext cx="2788920" cy="777240"/>
+          </a:xfrm>
+          <a:prstGeom prst="rect">
+            <a:avLst/>
+          </a:prstGeom>
+        </p:spPr>
+      </p:pic>
+      <p:sp>
+        <p:nvSpPr>
+          <p:cNvPr id="18" name="Shape 9"/>
+          <p:cNvSpPr/>
+          <p:nvPr/>
+        </p:nvSpPr>
+        <p:spPr>
+          <a:xfrm>
+            <a:off x="4251960" y="5074920"/>
+            <a:ext cx="3520440" cy="1051560"/>
+          </a:xfrm>
+          <a:prstGeom prst="roundRect">
+            <a:avLst>
+              <a:gd name="adj" fmla="val 8696"/>
+            </a:avLst>
+          </a:prstGeom>
+          <a:solidFill>
+            <a:srgbClr val="FFFFFF"/>
+          </a:solidFill>
+          <a:ln w="12700">
+            <a:solidFill>
+              <a:srgbClr val="DCE3EC"/>
+            </a:solidFill>
+            <a:prstDash val="solid"/>
+          </a:ln>
+          <a:effectLst>
+            <a:outerShdw sx="100000" sy="100000" kx="0" ky="0" algn="bl" rotWithShape="0" blurRad="76200" dist="25400" dir="5400000">
+              <a:srgbClr val="1F3260">
+                <a:alpha val="8000"/>
+              </a:srgbClr>
+            </a:outerShdw>
+          </a:effectLst>
+        </p:spPr>
+      </p:sp>
+      <p:pic>
+        <p:nvPicPr>
+          <p:cNvPr id="19" name="Image 7" descr="logos/l12.png">    </p:cNvPr>
+          <p:cNvPicPr>
+            <a:picLocks noChangeAspect="1"/>
+          </p:cNvPicPr>
+          <p:nvPr/>
+        </p:nvPicPr>
+        <p:blipFill>
+          <a:blip r:embed="rId8"/>
+          <a:srcRect l="0" r="0" t="0" b="0"/>
+          <a:stretch/>
+        </p:blipFill>
+        <p:spPr>
+          <a:xfrm>
+            <a:off x="4617720" y="5212080"/>
+            <a:ext cx="2788920" cy="777240"/>
+          </a:xfrm>
+          <a:prstGeom prst="rect">
+            <a:avLst/>
+          </a:prstGeom>
+        </p:spPr>
+      </p:pic>
+      <p:sp>
+        <p:nvSpPr>
+          <p:cNvPr id="20" name="Shape 10"/>
+          <p:cNvSpPr/>
+          <p:nvPr/>
+        </p:nvSpPr>
+        <p:spPr>
+          <a:xfrm>
+            <a:off x="8046720" y="5074920"/>
+            <a:ext cx="3520440" cy="1051560"/>
+          </a:xfrm>
+          <a:prstGeom prst="roundRect">
+            <a:avLst>
+              <a:gd name="adj" fmla="val 8696"/>
+            </a:avLst>
+          </a:prstGeom>
+          <a:solidFill>
+            <a:srgbClr val="FFFFFF"/>
+          </a:solidFill>
+          <a:ln w="12700">
+            <a:solidFill>
+              <a:srgbClr val="DCE3EC"/>
+            </a:solidFill>
+            <a:prstDash val="solid"/>
+          </a:ln>
+          <a:effectLst>
+            <a:outerShdw sx="100000" sy="100000" kx="0" ky="0" algn="bl" rotWithShape="0" blurRad="76200" dist="25400" dir="5400000">
+              <a:srgbClr val="1F3260">
+                <a:alpha val="8000"/>
+              </a:srgbClr>
+            </a:outerShdw>
+          </a:effectLst>
+        </p:spPr>
+      </p:sp>
+      <p:pic>
+        <p:nvPicPr>
+          <p:cNvPr id="21" name="Image 8" descr="logos/l14.png">    </p:cNvPr>
+          <p:cNvPicPr>
+            <a:picLocks noChangeAspect="1"/>
+          </p:cNvPicPr>
+          <p:nvPr/>
+        </p:nvPicPr>
+        <p:blipFill>
+          <a:blip r:embed="rId9"/>
+          <a:srcRect l="0" r="0" t="0" b="0"/>
+          <a:stretch/>
+        </p:blipFill>
+        <p:spPr>
+          <a:xfrm>
+            <a:off x="8412480" y="5212080"/>
+            <a:ext cx="2788920" cy="777240"/>
+          </a:xfrm>
+          <a:prstGeom prst="rect">
+            <a:avLst/>
+          </a:prstGeom>
+        </p:spPr>
+      </p:pic>
       <p:sp>
         <p:nvSpPr>
           <p:cNvPr id="25" name="Slide Number Placeholder 0"/>
@@ -2540,14 +2754,123 @@
       </p:grpSpPr>
       <p:sp>
         <p:nvSpPr>
-          <p:cNvPr id="2" name="Text 0"/>
+          <p:cNvPr id="2" name="Text 1"/>
+          <p:cNvSpPr/>
+          <p:nvPr>
+            <p:ph idx="102" type="title" hasCustomPrompt="1"/>
+          </p:nvPr>
+        </p:nvSpPr>
+        <p:spPr>
+          <a:xfrm>
+            <a:off x="457200" y="868680"/>
+            <a:ext cx="11247120" cy="731520"/>
+          </a:xfrm>
+          <a:prstGeom prst="rect">
+            <a:avLst/>
+          </a:prstGeom>
+          <a:noFill/>
+          <a:ln/>
+        </p:spPr>
+        <p:txBody>
+          <a:bodyPr wrap="square" rtlCol="0" anchor="ctr"/>
+          <a:lstStyle/>
+          <a:p>
+            <a:pPr algn="l" indent="0" marL="0">
+              <a:buNone/>
+            </a:pPr>
+            <a:r>
+              <a:rPr lang="en-US" sz="3000" b="1" dirty="0">
+                <a:solidFill>
+                  <a:schemeClr val="tx2"/>
+                </a:solidFill>
+              </a:rPr>
+              <a:t>Las 3 bases de nuestro negocio</a:t>
+            </a:r>
+            <a:endParaRPr lang="en-US" sz="3000" dirty="0"/>
+          </a:p>
+        </p:txBody>
+      </p:sp>
+      <p:sp>
+        <p:nvSpPr>
+          <p:cNvPr id="3" name="Shape 1"/>
+          <p:cNvSpPr/>
+          <p:nvPr/>
+        </p:nvSpPr>
+        <p:spPr>
+          <a:xfrm>
+            <a:off x="457200" y="1920240"/>
+            <a:ext cx="3520440" cy="4114800"/>
+          </a:xfrm>
+          <a:prstGeom prst="roundRect">
+            <a:avLst>
+              <a:gd name="adj" fmla="val 3896"/>
+            </a:avLst>
+          </a:prstGeom>
+          <a:solidFill>
+            <a:srgbClr val="F4F6F9"/>
+          </a:solidFill>
+          <a:ln w="12700">
+            <a:solidFill>
+              <a:srgbClr val="DCE3EC"/>
+            </a:solidFill>
+            <a:prstDash val="solid"/>
+          </a:ln>
+        </p:spPr>
+      </p:sp>
+      <p:sp>
+        <p:nvSpPr>
+          <p:cNvPr id="4" name="Shape 2"/>
+          <p:cNvSpPr/>
+          <p:nvPr/>
+        </p:nvSpPr>
+        <p:spPr>
+          <a:xfrm>
+            <a:off x="777240" y="2240280"/>
+            <a:ext cx="914400" cy="914400"/>
+          </a:xfrm>
+          <a:prstGeom prst="ellipse">
+            <a:avLst/>
+          </a:prstGeom>
+          <a:solidFill>
+            <a:srgbClr val="4E8A2B"/>
+          </a:solidFill>
+          <a:ln/>
+        </p:spPr>
+      </p:sp>
+      <p:pic>
+        <p:nvPicPr>
+          <p:cNvPr id="5" name="Image 0" descr="preencoded.png">    </p:cNvPr>
+          <p:cNvPicPr>
+            <a:picLocks noChangeAspect="1"/>
+          </p:cNvPicPr>
+          <p:nvPr/>
+        </p:nvPicPr>
+        <p:blipFill>
+          <a:blip r:embed="rId1"/>
+          <a:stretch>
+            <a:fillRect/>
+          </a:stretch>
+        </p:blipFill>
+        <p:spPr>
+          <a:xfrm>
+            <a:off x="1005840" y="2468880"/>
+            <a:ext cx="457200" cy="457200"/>
+          </a:xfrm>
+          <a:prstGeom prst="rect">
+            <a:avLst/>
+          </a:prstGeom>
+        </p:spPr>
+      </p:pic>
+      <p:sp>
+        <p:nvSpPr>
+          <p:cNvPr id="6" name="Text 3"/>
           <p:cNvSpPr txBox="1"/>
           <p:nvPr/>
         </p:nvSpPr>
         <p:spPr>
           <a:xfrm>
-            <a:off x="1097280" y="1280160"/>
-            <a:ext cx="5486400" cy="365760"/>
+            <a:off x="2651760" y="2240280"/>
+            <a:ext cx="1005840" cy="731520"/>
           </a:xfrm>
           <a:prstGeom prst="rect">
             <a:avLst/>
@@ -2559,16 +2882,88 @@
           <a:bodyPr wrap="square" lIns="0" tIns="0" rIns="0" bIns="0" rtlCol="0" anchor="ctr"/>
           <a:lstStyle/>
           <a:p>
-            <a:pPr indent="0" marL="0">
-              <a:buNone/>
-            </a:pPr>
-            <a:r>
-              <a:rPr lang="en-US" sz="1400" b="1" spc="400" kern="0" dirty="0">
-                <a:solidFill>
-                  <a:srgbClr val="F2C230"/>
-                </a:solidFill>
-              </a:rPr>
-              <a:t>BASE 01</a:t>
+            <a:pPr algn="r" indent="0" marL="0">
+              <a:buNone/>
+            </a:pPr>
+            <a:r>
+              <a:rPr lang="en-US" sz="3600" b="1" dirty="0">
+                <a:solidFill>
+                  <a:srgbClr val="DCE3EC"/>
+                </a:solidFill>
+              </a:rPr>
+              <a:t>01</a:t>
+            </a:r>
+            <a:endParaRPr lang="en-US" sz="3600" dirty="0"/>
+          </a:p>
+        </p:txBody>
+      </p:sp>
+      <p:sp>
+        <p:nvSpPr>
+          <p:cNvPr id="7" name="Text 4"/>
+          <p:cNvSpPr txBox="1"/>
+          <p:nvPr/>
+        </p:nvSpPr>
+        <p:spPr>
+          <a:xfrm>
+            <a:off x="777240" y="3429000"/>
+            <a:ext cx="2926080" cy="1005840"/>
+          </a:xfrm>
+          <a:prstGeom prst="rect">
+            <a:avLst/>
+          </a:prstGeom>
+          <a:noFill/>
+          <a:ln/>
+        </p:spPr>
+        <p:txBody>
+          <a:bodyPr wrap="square" lIns="0" tIns="0" rIns="0" bIns="0" rtlCol="0" anchor="t"/>
+          <a:lstStyle/>
+          <a:p>
+            <a:pPr indent="0" marL="0">
+              <a:buNone/>
+            </a:pPr>
+            <a:r>
+              <a:rPr lang="en-US" sz="1800" b="1" dirty="0">
+                <a:solidFill>
+                  <a:srgbClr val="4E8A2B"/>
+                </a:solidFill>
+              </a:rPr>
+              <a:t>Si no hay ahorro, no hay gestión</a:t>
+            </a:r>
+            <a:endParaRPr lang="en-US" sz="1800" dirty="0"/>
+          </a:p>
+        </p:txBody>
+      </p:sp>
+      <p:sp>
+        <p:nvSpPr>
+          <p:cNvPr id="8" name="Text 5"/>
+          <p:cNvSpPr txBox="1"/>
+          <p:nvPr/>
+        </p:nvSpPr>
+        <p:spPr>
+          <a:xfrm>
+            <a:off x="777240" y="4526280"/>
+            <a:ext cx="2926080" cy="1280160"/>
+          </a:xfrm>
+          <a:prstGeom prst="rect">
+            <a:avLst/>
+          </a:prstGeom>
+          <a:noFill/>
+          <a:ln/>
+        </p:spPr>
+        <p:txBody>
+          <a:bodyPr wrap="square" lIns="0" tIns="0" rIns="0" bIns="0" rtlCol="0" anchor="t"/>
+          <a:lstStyle/>
+          <a:p>
+            <a:pPr indent="0" marL="0">
+              <a:buNone/>
+            </a:pPr>
+            <a:r>
+              <a:rPr lang="en-US" sz="1400" dirty="0">
+                <a:solidFill>
+                  <a:srgbClr val="5D6472"/>
+                </a:solidFill>
+              </a:rPr>
+              <a:t>Solo cambiamos tu contrato si te ahorra dinero. Si no hay ahorro, te lo decimos.</a:t>
             </a:r>
             <a:endParaRPr lang="en-US" sz="1400" dirty="0"/>
           </a:p>
@@ -2576,14 +2971,85 @@
       </p:sp>
       <p:sp>
         <p:nvSpPr>
-          <p:cNvPr id="3" name="Text 1"/>
+          <p:cNvPr id="9" name="Shape 6"/>
+          <p:cNvSpPr/>
+          <p:nvPr/>
+        </p:nvSpPr>
+        <p:spPr>
+          <a:xfrm>
+            <a:off x="4251960" y="1920240"/>
+            <a:ext cx="3520440" cy="4114800"/>
+          </a:xfrm>
+          <a:prstGeom prst="roundRect">
+            <a:avLst>
+              <a:gd name="adj" fmla="val 3896"/>
+            </a:avLst>
+          </a:prstGeom>
+          <a:solidFill>
+            <a:srgbClr val="F4F6F9"/>
+          </a:solidFill>
+          <a:ln w="12700">
+            <a:solidFill>
+              <a:srgbClr val="DCE3EC"/>
+            </a:solidFill>
+            <a:prstDash val="solid"/>
+          </a:ln>
+        </p:spPr>
+      </p:sp>
+      <p:sp>
+        <p:nvSpPr>
+          <p:cNvPr id="10" name="Shape 7"/>
+          <p:cNvSpPr/>
+          <p:nvPr/>
+        </p:nvSpPr>
+        <p:spPr>
+          <a:xfrm>
+            <a:off x="4572000" y="2240280"/>
+            <a:ext cx="914400" cy="914400"/>
+          </a:xfrm>
+          <a:prstGeom prst="ellipse">
+            <a:avLst/>
+          </a:prstGeom>
+          <a:solidFill>
+            <a:srgbClr val="C46E17"/>
+          </a:solidFill>
+          <a:ln/>
+        </p:spPr>
+      </p:sp>
+      <p:pic>
+        <p:nvPicPr>
+          <p:cNvPr id="11" name="Image 1" descr="preencoded.png">    </p:cNvPr>
+          <p:cNvPicPr>
+            <a:picLocks noChangeAspect="1"/>
+          </p:cNvPicPr>
+          <p:nvPr/>
+        </p:nvPicPr>
+        <p:blipFill>
+          <a:blip r:embed="rId2"/>
+          <a:stretch>
+            <a:fillRect/>
+          </a:stretch>
+        </p:blipFill>
+        <p:spPr>
+          <a:xfrm>
+            <a:off x="4800600" y="2468880"/>
+            <a:ext cx="457200" cy="457200"/>
+          </a:xfrm>
+          <a:prstGeom prst="rect">
+            <a:avLst/>
+          </a:prstGeom>
+        </p:spPr>
+      </p:pic>
+      <p:sp>
+        <p:nvSpPr>
+          <p:cNvPr id="12" name="Text 8"/>
           <p:cNvSpPr txBox="1"/>
           <p:nvPr/>
         </p:nvSpPr>
         <p:spPr>
           <a:xfrm>
-            <a:off x="1097280" y="1737360"/>
-            <a:ext cx="10058400" cy="2011680"/>
+            <a:off x="6446520" y="2240280"/>
+            <a:ext cx="1005840" cy="731520"/>
           </a:xfrm>
           <a:prstGeom prst="rect">
             <a:avLst/>
@@ -2595,67 +3061,174 @@
           <a:bodyPr wrap="square" lIns="0" tIns="0" rIns="0" bIns="0" rtlCol="0" anchor="ctr"/>
           <a:lstStyle/>
           <a:p>
-            <a:pPr indent="0" marL="0">
-              <a:buNone/>
-            </a:pPr>
-            <a:r>
-              <a:rPr lang="en-US" sz="5400" b="1" dirty="0">
-                <a:solidFill>
-                  <a:srgbClr val="FFFFFF"/>
-                </a:solidFill>
-              </a:rPr>
-              <a:t>Si no hay </a:t>
-            </a:r>
-            <a:pPr indent="0" marL="0">
-              <a:buNone/>
-            </a:pPr>
-            <a:r>
-              <a:rPr lang="en-US" sz="5400" b="1" dirty="0">
-                <a:solidFill>
-                  <a:srgbClr val="F2C230"/>
-                </a:solidFill>
-              </a:rPr>
-              <a:t>ahorro</a:t>
-            </a:r>
-            <a:pPr indent="0" marL="0">
-              <a:buNone/>
-            </a:pPr>
-            <a:r>
-              <a:rPr lang="en-US" sz="5400" b="1" dirty="0">
-                <a:solidFill>
-                  <a:srgbClr val="FFFFFF"/>
-                </a:solidFill>
-              </a:rPr>
-              <a:t>,</a:t>
-            </a:r>
-            <a:endParaRPr lang="en-US" sz="5400" dirty="0"/>
-          </a:p>
-          <a:p>
-            <a:pPr indent="0" marL="0">
-              <a:buNone/>
-            </a:pPr>
-            <a:r>
-              <a:rPr lang="en-US" sz="5400" b="1" dirty="0">
-                <a:solidFill>
-                  <a:srgbClr val="FFFFFF"/>
-                </a:solidFill>
-              </a:rPr>
-              <a:t>no hay gestión</a:t>
-            </a:r>
-            <a:endParaRPr lang="en-US" sz="5400" dirty="0"/>
-          </a:p>
-        </p:txBody>
-      </p:sp>
-      <p:sp>
-        <p:nvSpPr>
-          <p:cNvPr id="4" name="Text 2"/>
+            <a:pPr algn="r" indent="0" marL="0">
+              <a:buNone/>
+            </a:pPr>
+            <a:r>
+              <a:rPr lang="en-US" sz="3600" b="1" dirty="0">
+                <a:solidFill>
+                  <a:srgbClr val="DCE3EC"/>
+                </a:solidFill>
+              </a:rPr>
+              <a:t>02</a:t>
+            </a:r>
+            <a:endParaRPr lang="en-US" sz="3600" dirty="0"/>
+          </a:p>
+        </p:txBody>
+      </p:sp>
+      <p:sp>
+        <p:nvSpPr>
+          <p:cNvPr id="13" name="Text 9"/>
           <p:cNvSpPr txBox="1"/>
           <p:nvPr/>
         </p:nvSpPr>
         <p:spPr>
           <a:xfrm>
-            <a:off x="1097280" y="3931920"/>
-            <a:ext cx="3200400" cy="411480"/>
+            <a:off x="4572000" y="3429000"/>
+            <a:ext cx="2926080" cy="1005840"/>
+          </a:xfrm>
+          <a:prstGeom prst="rect">
+            <a:avLst/>
+          </a:prstGeom>
+          <a:noFill/>
+          <a:ln/>
+        </p:spPr>
+        <p:txBody>
+          <a:bodyPr wrap="square" lIns="0" tIns="0" rIns="0" bIns="0" rtlCol="0" anchor="t"/>
+          <a:lstStyle/>
+          <a:p>
+            <a:pPr indent="0" marL="0">
+              <a:buNone/>
+            </a:pPr>
+            <a:r>
+              <a:rPr lang="en-US" sz="1800" b="1" dirty="0">
+                <a:solidFill>
+                  <a:srgbClr val="C46E17"/>
+                </a:solidFill>
+              </a:rPr>
+              <a:t>Asesoramiento energético y en telecomunicaciones</a:t>
+            </a:r>
+            <a:endParaRPr lang="en-US" sz="1800" dirty="0"/>
+          </a:p>
+        </p:txBody>
+      </p:sp>
+      <p:sp>
+        <p:nvSpPr>
+          <p:cNvPr id="14" name="Text 10"/>
+          <p:cNvSpPr txBox="1"/>
+          <p:nvPr/>
+        </p:nvSpPr>
+        <p:spPr>
+          <a:xfrm>
+            <a:off x="4572000" y="4526280"/>
+            <a:ext cx="2926080" cy="1280160"/>
+          </a:xfrm>
+          <a:prstGeom prst="rect">
+            <a:avLst/>
+          </a:prstGeom>
+          <a:noFill/>
+          <a:ln/>
+        </p:spPr>
+        <p:txBody>
+          <a:bodyPr wrap="square" lIns="0" tIns="0" rIns="0" bIns="0" rtlCol="0" anchor="t"/>
+          <a:lstStyle/>
+          <a:p>
+            <a:pPr indent="0" marL="0">
+              <a:buNone/>
+            </a:pPr>
+            <a:r>
+              <a:rPr lang="en-US" sz="1400" dirty="0">
+                <a:solidFill>
+                  <a:srgbClr val="5D6472"/>
+                </a:solidFill>
+              </a:rPr>
+              <a:t>Luz, gas, fotovoltaica, baterías, fibra y móvil: un único asesor para todo.</a:t>
+            </a:r>
+            <a:endParaRPr lang="en-US" sz="1400" dirty="0"/>
+          </a:p>
+        </p:txBody>
+      </p:sp>
+      <p:sp>
+        <p:nvSpPr>
+          <p:cNvPr id="15" name="Shape 11"/>
+          <p:cNvSpPr/>
+          <p:nvPr/>
+        </p:nvSpPr>
+        <p:spPr>
+          <a:xfrm>
+            <a:off x="8046720" y="1920240"/>
+            <a:ext cx="3520440" cy="4114800"/>
+          </a:xfrm>
+          <a:prstGeom prst="roundRect">
+            <a:avLst>
+              <a:gd name="adj" fmla="val 3896"/>
+            </a:avLst>
+          </a:prstGeom>
+          <a:solidFill>
+            <a:srgbClr val="F4F6F9"/>
+          </a:solidFill>
+          <a:ln w="12700">
+            <a:solidFill>
+              <a:srgbClr val="DCE3EC"/>
+            </a:solidFill>
+            <a:prstDash val="solid"/>
+          </a:ln>
+        </p:spPr>
+      </p:sp>
+      <p:sp>
+        <p:nvSpPr>
+          <p:cNvPr id="16" name="Shape 12"/>
+          <p:cNvSpPr/>
+          <p:nvPr/>
+        </p:nvSpPr>
+        <p:spPr>
+          <a:xfrm>
+            <a:off x="8366760" y="2240280"/>
+            <a:ext cx="914400" cy="914400"/>
+          </a:xfrm>
+          <a:prstGeom prst="ellipse">
+            <a:avLst/>
+          </a:prstGeom>
+          <a:solidFill>
+            <a:srgbClr val="1F3260"/>
+          </a:solidFill>
+          <a:ln/>
+        </p:spPr>
+      </p:sp>
+      <p:pic>
+        <p:nvPicPr>
+          <p:cNvPr id="17" name="Image 2" descr="preencoded.png">    </p:cNvPr>
+          <p:cNvPicPr>
+            <a:picLocks noChangeAspect="1"/>
+          </p:cNvPicPr>
+          <p:nvPr/>
+        </p:nvPicPr>
+        <p:blipFill>
+          <a:blip r:embed="rId3"/>
+          <a:stretch>
+            <a:fillRect/>
+          </a:stretch>
+        </p:blipFill>
+        <p:spPr>
+          <a:xfrm>
+            <a:off x="8595360" y="2468880"/>
+            <a:ext cx="457200" cy="457200"/>
+          </a:xfrm>
+          <a:prstGeom prst="rect">
+            <a:avLst/>
+          </a:prstGeom>
+        </p:spPr>
+      </p:pic>
+      <p:sp>
+        <p:nvSpPr>
+          <p:cNvPr id="18" name="Text 13"/>
+          <p:cNvSpPr txBox="1"/>
+          <p:nvPr/>
+        </p:nvSpPr>
+        <p:spPr>
+          <a:xfrm>
+            <a:off x="10241280" y="2240280"/>
+            <a:ext cx="1005840" cy="731520"/>
           </a:xfrm>
           <a:prstGeom prst="rect">
             <a:avLst/>
@@ -2667,16 +3240,52 @@
           <a:bodyPr wrap="square" lIns="0" tIns="0" rIns="0" bIns="0" rtlCol="0" anchor="ctr"/>
           <a:lstStyle/>
           <a:p>
+            <a:pPr algn="r" indent="0" marL="0">
+              <a:buNone/>
+            </a:pPr>
+            <a:r>
+              <a:rPr lang="en-US" sz="3600" b="1" dirty="0">
+                <a:solidFill>
+                  <a:srgbClr val="DCE3EC"/>
+                </a:solidFill>
+              </a:rPr>
+              <a:t>03</a:t>
+            </a:r>
+            <a:endParaRPr lang="en-US" sz="3600" dirty="0"/>
+          </a:p>
+        </p:txBody>
+      </p:sp>
+      <p:sp>
+        <p:nvSpPr>
+          <p:cNvPr id="19" name="Text 14"/>
+          <p:cNvSpPr txBox="1"/>
+          <p:nvPr/>
+        </p:nvSpPr>
+        <p:spPr>
+          <a:xfrm>
+            <a:off x="8366760" y="3429000"/>
+            <a:ext cx="2926080" cy="1005840"/>
+          </a:xfrm>
+          <a:prstGeom prst="rect">
+            <a:avLst/>
+          </a:prstGeom>
+          <a:noFill/>
+          <a:ln/>
+        </p:spPr>
+        <p:txBody>
+          <a:bodyPr wrap="square" lIns="0" tIns="0" rIns="0" bIns="0" rtlCol="0" anchor="t"/>
+          <a:lstStyle/>
+          <a:p>
             <a:pPr indent="0" marL="0">
               <a:buNone/>
             </a:pPr>
             <a:r>
               <a:rPr lang="en-US" sz="1800" b="1" dirty="0">
                 <a:solidFill>
-                  <a:srgbClr val="9CCB5A"/>
-                </a:solidFill>
-              </a:rPr>
-              <a:t>Estudio gratuito</a:t>
+                  <a:srgbClr val="1F3260"/>
+                </a:solidFill>
+              </a:rPr>
+              <a:t>Contacto directo con distribución y canales principales</a:t>
             </a:r>
             <a:endParaRPr lang="en-US" sz="1800" dirty="0"/>
           </a:p>
@@ -2684,14 +3293,14 @@
       </p:sp>
       <p:sp>
         <p:nvSpPr>
-          <p:cNvPr id="5" name="Text 3"/>
+          <p:cNvPr id="20" name="Text 15"/>
           <p:cNvSpPr txBox="1"/>
           <p:nvPr/>
         </p:nvSpPr>
         <p:spPr>
           <a:xfrm>
-            <a:off x="1097280" y="4343400"/>
-            <a:ext cx="2926080" cy="731520"/>
+            <a:off x="8366760" y="4526280"/>
+            <a:ext cx="2926080" cy="1280160"/>
           </a:xfrm>
           <a:prstGeom prst="rect">
             <a:avLst/>
@@ -2709,10 +3318,10 @@
             <a:r>
               <a:rPr lang="en-US" sz="1400" dirty="0">
                 <a:solidFill>
-                  <a:srgbClr val="DCE3EC"/>
-                </a:solidFill>
-              </a:rPr>
-              <a:t>Analizamos tus facturas y tu potencia contratada.</a:t>
+                  <a:srgbClr val="5D6472"/>
+                </a:solidFill>
+              </a:rPr>
+              <a:t>Trato directo con distribuidoras, comercializadoras y operadoras: gestiones más rápidas.</a:t>
             </a:r>
             <a:endParaRPr lang="en-US" sz="1400" dirty="0"/>
           </a:p>
@@ -2720,145 +3329,46 @@
       </p:sp>
       <p:sp>
         <p:nvSpPr>
-          <p:cNvPr id="6" name="Text 4"/>
-          <p:cNvSpPr txBox="1"/>
-          <p:nvPr/>
-        </p:nvSpPr>
-        <p:spPr>
-          <a:xfrm>
-            <a:off x="4389120" y="3931920"/>
-            <a:ext cx="3200400" cy="411480"/>
-          </a:xfrm>
-          <a:prstGeom prst="rect">
-            <a:avLst/>
-          </a:prstGeom>
-          <a:noFill/>
-          <a:ln/>
-        </p:spPr>
-        <p:txBody>
-          <a:bodyPr wrap="square" lIns="0" tIns="0" rIns="0" bIns="0" rtlCol="0" anchor="ctr"/>
-          <a:lstStyle/>
-          <a:p>
-            <a:pPr indent="0" marL="0">
-              <a:buNone/>
-            </a:pPr>
-            <a:r>
-              <a:rPr lang="en-US" sz="1800" b="1" dirty="0">
-                <a:solidFill>
-                  <a:srgbClr val="9CCB5A"/>
-                </a:solidFill>
-              </a:rPr>
-              <a:t>Comparativa real</a:t>
-            </a:r>
-            <a:endParaRPr lang="en-US" sz="1800" dirty="0"/>
-          </a:p>
-        </p:txBody>
-      </p:sp>
-      <p:sp>
-        <p:nvSpPr>
-          <p:cNvPr id="7" name="Text 5"/>
-          <p:cNvSpPr txBox="1"/>
-          <p:nvPr/>
-        </p:nvSpPr>
-        <p:spPr>
-          <a:xfrm>
-            <a:off x="4389120" y="4343400"/>
-            <a:ext cx="2926080" cy="731520"/>
-          </a:xfrm>
-          <a:prstGeom prst="rect">
-            <a:avLst/>
-          </a:prstGeom>
-          <a:noFill/>
-          <a:ln/>
-        </p:spPr>
-        <p:txBody>
-          <a:bodyPr wrap="square" lIns="0" tIns="0" rIns="0" bIns="0" rtlCol="0" anchor="t"/>
-          <a:lstStyle/>
-          <a:p>
-            <a:pPr indent="0" marL="0">
-              <a:buNone/>
-            </a:pPr>
-            <a:r>
-              <a:rPr lang="en-US" sz="1400" dirty="0">
-                <a:solidFill>
-                  <a:srgbClr val="DCE3EC"/>
-                </a:solidFill>
-              </a:rPr>
-              <a:t>Te mostramos el ahorro antes de firmar nada.</a:t>
-            </a:r>
-            <a:endParaRPr lang="en-US" sz="1400" dirty="0"/>
-          </a:p>
-        </p:txBody>
-      </p:sp>
-      <p:sp>
-        <p:nvSpPr>
-          <p:cNvPr id="8" name="Text 6"/>
-          <p:cNvSpPr txBox="1"/>
-          <p:nvPr/>
-        </p:nvSpPr>
-        <p:spPr>
-          <a:xfrm>
-            <a:off x="7680960" y="3931920"/>
-            <a:ext cx="3200400" cy="411480"/>
-          </a:xfrm>
-          <a:prstGeom prst="rect">
-            <a:avLst/>
-          </a:prstGeom>
-          <a:noFill/>
-          <a:ln/>
-        </p:spPr>
-        <p:txBody>
-          <a:bodyPr wrap="square" lIns="0" tIns="0" rIns="0" bIns="0" rtlCol="0" anchor="ctr"/>
-          <a:lstStyle/>
-          <a:p>
-            <a:pPr indent="0" marL="0">
-              <a:buNone/>
-            </a:pPr>
-            <a:r>
-              <a:rPr lang="en-US" sz="1800" b="1" dirty="0">
-                <a:solidFill>
-                  <a:srgbClr val="9CCB5A"/>
-                </a:solidFill>
-              </a:rPr>
-              <a:t>Sin coste para ti</a:t>
-            </a:r>
-            <a:endParaRPr lang="en-US" sz="1800" dirty="0"/>
-          </a:p>
-        </p:txBody>
-      </p:sp>
-      <p:sp>
-        <p:nvSpPr>
-          <p:cNvPr id="9" name="Text 7"/>
-          <p:cNvSpPr txBox="1"/>
-          <p:nvPr/>
-        </p:nvSpPr>
-        <p:spPr>
-          <a:xfrm>
-            <a:off x="7680960" y="4343400"/>
-            <a:ext cx="2926080" cy="731520"/>
-          </a:xfrm>
-          <a:prstGeom prst="rect">
-            <a:avLst/>
-          </a:prstGeom>
-          <a:noFill/>
-          <a:ln/>
-        </p:spPr>
-        <p:txBody>
-          <a:bodyPr wrap="square" lIns="0" tIns="0" rIns="0" bIns="0" rtlCol="0" anchor="t"/>
-          <a:lstStyle/>
-          <a:p>
-            <a:pPr indent="0" marL="0">
-              <a:buNone/>
-            </a:pPr>
-            <a:r>
-              <a:rPr lang="en-US" sz="1400" dirty="0">
-                <a:solidFill>
-                  <a:srgbClr val="DCE3EC"/>
-                </a:solidFill>
-              </a:rPr>
-              <a:t>Nuestro servicio no te cuesta nada, nunca.</a:t>
-            </a:r>
-            <a:endParaRPr lang="en-US" sz="1400" dirty="0"/>
+          <p:cNvPr id="25" name="Slide Number Placeholder 0"/>
+          <p:cNvSpPr>
+            <a:spLocks noGrp="1"/>
+          </p:cNvSpPr>
+          <p:nvPr>
+            <p:ph type="sldNum" sz="quarter" idx="4294967295"/>
+          </p:nvPr>
+        </p:nvSpPr>
+        <p:spPr>
+          <a:xfrm>
+            <a:off x="11247120" y="6400800"/>
+            <a:ext cx="457200" cy="274320"/>
+          </a:xfrm>
+          <a:prstGeom prst="rect">
+            <a:avLst/>
+          </a:prstGeom>
+          <a:extLst>
+            <a:ext uri="{C572A759-6A51-4108-AA02-DFA0A04FC94B}">
+              <ma14:wrappingTextBoxFlag xmlns:ma14="http://schemas.microsoft.com/office/mac/drawingml/2011/main" val="0"/>
+            </a:ext>
+          </a:extLst>
+        </p:spPr>
+        <p:txBody>
+          <a:bodyPr/>
+          <a:lstStyle>
+            <a:lvl1pPr>
+              <a:defRPr sz="900">
+                <a:solidFill>
+                  <a:schemeClr val="accent6"/>
+                </a:solidFill>
+              </a:defRPr>
+            </a:lvl1pPr>
+          </a:lstStyle>
+          <a:p>
+            <a:pPr algn="l"/>
+            <a:fld id="{F7021451-1387-4CA6-816F-3879F97B5CBC}" type="slidenum">
+              <a:rPr b="0" lang="en-US"/>
+              <a:t>3</a:t>
+            </a:fld>
+            <a:endParaRPr lang="en-US"/>
           </a:p>
         </p:txBody>
       </p:sp>
@@ -2889,39 +3399,37 @@
       </p:grpSpPr>
       <p:sp>
         <p:nvSpPr>
-          <p:cNvPr id="2" name="Text 1"/>
-          <p:cNvSpPr/>
-          <p:nvPr>
-            <p:ph idx="102" type="title" hasCustomPrompt="1"/>
-          </p:nvPr>
-        </p:nvSpPr>
-        <p:spPr>
-          <a:xfrm>
-            <a:off x="457200" y="868680"/>
-            <a:ext cx="11247120" cy="731520"/>
-          </a:xfrm>
-          <a:prstGeom prst="rect">
-            <a:avLst/>
-          </a:prstGeom>
-          <a:noFill/>
-          <a:ln/>
-        </p:spPr>
-        <p:txBody>
-          <a:bodyPr wrap="square" rtlCol="0" anchor="ctr"/>
-          <a:lstStyle/>
-          <a:p>
-            <a:pPr algn="l" indent="0" marL="0">
-              <a:buNone/>
-            </a:pPr>
-            <a:r>
-              <a:rPr lang="en-US" sz="3000" b="1" dirty="0">
-                <a:solidFill>
-                  <a:schemeClr val="tx2"/>
-                </a:solidFill>
-              </a:rPr>
-              <a:t>Asesoramiento energético y en telecomunicaciones</a:t>
-            </a:r>
-            <a:endParaRPr lang="en-US" sz="3000" dirty="0"/>
+          <p:cNvPr id="2" name="Text 0"/>
+          <p:cNvSpPr txBox="1"/>
+          <p:nvPr/>
+        </p:nvSpPr>
+        <p:spPr>
+          <a:xfrm>
+            <a:off x="1097280" y="1280160"/>
+            <a:ext cx="5486400" cy="365760"/>
+          </a:xfrm>
+          <a:prstGeom prst="rect">
+            <a:avLst/>
+          </a:prstGeom>
+          <a:noFill/>
+          <a:ln/>
+        </p:spPr>
+        <p:txBody>
+          <a:bodyPr wrap="square" lIns="0" tIns="0" rIns="0" bIns="0" rtlCol="0" anchor="ctr"/>
+          <a:lstStyle/>
+          <a:p>
+            <a:pPr indent="0" marL="0">
+              <a:buNone/>
+            </a:pPr>
+            <a:r>
+              <a:rPr lang="en-US" sz="1400" b="1" spc="400" kern="0" dirty="0">
+                <a:solidFill>
+                  <a:srgbClr val="F2C230"/>
+                </a:solidFill>
+              </a:rPr>
+              <a:t>BASE 01</a:t>
+            </a:r>
+            <a:endParaRPr lang="en-US" sz="1400" dirty="0"/>
           </a:p>
         </p:txBody>
       </p:sp>
@@ -2933,8 +3441,8 @@
         </p:nvSpPr>
         <p:spPr>
           <a:xfrm>
-            <a:off x="457200" y="1600200"/>
-            <a:ext cx="10972800" cy="365760"/>
+            <a:off x="1097280" y="1737360"/>
+            <a:ext cx="10058400" cy="2011680"/>
           </a:xfrm>
           <a:prstGeom prst="rect">
             <a:avLst/>
@@ -2950,43 +3458,88 @@
               <a:buNone/>
             </a:pPr>
             <a:r>
-              <a:rPr lang="en-US" sz="1500" dirty="0">
-                <a:solidFill>
-                  <a:srgbClr val="5D6472"/>
-                </a:solidFill>
-              </a:rPr>
-              <a:t>Un único interlocutor para todos los suministros de tu empresa o tu hogar</a:t>
-            </a:r>
-            <a:endParaRPr lang="en-US" sz="1500" dirty="0"/>
-          </a:p>
-        </p:txBody>
-      </p:sp>
-      <p:sp>
-        <p:nvSpPr>
-          <p:cNvPr id="4" name="Shape 2"/>
-          <p:cNvSpPr/>
-          <p:nvPr/>
-        </p:nvSpPr>
-        <p:spPr>
-          <a:xfrm>
-            <a:off x="457200" y="2194560"/>
-            <a:ext cx="5486400" cy="3931920"/>
-          </a:xfrm>
-          <a:prstGeom prst="roundRect">
-            <a:avLst>
-              <a:gd name="adj" fmla="val 3488"/>
-            </a:avLst>
-          </a:prstGeom>
-          <a:solidFill>
-            <a:srgbClr val="F4F6F9"/>
-          </a:solidFill>
-          <a:ln w="12700">
-            <a:solidFill>
-              <a:srgbClr val="DCE3EC"/>
-            </a:solidFill>
-            <a:prstDash val="solid"/>
-          </a:ln>
-        </p:spPr>
+              <a:rPr lang="en-US" sz="5400" b="1" dirty="0">
+                <a:solidFill>
+                  <a:srgbClr val="FFFFFF"/>
+                </a:solidFill>
+              </a:rPr>
+              <a:t>Si no hay </a:t>
+            </a:r>
+            <a:pPr indent="0" marL="0">
+              <a:buNone/>
+            </a:pPr>
+            <a:r>
+              <a:rPr lang="en-US" sz="5400" b="1" dirty="0">
+                <a:solidFill>
+                  <a:srgbClr val="F2C230"/>
+                </a:solidFill>
+              </a:rPr>
+              <a:t>ahorro</a:t>
+            </a:r>
+            <a:pPr indent="0" marL="0">
+              <a:buNone/>
+            </a:pPr>
+            <a:r>
+              <a:rPr lang="en-US" sz="5400" b="1" dirty="0">
+                <a:solidFill>
+                  <a:srgbClr val="FFFFFF"/>
+                </a:solidFill>
+              </a:rPr>
+              <a:t>,</a:t>
+            </a:r>
+            <a:endParaRPr lang="en-US" sz="5400" dirty="0"/>
+          </a:p>
+          <a:p>
+            <a:pPr indent="0" marL="0">
+              <a:buNone/>
+            </a:pPr>
+            <a:r>
+              <a:rPr lang="en-US" sz="5400" b="1" dirty="0">
+                <a:solidFill>
+                  <a:srgbClr val="FFFFFF"/>
+                </a:solidFill>
+              </a:rPr>
+              <a:t>no hay gestión</a:t>
+            </a:r>
+            <a:endParaRPr lang="en-US" sz="5400" dirty="0"/>
+          </a:p>
+        </p:txBody>
+      </p:sp>
+      <p:sp>
+        <p:nvSpPr>
+          <p:cNvPr id="4" name="Text 2"/>
+          <p:cNvSpPr txBox="1"/>
+          <p:nvPr/>
+        </p:nvSpPr>
+        <p:spPr>
+          <a:xfrm>
+            <a:off x="1097280" y="3931920"/>
+            <a:ext cx="3200400" cy="411480"/>
+          </a:xfrm>
+          <a:prstGeom prst="rect">
+            <a:avLst/>
+          </a:prstGeom>
+          <a:noFill/>
+          <a:ln/>
+        </p:spPr>
+        <p:txBody>
+          <a:bodyPr wrap="square" lIns="0" tIns="0" rIns="0" bIns="0" rtlCol="0" anchor="ctr"/>
+          <a:lstStyle/>
+          <a:p>
+            <a:pPr indent="0" marL="0">
+              <a:buNone/>
+            </a:pPr>
+            <a:r>
+              <a:rPr lang="en-US" sz="1800" b="1" dirty="0">
+                <a:solidFill>
+                  <a:srgbClr val="9CCB5A"/>
+                </a:solidFill>
+              </a:rPr>
+              <a:t>Estudio gratuito</a:t>
+            </a:r>
+            <a:endParaRPr lang="en-US" sz="1800" dirty="0"/>
+          </a:p>
+        </p:txBody>
       </p:sp>
       <p:sp>
         <p:nvSpPr>
@@ -2996,8 +3549,44 @@
         </p:nvSpPr>
         <p:spPr>
           <a:xfrm>
-            <a:off x="822960" y="2423160"/>
-            <a:ext cx="4572000" cy="365760"/>
+            <a:off x="1097280" y="4343400"/>
+            <a:ext cx="2926080" cy="731520"/>
+          </a:xfrm>
+          <a:prstGeom prst="rect">
+            <a:avLst/>
+          </a:prstGeom>
+          <a:noFill/>
+          <a:ln/>
+        </p:spPr>
+        <p:txBody>
+          <a:bodyPr wrap="square" lIns="0" tIns="0" rIns="0" bIns="0" rtlCol="0" anchor="t"/>
+          <a:lstStyle/>
+          <a:p>
+            <a:pPr indent="0" marL="0">
+              <a:buNone/>
+            </a:pPr>
+            <a:r>
+              <a:rPr lang="en-US" sz="1400" dirty="0">
+                <a:solidFill>
+                  <a:srgbClr val="DCE3EC"/>
+                </a:solidFill>
+              </a:rPr>
+              <a:t>Analizamos tus facturas y tu potencia contratada.</a:t>
+            </a:r>
+            <a:endParaRPr lang="en-US" sz="1400" dirty="0"/>
+          </a:p>
+        </p:txBody>
+      </p:sp>
+      <p:sp>
+        <p:nvSpPr>
+          <p:cNvPr id="6" name="Text 4"/>
+          <p:cNvSpPr txBox="1"/>
+          <p:nvPr/>
+        </p:nvSpPr>
+        <p:spPr>
+          <a:xfrm>
+            <a:off x="4389120" y="3931920"/>
+            <a:ext cx="3200400" cy="411480"/>
           </a:xfrm>
           <a:prstGeom prst="rect">
             <a:avLst/>
@@ -3013,71 +3602,63 @@
               <a:buNone/>
             </a:pPr>
             <a:r>
-              <a:rPr lang="en-US" sz="1600" b="1" spc="300" kern="0" dirty="0">
-                <a:solidFill>
-                  <a:srgbClr val="4E8A2B"/>
-                </a:solidFill>
-              </a:rPr>
-              <a:t>ENERGÍA</a:t>
-            </a:r>
-            <a:endParaRPr lang="en-US" sz="1600" dirty="0"/>
-          </a:p>
-        </p:txBody>
-      </p:sp>
-      <p:sp>
-        <p:nvSpPr>
-          <p:cNvPr id="6" name="Shape 4"/>
-          <p:cNvSpPr/>
-          <p:nvPr/>
-        </p:nvSpPr>
-        <p:spPr>
-          <a:xfrm>
-            <a:off x="822960" y="3017520"/>
-            <a:ext cx="685800" cy="685800"/>
-          </a:xfrm>
-          <a:prstGeom prst="ellipse">
-            <a:avLst/>
-          </a:prstGeom>
-          <a:solidFill>
-            <a:srgbClr val="4E8A2B"/>
-          </a:solidFill>
-          <a:ln/>
-        </p:spPr>
-      </p:sp>
-      <p:pic>
-        <p:nvPicPr>
-          <p:cNvPr id="7" name="Image 0" descr="preencoded.png">    </p:cNvPr>
-          <p:cNvPicPr>
-            <a:picLocks noChangeAspect="1"/>
-          </p:cNvPicPr>
-          <p:nvPr/>
-        </p:nvPicPr>
-        <p:blipFill>
-          <a:blip r:embed="rId1"/>
-          <a:stretch>
-            <a:fillRect/>
-          </a:stretch>
-        </p:blipFill>
-        <p:spPr>
-          <a:xfrm>
-            <a:off x="992124" y="3186684"/>
-            <a:ext cx="347472" cy="347472"/>
-          </a:xfrm>
-          <a:prstGeom prst="rect">
-            <a:avLst/>
-          </a:prstGeom>
-        </p:spPr>
-      </p:pic>
-      <p:sp>
-        <p:nvSpPr>
-          <p:cNvPr id="8" name="Text 5"/>
+              <a:rPr lang="en-US" sz="1800" b="1" dirty="0">
+                <a:solidFill>
+                  <a:srgbClr val="9CCB5A"/>
+                </a:solidFill>
+              </a:rPr>
+              <a:t>Comparativa real</a:t>
+            </a:r>
+            <a:endParaRPr lang="en-US" sz="1800" dirty="0"/>
+          </a:p>
+        </p:txBody>
+      </p:sp>
+      <p:sp>
+        <p:nvSpPr>
+          <p:cNvPr id="7" name="Text 5"/>
           <p:cNvSpPr txBox="1"/>
           <p:nvPr/>
         </p:nvSpPr>
         <p:spPr>
           <a:xfrm>
-            <a:off x="1737360" y="2999232"/>
-            <a:ext cx="3931920" cy="347472"/>
+            <a:off x="4389120" y="4343400"/>
+            <a:ext cx="2926080" cy="731520"/>
+          </a:xfrm>
+          <a:prstGeom prst="rect">
+            <a:avLst/>
+          </a:prstGeom>
+          <a:noFill/>
+          <a:ln/>
+        </p:spPr>
+        <p:txBody>
+          <a:bodyPr wrap="square" lIns="0" tIns="0" rIns="0" bIns="0" rtlCol="0" anchor="t"/>
+          <a:lstStyle/>
+          <a:p>
+            <a:pPr indent="0" marL="0">
+              <a:buNone/>
+            </a:pPr>
+            <a:r>
+              <a:rPr lang="en-US" sz="1400" dirty="0">
+                <a:solidFill>
+                  <a:srgbClr val="DCE3EC"/>
+                </a:solidFill>
+              </a:rPr>
+              <a:t>Te mostramos el ahorro antes de firmar nada.</a:t>
+            </a:r>
+            <a:endParaRPr lang="en-US" sz="1400" dirty="0"/>
+          </a:p>
+        </p:txBody>
+      </p:sp>
+      <p:sp>
+        <p:nvSpPr>
+          <p:cNvPr id="8" name="Text 6"/>
+          <p:cNvSpPr txBox="1"/>
+          <p:nvPr/>
+        </p:nvSpPr>
+        <p:spPr>
+          <a:xfrm>
+            <a:off x="7680960" y="3931920"/>
+            <a:ext cx="3200400" cy="411480"/>
           </a:xfrm>
           <a:prstGeom prst="rect">
             <a:avLst/>
@@ -3093,738 +3674,50 @@
               <a:buNone/>
             </a:pPr>
             <a:r>
-              <a:rPr lang="en-US" sz="1600" b="1" dirty="0">
-                <a:solidFill>
-                  <a:srgbClr val="1F3260"/>
-                </a:solidFill>
-              </a:rPr>
-              <a:t>Electricidad</a:t>
-            </a:r>
-            <a:endParaRPr lang="en-US" sz="1600" dirty="0"/>
-          </a:p>
-        </p:txBody>
-      </p:sp>
-      <p:sp>
-        <p:nvSpPr>
-          <p:cNvPr id="9" name="Text 6"/>
+              <a:rPr lang="en-US" sz="1800" b="1" dirty="0">
+                <a:solidFill>
+                  <a:srgbClr val="9CCB5A"/>
+                </a:solidFill>
+              </a:rPr>
+              <a:t>Sin coste para ti</a:t>
+            </a:r>
+            <a:endParaRPr lang="en-US" sz="1800" dirty="0"/>
+          </a:p>
+        </p:txBody>
+      </p:sp>
+      <p:sp>
+        <p:nvSpPr>
+          <p:cNvPr id="9" name="Text 7"/>
           <p:cNvSpPr txBox="1"/>
           <p:nvPr/>
         </p:nvSpPr>
         <p:spPr>
           <a:xfrm>
-            <a:off x="1737360" y="3355848"/>
-            <a:ext cx="3931920" cy="347472"/>
-          </a:xfrm>
-          <a:prstGeom prst="rect">
-            <a:avLst/>
-          </a:prstGeom>
-          <a:noFill/>
-          <a:ln/>
-        </p:spPr>
-        <p:txBody>
-          <a:bodyPr wrap="square" lIns="0" tIns="0" rIns="0" bIns="0" rtlCol="0" anchor="ctr"/>
-          <a:lstStyle/>
-          <a:p>
-            <a:pPr indent="0" marL="0">
-              <a:buNone/>
-            </a:pPr>
-            <a:r>
-              <a:rPr lang="en-US" sz="1300" dirty="0">
-                <a:solidFill>
-                  <a:srgbClr val="5D6472"/>
-                </a:solidFill>
-              </a:rPr>
-              <a:t>Tarifa fija o indexada, ajuste de potencia y maxímetro</a:t>
-            </a:r>
-            <a:endParaRPr lang="en-US" sz="1300" dirty="0"/>
-          </a:p>
-        </p:txBody>
-      </p:sp>
-      <p:sp>
-        <p:nvSpPr>
-          <p:cNvPr id="10" name="Shape 7"/>
-          <p:cNvSpPr/>
-          <p:nvPr/>
-        </p:nvSpPr>
-        <p:spPr>
-          <a:xfrm>
-            <a:off x="822960" y="4023360"/>
-            <a:ext cx="685800" cy="685800"/>
-          </a:xfrm>
-          <a:prstGeom prst="ellipse">
-            <a:avLst/>
-          </a:prstGeom>
-          <a:solidFill>
-            <a:srgbClr val="4E8A2B"/>
-          </a:solidFill>
-          <a:ln/>
-        </p:spPr>
-      </p:sp>
-      <p:pic>
-        <p:nvPicPr>
-          <p:cNvPr id="11" name="Image 1" descr="preencoded.png">    </p:cNvPr>
-          <p:cNvPicPr>
-            <a:picLocks noChangeAspect="1"/>
-          </p:cNvPicPr>
-          <p:nvPr/>
-        </p:nvPicPr>
-        <p:blipFill>
-          <a:blip r:embed="rId2"/>
-          <a:stretch>
-            <a:fillRect/>
-          </a:stretch>
-        </p:blipFill>
-        <p:spPr>
-          <a:xfrm>
-            <a:off x="992124" y="4192524"/>
-            <a:ext cx="347472" cy="347472"/>
-          </a:xfrm>
-          <a:prstGeom prst="rect">
-            <a:avLst/>
-          </a:prstGeom>
-        </p:spPr>
-      </p:pic>
-      <p:sp>
-        <p:nvSpPr>
-          <p:cNvPr id="12" name="Text 8"/>
-          <p:cNvSpPr txBox="1"/>
-          <p:nvPr/>
-        </p:nvSpPr>
-        <p:spPr>
-          <a:xfrm>
-            <a:off x="1737360" y="4005072"/>
-            <a:ext cx="3931920" cy="347472"/>
-          </a:xfrm>
-          <a:prstGeom prst="rect">
-            <a:avLst/>
-          </a:prstGeom>
-          <a:noFill/>
-          <a:ln/>
-        </p:spPr>
-        <p:txBody>
-          <a:bodyPr wrap="square" lIns="0" tIns="0" rIns="0" bIns="0" rtlCol="0" anchor="ctr"/>
-          <a:lstStyle/>
-          <a:p>
-            <a:pPr indent="0" marL="0">
-              <a:buNone/>
-            </a:pPr>
-            <a:r>
-              <a:rPr lang="en-US" sz="1600" b="1" dirty="0">
-                <a:solidFill>
-                  <a:srgbClr val="1F3260"/>
-                </a:solidFill>
-              </a:rPr>
-              <a:t>Gas</a:t>
-            </a:r>
-            <a:endParaRPr lang="en-US" sz="1600" dirty="0"/>
-          </a:p>
-        </p:txBody>
-      </p:sp>
-      <p:sp>
-        <p:nvSpPr>
-          <p:cNvPr id="13" name="Text 9"/>
-          <p:cNvSpPr txBox="1"/>
-          <p:nvPr/>
-        </p:nvSpPr>
-        <p:spPr>
-          <a:xfrm>
-            <a:off x="1737360" y="4361688"/>
-            <a:ext cx="3931920" cy="347472"/>
-          </a:xfrm>
-          <a:prstGeom prst="rect">
-            <a:avLst/>
-          </a:prstGeom>
-          <a:noFill/>
-          <a:ln/>
-        </p:spPr>
-        <p:txBody>
-          <a:bodyPr wrap="square" lIns="0" tIns="0" rIns="0" bIns="0" rtlCol="0" anchor="ctr"/>
-          <a:lstStyle/>
-          <a:p>
-            <a:pPr indent="0" marL="0">
-              <a:buNone/>
-            </a:pPr>
-            <a:r>
-              <a:rPr lang="en-US" sz="1300" dirty="0">
-                <a:solidFill>
-                  <a:srgbClr val="5D6472"/>
-                </a:solidFill>
-              </a:rPr>
-              <a:t>Ofertas personalizadas según tu consumo</a:t>
-            </a:r>
-            <a:endParaRPr lang="en-US" sz="1300" dirty="0"/>
-          </a:p>
-        </p:txBody>
-      </p:sp>
-      <p:sp>
-        <p:nvSpPr>
-          <p:cNvPr id="14" name="Shape 10"/>
-          <p:cNvSpPr/>
-          <p:nvPr/>
-        </p:nvSpPr>
-        <p:spPr>
-          <a:xfrm>
-            <a:off x="822960" y="5029200"/>
-            <a:ext cx="685800" cy="685800"/>
-          </a:xfrm>
-          <a:prstGeom prst="ellipse">
-            <a:avLst/>
-          </a:prstGeom>
-          <a:solidFill>
-            <a:srgbClr val="4E8A2B"/>
-          </a:solidFill>
-          <a:ln/>
-        </p:spPr>
-      </p:sp>
-      <p:pic>
-        <p:nvPicPr>
-          <p:cNvPr id="15" name="Image 2" descr="preencoded.png">    </p:cNvPr>
-          <p:cNvPicPr>
-            <a:picLocks noChangeAspect="1"/>
-          </p:cNvPicPr>
-          <p:nvPr/>
-        </p:nvPicPr>
-        <p:blipFill>
-          <a:blip r:embed="rId3"/>
-          <a:stretch>
-            <a:fillRect/>
-          </a:stretch>
-        </p:blipFill>
-        <p:spPr>
-          <a:xfrm>
-            <a:off x="992124" y="5198364"/>
-            <a:ext cx="347472" cy="347472"/>
-          </a:xfrm>
-          <a:prstGeom prst="rect">
-            <a:avLst/>
-          </a:prstGeom>
-        </p:spPr>
-      </p:pic>
-      <p:sp>
-        <p:nvSpPr>
-          <p:cNvPr id="16" name="Text 11"/>
-          <p:cNvSpPr txBox="1"/>
-          <p:nvPr/>
-        </p:nvSpPr>
-        <p:spPr>
-          <a:xfrm>
-            <a:off x="1737360" y="5010912"/>
-            <a:ext cx="3931920" cy="347472"/>
-          </a:xfrm>
-          <a:prstGeom prst="rect">
-            <a:avLst/>
-          </a:prstGeom>
-          <a:noFill/>
-          <a:ln/>
-        </p:spPr>
-        <p:txBody>
-          <a:bodyPr wrap="square" lIns="0" tIns="0" rIns="0" bIns="0" rtlCol="0" anchor="ctr"/>
-          <a:lstStyle/>
-          <a:p>
-            <a:pPr indent="0" marL="0">
-              <a:buNone/>
-            </a:pPr>
-            <a:r>
-              <a:rPr lang="en-US" sz="1600" b="1" dirty="0">
-                <a:solidFill>
-                  <a:srgbClr val="1F3260"/>
-                </a:solidFill>
-              </a:rPr>
-              <a:t>Fotovoltaica y baterías</a:t>
-            </a:r>
-            <a:endParaRPr lang="en-US" sz="1600" dirty="0"/>
-          </a:p>
-        </p:txBody>
-      </p:sp>
-      <p:sp>
-        <p:nvSpPr>
-          <p:cNvPr id="17" name="Text 12"/>
-          <p:cNvSpPr txBox="1"/>
-          <p:nvPr/>
-        </p:nvSpPr>
-        <p:spPr>
-          <a:xfrm>
-            <a:off x="1737360" y="5367528"/>
-            <a:ext cx="3931920" cy="347472"/>
-          </a:xfrm>
-          <a:prstGeom prst="rect">
-            <a:avLst/>
-          </a:prstGeom>
-          <a:noFill/>
-          <a:ln/>
-        </p:spPr>
-        <p:txBody>
-          <a:bodyPr wrap="square" lIns="0" tIns="0" rIns="0" bIns="0" rtlCol="0" anchor="ctr"/>
-          <a:lstStyle/>
-          <a:p>
-            <a:pPr indent="0" marL="0">
-              <a:buNone/>
-            </a:pPr>
-            <a:r>
-              <a:rPr lang="en-US" sz="1300" dirty="0">
-                <a:solidFill>
-                  <a:srgbClr val="5D6472"/>
-                </a:solidFill>
-              </a:rPr>
-              <a:t>Red de instaladores en todo el territorio</a:t>
-            </a:r>
-            <a:endParaRPr lang="en-US" sz="1300" dirty="0"/>
-          </a:p>
-        </p:txBody>
-      </p:sp>
-      <p:sp>
-        <p:nvSpPr>
-          <p:cNvPr id="18" name="Shape 13"/>
-          <p:cNvSpPr/>
-          <p:nvPr/>
-        </p:nvSpPr>
-        <p:spPr>
-          <a:xfrm>
-            <a:off x="6172200" y="2194560"/>
-            <a:ext cx="5486400" cy="3931920"/>
-          </a:xfrm>
-          <a:prstGeom prst="roundRect">
-            <a:avLst>
-              <a:gd name="adj" fmla="val 3488"/>
-            </a:avLst>
-          </a:prstGeom>
-          <a:solidFill>
-            <a:srgbClr val="F4F6F9"/>
-          </a:solidFill>
-          <a:ln w="12700">
-            <a:solidFill>
-              <a:srgbClr val="DCE3EC"/>
-            </a:solidFill>
-            <a:prstDash val="solid"/>
-          </a:ln>
-        </p:spPr>
-      </p:sp>
-      <p:sp>
-        <p:nvSpPr>
-          <p:cNvPr id="19" name="Text 14"/>
-          <p:cNvSpPr txBox="1"/>
-          <p:nvPr/>
-        </p:nvSpPr>
-        <p:spPr>
-          <a:xfrm>
-            <a:off x="6537960" y="2423160"/>
-            <a:ext cx="4572000" cy="365760"/>
-          </a:xfrm>
-          <a:prstGeom prst="rect">
-            <a:avLst/>
-          </a:prstGeom>
-          <a:noFill/>
-          <a:ln/>
-        </p:spPr>
-        <p:txBody>
-          <a:bodyPr wrap="square" lIns="0" tIns="0" rIns="0" bIns="0" rtlCol="0" anchor="ctr"/>
-          <a:lstStyle/>
-          <a:p>
-            <a:pPr indent="0" marL="0">
-              <a:buNone/>
-            </a:pPr>
-            <a:r>
-              <a:rPr lang="en-US" sz="1600" b="1" spc="300" kern="0" dirty="0">
-                <a:solidFill>
-                  <a:srgbClr val="C46E17"/>
-                </a:solidFill>
-              </a:rPr>
-              <a:t>TELECOMUNICACIONES</a:t>
-            </a:r>
-            <a:endParaRPr lang="en-US" sz="1600" dirty="0"/>
-          </a:p>
-        </p:txBody>
-      </p:sp>
-      <p:sp>
-        <p:nvSpPr>
-          <p:cNvPr id="20" name="Shape 15"/>
-          <p:cNvSpPr/>
-          <p:nvPr/>
-        </p:nvSpPr>
-        <p:spPr>
-          <a:xfrm>
-            <a:off x="6537960" y="3017520"/>
-            <a:ext cx="685800" cy="685800"/>
-          </a:xfrm>
-          <a:prstGeom prst="ellipse">
-            <a:avLst/>
-          </a:prstGeom>
-          <a:solidFill>
-            <a:srgbClr val="C46E17"/>
-          </a:solidFill>
-          <a:ln/>
-        </p:spPr>
-      </p:sp>
-      <p:pic>
-        <p:nvPicPr>
-          <p:cNvPr id="21" name="Image 3" descr="preencoded.png">    </p:cNvPr>
-          <p:cNvPicPr>
-            <a:picLocks noChangeAspect="1"/>
-          </p:cNvPicPr>
-          <p:nvPr/>
-        </p:nvPicPr>
-        <p:blipFill>
-          <a:blip r:embed="rId4"/>
-          <a:stretch>
-            <a:fillRect/>
-          </a:stretch>
-        </p:blipFill>
-        <p:spPr>
-          <a:xfrm>
-            <a:off x="6707124" y="3186684"/>
-            <a:ext cx="347472" cy="347472"/>
-          </a:xfrm>
-          <a:prstGeom prst="rect">
-            <a:avLst/>
-          </a:prstGeom>
-        </p:spPr>
-      </p:pic>
-      <p:sp>
-        <p:nvSpPr>
-          <p:cNvPr id="22" name="Text 16"/>
-          <p:cNvSpPr txBox="1"/>
-          <p:nvPr/>
-        </p:nvSpPr>
-        <p:spPr>
-          <a:xfrm>
-            <a:off x="7452360" y="2999232"/>
-            <a:ext cx="3931920" cy="347472"/>
-          </a:xfrm>
-          <a:prstGeom prst="rect">
-            <a:avLst/>
-          </a:prstGeom>
-          <a:noFill/>
-          <a:ln/>
-        </p:spPr>
-        <p:txBody>
-          <a:bodyPr wrap="square" lIns="0" tIns="0" rIns="0" bIns="0" rtlCol="0" anchor="ctr"/>
-          <a:lstStyle/>
-          <a:p>
-            <a:pPr indent="0" marL="0">
-              <a:buNone/>
-            </a:pPr>
-            <a:r>
-              <a:rPr lang="en-US" sz="1600" b="1" dirty="0">
-                <a:solidFill>
-                  <a:srgbClr val="1F3260"/>
-                </a:solidFill>
-              </a:rPr>
-              <a:t>Fibra</a:t>
-            </a:r>
-            <a:endParaRPr lang="en-US" sz="1600" dirty="0"/>
-          </a:p>
-        </p:txBody>
-      </p:sp>
-      <p:sp>
-        <p:nvSpPr>
-          <p:cNvPr id="23" name="Text 17"/>
-          <p:cNvSpPr txBox="1"/>
-          <p:nvPr/>
-        </p:nvSpPr>
-        <p:spPr>
-          <a:xfrm>
-            <a:off x="7452360" y="3355848"/>
-            <a:ext cx="3931920" cy="347472"/>
-          </a:xfrm>
-          <a:prstGeom prst="rect">
-            <a:avLst/>
-          </a:prstGeom>
-          <a:noFill/>
-          <a:ln/>
-        </p:spPr>
-        <p:txBody>
-          <a:bodyPr wrap="square" lIns="0" tIns="0" rIns="0" bIns="0" rtlCol="0" anchor="ctr"/>
-          <a:lstStyle/>
-          <a:p>
-            <a:pPr indent="0" marL="0">
-              <a:buNone/>
-            </a:pPr>
-            <a:r>
-              <a:rPr lang="en-US" sz="1300" dirty="0">
-                <a:solidFill>
-                  <a:srgbClr val="5D6472"/>
-                </a:solidFill>
-              </a:rPr>
-              <a:t>Conexión adaptada a tu negocio</a:t>
-            </a:r>
-            <a:endParaRPr lang="en-US" sz="1300" dirty="0"/>
-          </a:p>
-        </p:txBody>
-      </p:sp>
-      <p:sp>
-        <p:nvSpPr>
-          <p:cNvPr id="24" name="Shape 18"/>
-          <p:cNvSpPr/>
-          <p:nvPr/>
-        </p:nvSpPr>
-        <p:spPr>
-          <a:xfrm>
-            <a:off x="6537960" y="4023360"/>
-            <a:ext cx="685800" cy="685800"/>
-          </a:xfrm>
-          <a:prstGeom prst="ellipse">
-            <a:avLst/>
-          </a:prstGeom>
-          <a:solidFill>
-            <a:srgbClr val="C46E17"/>
-          </a:solidFill>
-          <a:ln/>
-        </p:spPr>
-      </p:sp>
-      <p:pic>
-        <p:nvPicPr>
-          <p:cNvPr id="25" name="Image 4" descr="preencoded.png">    </p:cNvPr>
-          <p:cNvPicPr>
-            <a:picLocks noChangeAspect="1"/>
-          </p:cNvPicPr>
-          <p:nvPr/>
-        </p:nvPicPr>
-        <p:blipFill>
-          <a:blip r:embed="rId5"/>
-          <a:stretch>
-            <a:fillRect/>
-          </a:stretch>
-        </p:blipFill>
-        <p:spPr>
-          <a:xfrm>
-            <a:off x="6707124" y="4192524"/>
-            <a:ext cx="347472" cy="347472"/>
-          </a:xfrm>
-          <a:prstGeom prst="rect">
-            <a:avLst/>
-          </a:prstGeom>
-        </p:spPr>
-      </p:pic>
-      <p:sp>
-        <p:nvSpPr>
-          <p:cNvPr id="26" name="Text 19"/>
-          <p:cNvSpPr txBox="1"/>
-          <p:nvPr/>
-        </p:nvSpPr>
-        <p:spPr>
-          <a:xfrm>
-            <a:off x="7452360" y="4005072"/>
-            <a:ext cx="3931920" cy="347472"/>
-          </a:xfrm>
-          <a:prstGeom prst="rect">
-            <a:avLst/>
-          </a:prstGeom>
-          <a:noFill/>
-          <a:ln/>
-        </p:spPr>
-        <p:txBody>
-          <a:bodyPr wrap="square" lIns="0" tIns="0" rIns="0" bIns="0" rtlCol="0" anchor="ctr"/>
-          <a:lstStyle/>
-          <a:p>
-            <a:pPr indent="0" marL="0">
-              <a:buNone/>
-            </a:pPr>
-            <a:r>
-              <a:rPr lang="en-US" sz="1600" b="1" dirty="0">
-                <a:solidFill>
-                  <a:srgbClr val="1F3260"/>
-                </a:solidFill>
-              </a:rPr>
-              <a:t>Móvil</a:t>
-            </a:r>
-            <a:endParaRPr lang="en-US" sz="1600" dirty="0"/>
-          </a:p>
-        </p:txBody>
-      </p:sp>
-      <p:sp>
-        <p:nvSpPr>
-          <p:cNvPr id="27" name="Text 20"/>
-          <p:cNvSpPr txBox="1"/>
-          <p:nvPr/>
-        </p:nvSpPr>
-        <p:spPr>
-          <a:xfrm>
-            <a:off x="7452360" y="4361688"/>
-            <a:ext cx="3931920" cy="347472"/>
-          </a:xfrm>
-          <a:prstGeom prst="rect">
-            <a:avLst/>
-          </a:prstGeom>
-          <a:noFill/>
-          <a:ln/>
-        </p:spPr>
-        <p:txBody>
-          <a:bodyPr wrap="square" lIns="0" tIns="0" rIns="0" bIns="0" rtlCol="0" anchor="ctr"/>
-          <a:lstStyle/>
-          <a:p>
-            <a:pPr indent="0" marL="0">
-              <a:buNone/>
-            </a:pPr>
-            <a:r>
-              <a:rPr lang="en-US" sz="1300" dirty="0">
-                <a:solidFill>
-                  <a:srgbClr val="5D6472"/>
-                </a:solidFill>
-              </a:rPr>
-              <a:t>Líneas y tarifas optimizadas</a:t>
-            </a:r>
-            <a:endParaRPr lang="en-US" sz="1300" dirty="0"/>
-          </a:p>
-        </p:txBody>
-      </p:sp>
-      <p:sp>
-        <p:nvSpPr>
-          <p:cNvPr id="28" name="Shape 21"/>
-          <p:cNvSpPr/>
-          <p:nvPr/>
-        </p:nvSpPr>
-        <p:spPr>
-          <a:xfrm>
-            <a:off x="6537960" y="5029200"/>
-            <a:ext cx="685800" cy="685800"/>
-          </a:xfrm>
-          <a:prstGeom prst="ellipse">
-            <a:avLst/>
-          </a:prstGeom>
-          <a:solidFill>
-            <a:srgbClr val="C46E17"/>
-          </a:solidFill>
-          <a:ln/>
-        </p:spPr>
-      </p:sp>
-      <p:pic>
-        <p:nvPicPr>
-          <p:cNvPr id="29" name="Image 5" descr="preencoded.png">    </p:cNvPr>
-          <p:cNvPicPr>
-            <a:picLocks noChangeAspect="1"/>
-          </p:cNvPicPr>
-          <p:nvPr/>
-        </p:nvPicPr>
-        <p:blipFill>
-          <a:blip r:embed="rId6"/>
-          <a:stretch>
-            <a:fillRect/>
-          </a:stretch>
-        </p:blipFill>
-        <p:spPr>
-          <a:xfrm>
-            <a:off x="6707124" y="5198364"/>
-            <a:ext cx="347472" cy="347472"/>
-          </a:xfrm>
-          <a:prstGeom prst="rect">
-            <a:avLst/>
-          </a:prstGeom>
-        </p:spPr>
-      </p:pic>
-      <p:sp>
-        <p:nvSpPr>
-          <p:cNvPr id="30" name="Text 22"/>
-          <p:cNvSpPr txBox="1"/>
-          <p:nvPr/>
-        </p:nvSpPr>
-        <p:spPr>
-          <a:xfrm>
-            <a:off x="7452360" y="5010912"/>
-            <a:ext cx="3931920" cy="347472"/>
-          </a:xfrm>
-          <a:prstGeom prst="rect">
-            <a:avLst/>
-          </a:prstGeom>
-          <a:noFill/>
-          <a:ln/>
-        </p:spPr>
-        <p:txBody>
-          <a:bodyPr wrap="square" lIns="0" tIns="0" rIns="0" bIns="0" rtlCol="0" anchor="ctr"/>
-          <a:lstStyle/>
-          <a:p>
-            <a:pPr indent="0" marL="0">
-              <a:buNone/>
-            </a:pPr>
-            <a:r>
-              <a:rPr lang="en-US" sz="1600" b="1" dirty="0">
-                <a:solidFill>
-                  <a:srgbClr val="1F3260"/>
-                </a:solidFill>
-              </a:rPr>
-              <a:t>Todas las operadoras</a:t>
-            </a:r>
-            <a:endParaRPr lang="en-US" sz="1600" dirty="0"/>
-          </a:p>
-        </p:txBody>
-      </p:sp>
-      <p:sp>
-        <p:nvSpPr>
-          <p:cNvPr id="31" name="Text 23"/>
-          <p:cNvSpPr txBox="1"/>
-          <p:nvPr/>
-        </p:nvSpPr>
-        <p:spPr>
-          <a:xfrm>
-            <a:off x="7452360" y="5367528"/>
-            <a:ext cx="3931920" cy="347472"/>
-          </a:xfrm>
-          <a:prstGeom prst="rect">
-            <a:avLst/>
-          </a:prstGeom>
-          <a:noFill/>
-          <a:ln/>
-        </p:spPr>
-        <p:txBody>
-          <a:bodyPr wrap="square" lIns="0" tIns="0" rIns="0" bIns="0" rtlCol="0" anchor="ctr"/>
-          <a:lstStyle/>
-          <a:p>
-            <a:pPr indent="0" marL="0">
-              <a:buNone/>
-            </a:pPr>
-            <a:r>
-              <a:rPr lang="en-US" sz="1300" dirty="0">
-                <a:solidFill>
-                  <a:srgbClr val="5D6472"/>
-                </a:solidFill>
-              </a:rPr>
-              <a:t>Trabajamos con todo el mercado</a:t>
-            </a:r>
-            <a:endParaRPr lang="en-US" sz="1300" dirty="0"/>
-          </a:p>
-        </p:txBody>
-      </p:sp>
-      <p:sp>
-        <p:nvSpPr>
-          <p:cNvPr id="25" name="Slide Number Placeholder 0"/>
-          <p:cNvSpPr>
-            <a:spLocks noGrp="1"/>
-          </p:cNvSpPr>
-          <p:nvPr>
-            <p:ph type="sldNum" sz="quarter" idx="4294967295"/>
-          </p:nvPr>
-        </p:nvSpPr>
-        <p:spPr>
-          <a:xfrm>
-            <a:off x="11247120" y="6400800"/>
-            <a:ext cx="457200" cy="274320"/>
-          </a:xfrm>
-          <a:prstGeom prst="rect">
-            <a:avLst/>
-          </a:prstGeom>
-          <a:extLst>
-            <a:ext uri="{C572A759-6A51-4108-AA02-DFA0A04FC94B}">
-              <ma14:wrappingTextBoxFlag xmlns:ma14="http://schemas.microsoft.com/office/mac/drawingml/2011/main" val="0"/>
-            </a:ext>
-          </a:extLst>
-        </p:spPr>
-        <p:txBody>
-          <a:bodyPr/>
-          <a:lstStyle>
-            <a:lvl1pPr>
-              <a:defRPr sz="900">
-                <a:solidFill>
-                  <a:schemeClr val="accent6"/>
-                </a:solidFill>
-              </a:defRPr>
-            </a:lvl1pPr>
-          </a:lstStyle>
-          <a:p>
-            <a:pPr algn="l"/>
-            <a:fld id="{F7021451-1387-4CA6-816F-3879F97B5CBC}" type="slidenum">
-              <a:rPr b="0" lang="en-US"/>
-              <a:t>4</a:t>
-            </a:fld>
-            <a:endParaRPr lang="en-US"/>
+            <a:off x="7680960" y="4343400"/>
+            <a:ext cx="2926080" cy="731520"/>
+          </a:xfrm>
+          <a:prstGeom prst="rect">
+            <a:avLst/>
+          </a:prstGeom>
+          <a:noFill/>
+          <a:ln/>
+        </p:spPr>
+        <p:txBody>
+          <a:bodyPr wrap="square" lIns="0" tIns="0" rIns="0" bIns="0" rtlCol="0" anchor="t"/>
+          <a:lstStyle/>
+          <a:p>
+            <a:pPr indent="0" marL="0">
+              <a:buNone/>
+            </a:pPr>
+            <a:r>
+              <a:rPr lang="en-US" sz="1400" dirty="0">
+                <a:solidFill>
+                  <a:srgbClr val="DCE3EC"/>
+                </a:solidFill>
+              </a:rPr>
+              <a:t>Nuestro servicio no te cuesta nada, nunca.</a:t>
+            </a:r>
+            <a:endParaRPr lang="en-US" sz="1400" dirty="0"/>
           </a:p>
         </p:txBody>
       </p:sp>
@@ -3885,73 +3778,15 @@
                   <a:schemeClr val="tx2"/>
                 </a:solidFill>
               </a:rPr>
-              <a:t>Contacto directo con distribución y canales principales</a:t>
+              <a:t>¿Qué ofrecemos?</a:t>
             </a:r>
             <a:endParaRPr lang="en-US" sz="3000" dirty="0"/>
           </a:p>
         </p:txBody>
-      </p:sp>
-      <p:sp>
-        <p:nvSpPr>
-          <p:cNvPr id="3" name="Text 1"/>
-          <p:cNvSpPr txBox="1"/>
-          <p:nvPr/>
-        </p:nvSpPr>
-        <p:spPr>
-          <a:xfrm>
-            <a:off x="457200" y="1600200"/>
-            <a:ext cx="10972800" cy="365760"/>
-          </a:xfrm>
-          <a:prstGeom prst="rect">
-            <a:avLst/>
-          </a:prstGeom>
-          <a:noFill/>
-          <a:ln/>
-        </p:spPr>
-        <p:txBody>
-          <a:bodyPr wrap="square" lIns="0" tIns="0" rIns="0" bIns="0" rtlCol="0" anchor="ctr"/>
-          <a:lstStyle/>
-          <a:p>
-            <a:pPr indent="0" marL="0">
-              <a:buNone/>
-            </a:pPr>
-            <a:r>
-              <a:rPr lang="en-US" sz="1500" dirty="0">
-                <a:solidFill>
-                  <a:srgbClr val="5D6472"/>
-                </a:solidFill>
-              </a:rPr>
-              <a:t>Sin intermediarios innecesarios: tus gestiones llegan directas a quien las resuelve</a:t>
-            </a:r>
-            <a:endParaRPr lang="en-US" sz="1500" dirty="0"/>
-          </a:p>
-        </p:txBody>
-      </p:sp>
-      <p:sp>
-        <p:nvSpPr>
-          <p:cNvPr id="4" name="Shape 2"/>
-          <p:cNvSpPr/>
-          <p:nvPr/>
-        </p:nvSpPr>
-        <p:spPr>
-          <a:xfrm>
-            <a:off x="457200" y="3291840"/>
-            <a:ext cx="2926080" cy="1280160"/>
-          </a:xfrm>
-          <a:prstGeom prst="roundRect">
-            <a:avLst>
-              <a:gd name="adj" fmla="val 10714"/>
-            </a:avLst>
-          </a:prstGeom>
-          <a:solidFill>
-            <a:srgbClr val="F4F6F9"/>
-          </a:solidFill>
-          <a:ln/>
-        </p:spPr>
       </p:sp>
       <p:pic>
         <p:nvPicPr>
-          <p:cNvPr id="5" name="Image 0" descr="preencoded.png">    </p:cNvPr>
+          <p:cNvPr id="3" name="Image 0" descr="logos/rueda.png">    </p:cNvPr>
           <p:cNvPicPr>
             <a:picLocks noChangeAspect="1"/>
           </p:cNvPicPr>
@@ -3965,8 +3800,8 @@
         </p:blipFill>
         <p:spPr>
           <a:xfrm>
-            <a:off x="731520" y="3680460"/>
-            <a:ext cx="502920" cy="502920"/>
+            <a:off x="640080" y="1737360"/>
+            <a:ext cx="4480560" cy="4507992"/>
           </a:xfrm>
           <a:prstGeom prst="rect">
             <a:avLst/>
@@ -3975,101 +3810,43 @@
       </p:pic>
       <p:sp>
         <p:nvSpPr>
-          <p:cNvPr id="6" name="Text 3"/>
+          <p:cNvPr id="4" name="Text 1"/>
           <p:cNvSpPr txBox="1"/>
           <p:nvPr/>
         </p:nvSpPr>
         <p:spPr>
           <a:xfrm>
-            <a:off x="1417320" y="3429000"/>
-            <a:ext cx="1828800" cy="548640"/>
-          </a:xfrm>
-          <a:prstGeom prst="rect">
-            <a:avLst/>
-          </a:prstGeom>
-          <a:noFill/>
-          <a:ln/>
-        </p:spPr>
-        <p:txBody>
-          <a:bodyPr wrap="square" lIns="0" tIns="0" rIns="0" bIns="0" rtlCol="0" anchor="b"/>
-          <a:lstStyle/>
-          <a:p>
-            <a:pPr indent="0" marL="0">
-              <a:buNone/>
-            </a:pPr>
-            <a:r>
-              <a:rPr lang="en-US" sz="1600" b="1" dirty="0">
+            <a:off x="5760720" y="1828800"/>
+            <a:ext cx="5943600" cy="822960"/>
+          </a:xfrm>
+          <a:prstGeom prst="rect">
+            <a:avLst/>
+          </a:prstGeom>
+          <a:noFill/>
+          <a:ln/>
+        </p:spPr>
+        <p:txBody>
+          <a:bodyPr wrap="square" lIns="0" tIns="0" rIns="0" bIns="0" rtlCol="0" anchor="ctr"/>
+          <a:lstStyle/>
+          <a:p>
+            <a:pPr indent="0" marL="0">
+              <a:buNone/>
+            </a:pPr>
+            <a:r>
+              <a:rPr lang="en-US" sz="2200" b="1" dirty="0">
                 <a:solidFill>
                   <a:srgbClr val="1F3260"/>
                 </a:solidFill>
               </a:rPr>
-              <a:t>Tú, cliente</a:t>
-            </a:r>
-            <a:endParaRPr lang="en-US" sz="1600" dirty="0"/>
-          </a:p>
-        </p:txBody>
-      </p:sp>
-      <p:sp>
-        <p:nvSpPr>
-          <p:cNvPr id="7" name="Text 4"/>
-          <p:cNvSpPr txBox="1"/>
-          <p:nvPr/>
-        </p:nvSpPr>
-        <p:spPr>
-          <a:xfrm>
-            <a:off x="1417320" y="3977640"/>
-            <a:ext cx="1828800" cy="457200"/>
-          </a:xfrm>
-          <a:prstGeom prst="rect">
-            <a:avLst/>
-          </a:prstGeom>
-          <a:noFill/>
-          <a:ln/>
-        </p:spPr>
-        <p:txBody>
-          <a:bodyPr wrap="square" lIns="0" tIns="0" rIns="0" bIns="0" rtlCol="0" anchor="t"/>
-          <a:lstStyle/>
-          <a:p>
-            <a:pPr indent="0" marL="0">
-              <a:buNone/>
-            </a:pPr>
-            <a:r>
-              <a:rPr lang="en-US" sz="1200" dirty="0">
-                <a:solidFill>
-                  <a:srgbClr val="1F3260"/>
-                </a:solidFill>
-              </a:rPr>
-              <a:t>Una sola llamada</a:t>
-            </a:r>
-            <a:endParaRPr lang="en-US" sz="1200" dirty="0"/>
-          </a:p>
-        </p:txBody>
-      </p:sp>
-      <p:sp>
-        <p:nvSpPr>
-          <p:cNvPr id="8" name="Shape 5"/>
-          <p:cNvSpPr/>
-          <p:nvPr/>
-        </p:nvSpPr>
-        <p:spPr>
-          <a:xfrm>
-            <a:off x="4206240" y="3108960"/>
-            <a:ext cx="3291840" cy="1645920"/>
-          </a:xfrm>
-          <a:prstGeom prst="roundRect">
-            <a:avLst>
-              <a:gd name="adj" fmla="val 8333"/>
-            </a:avLst>
-          </a:prstGeom>
-          <a:solidFill>
-            <a:srgbClr val="1F3260"/>
-          </a:solidFill>
-          <a:ln/>
-        </p:spPr>
+              <a:t>Cubrimos todo lo que tu empresa necesita en energía</a:t>
+            </a:r>
+            <a:endParaRPr lang="en-US" sz="2200" dirty="0"/>
+          </a:p>
+        </p:txBody>
       </p:sp>
       <p:pic>
         <p:nvPicPr>
-          <p:cNvPr id="9" name="Image 1" descr="preencoded.png">    </p:cNvPr>
+          <p:cNvPr id="5" name="Image 1" descr="preencoded.png">    </p:cNvPr>
           <p:cNvPicPr>
             <a:picLocks noChangeAspect="1"/>
           </p:cNvPicPr>
@@ -4083,8 +3860,8 @@
         </p:blipFill>
         <p:spPr>
           <a:xfrm>
-            <a:off x="4480560" y="3680460"/>
-            <a:ext cx="502920" cy="502920"/>
+            <a:off x="5760720" y="2898648"/>
+            <a:ext cx="256032" cy="256032"/>
           </a:xfrm>
           <a:prstGeom prst="rect">
             <a:avLst/>
@@ -4093,101 +3870,43 @@
       </p:pic>
       <p:sp>
         <p:nvSpPr>
-          <p:cNvPr id="10" name="Text 6"/>
+          <p:cNvPr id="6" name="Text 2"/>
           <p:cNvSpPr txBox="1"/>
           <p:nvPr/>
         </p:nvSpPr>
         <p:spPr>
           <a:xfrm>
-            <a:off x="5166360" y="3246120"/>
-            <a:ext cx="2194560" cy="731520"/>
-          </a:xfrm>
-          <a:prstGeom prst="rect">
-            <a:avLst/>
-          </a:prstGeom>
-          <a:noFill/>
-          <a:ln/>
-        </p:spPr>
-        <p:txBody>
-          <a:bodyPr wrap="square" lIns="0" tIns="0" rIns="0" bIns="0" rtlCol="0" anchor="b"/>
-          <a:lstStyle/>
-          <a:p>
-            <a:pPr indent="0" marL="0">
-              <a:buNone/>
-            </a:pPr>
-            <a:r>
-              <a:rPr lang="en-US" sz="1600" b="1" dirty="0">
-                <a:solidFill>
-                  <a:srgbClr val="FFFFFF"/>
-                </a:solidFill>
-              </a:rPr>
-              <a:t>MESENERGIA</a:t>
-            </a:r>
-            <a:endParaRPr lang="en-US" sz="1600" dirty="0"/>
-          </a:p>
-        </p:txBody>
-      </p:sp>
-      <p:sp>
-        <p:nvSpPr>
-          <p:cNvPr id="11" name="Text 7"/>
-          <p:cNvSpPr txBox="1"/>
-          <p:nvPr/>
-        </p:nvSpPr>
-        <p:spPr>
-          <a:xfrm>
-            <a:off x="5166360" y="3977640"/>
-            <a:ext cx="2194560" cy="640080"/>
-          </a:xfrm>
-          <a:prstGeom prst="rect">
-            <a:avLst/>
-          </a:prstGeom>
-          <a:noFill/>
-          <a:ln/>
-        </p:spPr>
-        <p:txBody>
-          <a:bodyPr wrap="square" lIns="0" tIns="0" rIns="0" bIns="0" rtlCol="0" anchor="t"/>
-          <a:lstStyle/>
-          <a:p>
-            <a:pPr indent="0" marL="0">
-              <a:buNone/>
-            </a:pPr>
-            <a:r>
-              <a:rPr lang="en-US" sz="1200" dirty="0">
-                <a:solidFill>
-                  <a:srgbClr val="FFFFFF"/>
-                </a:solidFill>
-              </a:rPr>
-              <a:t>Tu asesor de referencia</a:t>
-            </a:r>
-            <a:endParaRPr lang="en-US" sz="1200" dirty="0"/>
-          </a:p>
-        </p:txBody>
-      </p:sp>
-      <p:sp>
-        <p:nvSpPr>
-          <p:cNvPr id="12" name="Shape 8"/>
-          <p:cNvSpPr/>
-          <p:nvPr/>
-        </p:nvSpPr>
-        <p:spPr>
-          <a:xfrm>
-            <a:off x="8321040" y="2148840"/>
-            <a:ext cx="3383280" cy="1143000"/>
-          </a:xfrm>
-          <a:prstGeom prst="roundRect">
-            <a:avLst>
-              <a:gd name="adj" fmla="val 12000"/>
-            </a:avLst>
-          </a:prstGeom>
-          <a:solidFill>
-            <a:srgbClr val="EFF6E6"/>
-          </a:solidFill>
-          <a:ln/>
-        </p:spPr>
+            <a:off x="6144768" y="2834640"/>
+            <a:ext cx="2606040" cy="411480"/>
+          </a:xfrm>
+          <a:prstGeom prst="rect">
+            <a:avLst/>
+          </a:prstGeom>
+          <a:noFill/>
+          <a:ln/>
+        </p:spPr>
+        <p:txBody>
+          <a:bodyPr wrap="square" lIns="0" tIns="0" rIns="0" bIns="0" rtlCol="0" anchor="ctr"/>
+          <a:lstStyle/>
+          <a:p>
+            <a:pPr indent="0" marL="0">
+              <a:buNone/>
+            </a:pPr>
+            <a:r>
+              <a:rPr lang="en-US" sz="1300" dirty="0">
+                <a:solidFill>
+                  <a:srgbClr val="1F3260"/>
+                </a:solidFill>
+              </a:rPr>
+              <a:t>Estudios de ahorro y consumo</a:t>
+            </a:r>
+            <a:endParaRPr lang="en-US" sz="1300" dirty="0"/>
+          </a:p>
+        </p:txBody>
       </p:sp>
       <p:pic>
         <p:nvPicPr>
-          <p:cNvPr id="13" name="Image 2" descr="preencoded.png">    </p:cNvPr>
+          <p:cNvPr id="7" name="Image 2" descr="preencoded.png">    </p:cNvPr>
           <p:cNvPicPr>
             <a:picLocks noChangeAspect="1"/>
           </p:cNvPicPr>
@@ -4201,8 +3920,8 @@
         </p:blipFill>
         <p:spPr>
           <a:xfrm>
-            <a:off x="8595360" y="2468880"/>
-            <a:ext cx="502920" cy="502920"/>
+            <a:off x="8778240" y="2898648"/>
+            <a:ext cx="256032" cy="256032"/>
           </a:xfrm>
           <a:prstGeom prst="rect">
             <a:avLst/>
@@ -4211,125 +3930,43 @@
       </p:pic>
       <p:sp>
         <p:nvSpPr>
-          <p:cNvPr id="14" name="Text 9"/>
+          <p:cNvPr id="8" name="Text 3"/>
           <p:cNvSpPr txBox="1"/>
           <p:nvPr/>
         </p:nvSpPr>
         <p:spPr>
           <a:xfrm>
-            <a:off x="9281160" y="2286000"/>
-            <a:ext cx="2286000" cy="480060"/>
-          </a:xfrm>
-          <a:prstGeom prst="rect">
-            <a:avLst/>
-          </a:prstGeom>
-          <a:noFill/>
-          <a:ln/>
-        </p:spPr>
-        <p:txBody>
-          <a:bodyPr wrap="square" lIns="0" tIns="0" rIns="0" bIns="0" rtlCol="0" anchor="b"/>
-          <a:lstStyle/>
-          <a:p>
-            <a:pPr indent="0" marL="0">
-              <a:buNone/>
-            </a:pPr>
-            <a:r>
-              <a:rPr lang="en-US" sz="1600" b="1" dirty="0">
-                <a:solidFill>
-                  <a:srgbClr val="4E8A2B"/>
-                </a:solidFill>
-              </a:rPr>
-              <a:t>Distribuidoras</a:t>
-            </a:r>
-            <a:endParaRPr lang="en-US" sz="1600" dirty="0"/>
-          </a:p>
-        </p:txBody>
-      </p:sp>
-      <p:sp>
-        <p:nvSpPr>
-          <p:cNvPr id="15" name="Text 10"/>
-          <p:cNvSpPr txBox="1"/>
-          <p:nvPr/>
-        </p:nvSpPr>
-        <p:spPr>
-          <a:xfrm>
-            <a:off x="9281160" y="2766060"/>
-            <a:ext cx="2286000" cy="388620"/>
-          </a:xfrm>
-          <a:prstGeom prst="rect">
-            <a:avLst/>
-          </a:prstGeom>
-          <a:noFill/>
-          <a:ln/>
-        </p:spPr>
-        <p:txBody>
-          <a:bodyPr wrap="square" lIns="0" tIns="0" rIns="0" bIns="0" rtlCol="0" anchor="t"/>
-          <a:lstStyle/>
-          <a:p>
-            <a:pPr indent="0" marL="0">
-              <a:buNone/>
-            </a:pPr>
-            <a:r>
-              <a:rPr lang="en-US" sz="1200" dirty="0">
-                <a:solidFill>
-                  <a:srgbClr val="4E8A2B"/>
-                </a:solidFill>
-              </a:rPr>
-              <a:t>Altas, potencias, averías</a:t>
-            </a:r>
-            <a:endParaRPr lang="en-US" sz="1200" dirty="0"/>
-          </a:p>
-        </p:txBody>
-      </p:sp>
-      <p:sp>
-        <p:nvSpPr>
-          <p:cNvPr id="16" name="Shape 11"/>
-          <p:cNvSpPr/>
-          <p:nvPr/>
-        </p:nvSpPr>
-        <p:spPr>
-          <a:xfrm flipV="1">
-            <a:off x="7498080" y="2720340"/>
-            <a:ext cx="822960" cy="1211580"/>
-          </a:xfrm>
-          <a:prstGeom prst="line">
-            <a:avLst/>
-          </a:prstGeom>
-          <a:noFill/>
-          <a:ln w="25400">
-            <a:solidFill>
-              <a:srgbClr val="B8C2D3"/>
-            </a:solidFill>
-            <a:prstDash val="solid"/>
-            <a:tailEnd type="triangle"/>
-          </a:ln>
-        </p:spPr>
-      </p:sp>
-      <p:sp>
-        <p:nvSpPr>
-          <p:cNvPr id="17" name="Shape 12"/>
-          <p:cNvSpPr/>
-          <p:nvPr/>
-        </p:nvSpPr>
-        <p:spPr>
-          <a:xfrm>
-            <a:off x="8321040" y="3474720"/>
-            <a:ext cx="3383280" cy="1143000"/>
-          </a:xfrm>
-          <a:prstGeom prst="roundRect">
-            <a:avLst>
-              <a:gd name="adj" fmla="val 12000"/>
-            </a:avLst>
-          </a:prstGeom>
-          <a:solidFill>
-            <a:srgbClr val="FDF1E3"/>
-          </a:solidFill>
-          <a:ln/>
-        </p:spPr>
+            <a:off x="9162288" y="2834640"/>
+            <a:ext cx="2606040" cy="411480"/>
+          </a:xfrm>
+          <a:prstGeom prst="rect">
+            <a:avLst/>
+          </a:prstGeom>
+          <a:noFill/>
+          <a:ln/>
+        </p:spPr>
+        <p:txBody>
+          <a:bodyPr wrap="square" lIns="0" tIns="0" rIns="0" bIns="0" rtlCol="0" anchor="ctr"/>
+          <a:lstStyle/>
+          <a:p>
+            <a:pPr indent="0" marL="0">
+              <a:buNone/>
+            </a:pPr>
+            <a:r>
+              <a:rPr lang="en-US" sz="1300" dirty="0">
+                <a:solidFill>
+                  <a:srgbClr val="1F3260"/>
+                </a:solidFill>
+              </a:rPr>
+              <a:t>Negociación del contrato de suministro</a:t>
+            </a:r>
+            <a:endParaRPr lang="en-US" sz="1300" dirty="0"/>
+          </a:p>
+        </p:txBody>
       </p:sp>
       <p:pic>
         <p:nvPicPr>
-          <p:cNvPr id="18" name="Image 3" descr="preencoded.png">    </p:cNvPr>
+          <p:cNvPr id="9" name="Image 3" descr="preencoded.png">    </p:cNvPr>
           <p:cNvPicPr>
             <a:picLocks noChangeAspect="1"/>
           </p:cNvPicPr>
@@ -4343,8 +3980,8 @@
         </p:blipFill>
         <p:spPr>
           <a:xfrm>
-            <a:off x="8595360" y="3794760"/>
-            <a:ext cx="502920" cy="502920"/>
+            <a:off x="5760720" y="3465576"/>
+            <a:ext cx="256032" cy="256032"/>
           </a:xfrm>
           <a:prstGeom prst="rect">
             <a:avLst/>
@@ -4353,125 +3990,43 @@
       </p:pic>
       <p:sp>
         <p:nvSpPr>
-          <p:cNvPr id="19" name="Text 13"/>
+          <p:cNvPr id="10" name="Text 4"/>
           <p:cNvSpPr txBox="1"/>
           <p:nvPr/>
         </p:nvSpPr>
         <p:spPr>
           <a:xfrm>
-            <a:off x="9281160" y="3611880"/>
-            <a:ext cx="2286000" cy="480060"/>
-          </a:xfrm>
-          <a:prstGeom prst="rect">
-            <a:avLst/>
-          </a:prstGeom>
-          <a:noFill/>
-          <a:ln/>
-        </p:spPr>
-        <p:txBody>
-          <a:bodyPr wrap="square" lIns="0" tIns="0" rIns="0" bIns="0" rtlCol="0" anchor="b"/>
-          <a:lstStyle/>
-          <a:p>
-            <a:pPr indent="0" marL="0">
-              <a:buNone/>
-            </a:pPr>
-            <a:r>
-              <a:rPr lang="en-US" sz="1600" b="1" dirty="0">
-                <a:solidFill>
-                  <a:srgbClr val="C46E17"/>
-                </a:solidFill>
-              </a:rPr>
-              <a:t>Comercializadoras</a:t>
-            </a:r>
-            <a:endParaRPr lang="en-US" sz="1600" dirty="0"/>
-          </a:p>
-        </p:txBody>
-      </p:sp>
-      <p:sp>
-        <p:nvSpPr>
-          <p:cNvPr id="20" name="Text 14"/>
-          <p:cNvSpPr txBox="1"/>
-          <p:nvPr/>
-        </p:nvSpPr>
-        <p:spPr>
-          <a:xfrm>
-            <a:off x="9281160" y="4091940"/>
-            <a:ext cx="2286000" cy="388620"/>
-          </a:xfrm>
-          <a:prstGeom prst="rect">
-            <a:avLst/>
-          </a:prstGeom>
-          <a:noFill/>
-          <a:ln/>
-        </p:spPr>
-        <p:txBody>
-          <a:bodyPr wrap="square" lIns="0" tIns="0" rIns="0" bIns="0" rtlCol="0" anchor="t"/>
-          <a:lstStyle/>
-          <a:p>
-            <a:pPr indent="0" marL="0">
-              <a:buNone/>
-            </a:pPr>
-            <a:r>
-              <a:rPr lang="en-US" sz="1200" dirty="0">
-                <a:solidFill>
-                  <a:srgbClr val="C46E17"/>
-                </a:solidFill>
-              </a:rPr>
-              <a:t>Acuerdos y mejores condiciones</a:t>
-            </a:r>
-            <a:endParaRPr lang="en-US" sz="1200" dirty="0"/>
-          </a:p>
-        </p:txBody>
-      </p:sp>
-      <p:sp>
-        <p:nvSpPr>
-          <p:cNvPr id="21" name="Shape 15"/>
-          <p:cNvSpPr/>
-          <p:nvPr/>
-        </p:nvSpPr>
-        <p:spPr>
-          <a:xfrm>
-            <a:off x="7498080" y="3931920"/>
-            <a:ext cx="822960" cy="114300"/>
-          </a:xfrm>
-          <a:prstGeom prst="line">
-            <a:avLst/>
-          </a:prstGeom>
-          <a:noFill/>
-          <a:ln w="25400">
-            <a:solidFill>
-              <a:srgbClr val="B8C2D3"/>
-            </a:solidFill>
-            <a:prstDash val="solid"/>
-            <a:tailEnd type="triangle"/>
-          </a:ln>
-        </p:spPr>
-      </p:sp>
-      <p:sp>
-        <p:nvSpPr>
-          <p:cNvPr id="22" name="Shape 16"/>
-          <p:cNvSpPr/>
-          <p:nvPr/>
-        </p:nvSpPr>
-        <p:spPr>
-          <a:xfrm>
-            <a:off x="8321040" y="4800600"/>
-            <a:ext cx="3383280" cy="1143000"/>
-          </a:xfrm>
-          <a:prstGeom prst="roundRect">
-            <a:avLst>
-              <a:gd name="adj" fmla="val 12000"/>
-            </a:avLst>
-          </a:prstGeom>
-          <a:solidFill>
-            <a:srgbClr val="F4F6F9"/>
-          </a:solidFill>
-          <a:ln/>
-        </p:spPr>
+            <a:off x="6144768" y="3401568"/>
+            <a:ext cx="2606040" cy="411480"/>
+          </a:xfrm>
+          <a:prstGeom prst="rect">
+            <a:avLst/>
+          </a:prstGeom>
+          <a:noFill/>
+          <a:ln/>
+        </p:spPr>
+        <p:txBody>
+          <a:bodyPr wrap="square" lIns="0" tIns="0" rIns="0" bIns="0" rtlCol="0" anchor="ctr"/>
+          <a:lstStyle/>
+          <a:p>
+            <a:pPr indent="0" marL="0">
+              <a:buNone/>
+            </a:pPr>
+            <a:r>
+              <a:rPr lang="en-US" sz="1300" dirty="0">
+                <a:solidFill>
+                  <a:srgbClr val="1F3260"/>
+                </a:solidFill>
+              </a:rPr>
+              <a:t>Optimización de potencia</a:t>
+            </a:r>
+            <a:endParaRPr lang="en-US" sz="1300" dirty="0"/>
+          </a:p>
+        </p:txBody>
       </p:sp>
       <p:pic>
         <p:nvPicPr>
-          <p:cNvPr id="23" name="Image 4" descr="preencoded.png">    </p:cNvPr>
+          <p:cNvPr id="11" name="Image 4" descr="preencoded.png">    </p:cNvPr>
           <p:cNvPicPr>
             <a:picLocks noChangeAspect="1"/>
           </p:cNvPicPr>
@@ -4485,8 +4040,8 @@
         </p:blipFill>
         <p:spPr>
           <a:xfrm>
-            <a:off x="8595360" y="5120640"/>
-            <a:ext cx="502920" cy="502920"/>
+            <a:off x="8778240" y="3465576"/>
+            <a:ext cx="256032" cy="256032"/>
           </a:xfrm>
           <a:prstGeom prst="rect">
             <a:avLst/>
@@ -4495,157 +4050,346 @@
       </p:pic>
       <p:sp>
         <p:nvSpPr>
-          <p:cNvPr id="24" name="Text 17"/>
+          <p:cNvPr id="12" name="Text 5"/>
           <p:cNvSpPr txBox="1"/>
           <p:nvPr/>
         </p:nvSpPr>
         <p:spPr>
           <a:xfrm>
-            <a:off x="9281160" y="4937760"/>
-            <a:ext cx="2286000" cy="480060"/>
-          </a:xfrm>
-          <a:prstGeom prst="rect">
-            <a:avLst/>
-          </a:prstGeom>
-          <a:noFill/>
-          <a:ln/>
-        </p:spPr>
-        <p:txBody>
-          <a:bodyPr wrap="square" lIns="0" tIns="0" rIns="0" bIns="0" rtlCol="0" anchor="b"/>
-          <a:lstStyle/>
-          <a:p>
+            <a:off x="9162288" y="3401568"/>
+            <a:ext cx="2606040" cy="411480"/>
+          </a:xfrm>
+          <a:prstGeom prst="rect">
+            <a:avLst/>
+          </a:prstGeom>
+          <a:noFill/>
+          <a:ln/>
+        </p:spPr>
+        <p:txBody>
+          <a:bodyPr wrap="square" lIns="0" tIns="0" rIns="0" bIns="0" rtlCol="0" anchor="ctr"/>
+          <a:lstStyle/>
+          <a:p>
+            <a:pPr indent="0" marL="0">
+              <a:buNone/>
+            </a:pPr>
+            <a:r>
+              <a:rPr lang="en-US" sz="1300" dirty="0">
+                <a:solidFill>
+                  <a:srgbClr val="1F3260"/>
+                </a:solidFill>
+              </a:rPr>
+              <a:t>Control de energía reactiva</a:t>
+            </a:r>
+            <a:endParaRPr lang="en-US" sz="1300" dirty="0"/>
+          </a:p>
+        </p:txBody>
+      </p:sp>
+      <p:pic>
+        <p:nvPicPr>
+          <p:cNvPr id="13" name="Image 5" descr="preencoded.png">    </p:cNvPr>
+          <p:cNvPicPr>
+            <a:picLocks noChangeAspect="1"/>
+          </p:cNvPicPr>
+          <p:nvPr/>
+        </p:nvPicPr>
+        <p:blipFill>
+          <a:blip r:embed="rId6"/>
+          <a:stretch>
+            <a:fillRect/>
+          </a:stretch>
+        </p:blipFill>
+        <p:spPr>
+          <a:xfrm>
+            <a:off x="5760720" y="4032504"/>
+            <a:ext cx="256032" cy="256032"/>
+          </a:xfrm>
+          <a:prstGeom prst="rect">
+            <a:avLst/>
+          </a:prstGeom>
+        </p:spPr>
+      </p:pic>
+      <p:sp>
+        <p:nvSpPr>
+          <p:cNvPr id="14" name="Text 6"/>
+          <p:cNvSpPr txBox="1"/>
+          <p:nvPr/>
+        </p:nvSpPr>
+        <p:spPr>
+          <a:xfrm>
+            <a:off x="6144768" y="3968496"/>
+            <a:ext cx="2606040" cy="411480"/>
+          </a:xfrm>
+          <a:prstGeom prst="rect">
+            <a:avLst/>
+          </a:prstGeom>
+          <a:noFill/>
+          <a:ln/>
+        </p:spPr>
+        <p:txBody>
+          <a:bodyPr wrap="square" lIns="0" tIns="0" rIns="0" bIns="0" rtlCol="0" anchor="ctr"/>
+          <a:lstStyle/>
+          <a:p>
+            <a:pPr indent="0" marL="0">
+              <a:buNone/>
+            </a:pPr>
+            <a:r>
+              <a:rPr lang="en-US" sz="1300" dirty="0">
+                <a:solidFill>
+                  <a:srgbClr val="1F3260"/>
+                </a:solidFill>
+              </a:rPr>
+              <a:t>Gestión de cambios y reclamaciones</a:t>
+            </a:r>
+            <a:endParaRPr lang="en-US" sz="1300" dirty="0"/>
+          </a:p>
+        </p:txBody>
+      </p:sp>
+      <p:pic>
+        <p:nvPicPr>
+          <p:cNvPr id="15" name="Image 6" descr="preencoded.png">    </p:cNvPr>
+          <p:cNvPicPr>
+            <a:picLocks noChangeAspect="1"/>
+          </p:cNvPicPr>
+          <p:nvPr/>
+        </p:nvPicPr>
+        <p:blipFill>
+          <a:blip r:embed="rId7"/>
+          <a:stretch>
+            <a:fillRect/>
+          </a:stretch>
+        </p:blipFill>
+        <p:spPr>
+          <a:xfrm>
+            <a:off x="8778240" y="4032504"/>
+            <a:ext cx="256032" cy="256032"/>
+          </a:xfrm>
+          <a:prstGeom prst="rect">
+            <a:avLst/>
+          </a:prstGeom>
+        </p:spPr>
+      </p:pic>
+      <p:sp>
+        <p:nvSpPr>
+          <p:cNvPr id="16" name="Text 7"/>
+          <p:cNvSpPr txBox="1"/>
+          <p:nvPr/>
+        </p:nvSpPr>
+        <p:spPr>
+          <a:xfrm>
+            <a:off x="9162288" y="3968496"/>
+            <a:ext cx="2606040" cy="411480"/>
+          </a:xfrm>
+          <a:prstGeom prst="rect">
+            <a:avLst/>
+          </a:prstGeom>
+          <a:noFill/>
+          <a:ln/>
+        </p:spPr>
+        <p:txBody>
+          <a:bodyPr wrap="square" lIns="0" tIns="0" rIns="0" bIns="0" rtlCol="0" anchor="ctr"/>
+          <a:lstStyle/>
+          <a:p>
+            <a:pPr indent="0" marL="0">
+              <a:buNone/>
+            </a:pPr>
+            <a:r>
+              <a:rPr lang="en-US" sz="1300" dirty="0">
+                <a:solidFill>
+                  <a:srgbClr val="1F3260"/>
+                </a:solidFill>
+              </a:rPr>
+              <a:t>Gestión de compensación</a:t>
+            </a:r>
+            <a:endParaRPr lang="en-US" sz="1300" dirty="0"/>
+          </a:p>
+        </p:txBody>
+      </p:sp>
+      <p:pic>
+        <p:nvPicPr>
+          <p:cNvPr id="17" name="Image 7" descr="preencoded.png">    </p:cNvPr>
+          <p:cNvPicPr>
+            <a:picLocks noChangeAspect="1"/>
+          </p:cNvPicPr>
+          <p:nvPr/>
+        </p:nvPicPr>
+        <p:blipFill>
+          <a:blip r:embed="rId8"/>
+          <a:stretch>
+            <a:fillRect/>
+          </a:stretch>
+        </p:blipFill>
+        <p:spPr>
+          <a:xfrm>
+            <a:off x="5760720" y="4599432"/>
+            <a:ext cx="256032" cy="256032"/>
+          </a:xfrm>
+          <a:prstGeom prst="rect">
+            <a:avLst/>
+          </a:prstGeom>
+        </p:spPr>
+      </p:pic>
+      <p:sp>
+        <p:nvSpPr>
+          <p:cNvPr id="18" name="Text 8"/>
+          <p:cNvSpPr txBox="1"/>
+          <p:nvPr/>
+        </p:nvSpPr>
+        <p:spPr>
+          <a:xfrm>
+            <a:off x="6144768" y="4535424"/>
+            <a:ext cx="2606040" cy="411480"/>
+          </a:xfrm>
+          <a:prstGeom prst="rect">
+            <a:avLst/>
+          </a:prstGeom>
+          <a:noFill/>
+          <a:ln/>
+        </p:spPr>
+        <p:txBody>
+          <a:bodyPr wrap="square" lIns="0" tIns="0" rIns="0" bIns="0" rtlCol="0" anchor="ctr"/>
+          <a:lstStyle/>
+          <a:p>
+            <a:pPr indent="0" marL="0">
+              <a:buNone/>
+            </a:pPr>
+            <a:r>
+              <a:rPr lang="en-US" sz="1300" dirty="0">
+                <a:solidFill>
+                  <a:srgbClr val="1F3260"/>
+                </a:solidFill>
+              </a:rPr>
+              <a:t>Altas de nuevo suministro</a:t>
+            </a:r>
+            <a:endParaRPr lang="en-US" sz="1300" dirty="0"/>
+          </a:p>
+        </p:txBody>
+      </p:sp>
+      <p:pic>
+        <p:nvPicPr>
+          <p:cNvPr id="19" name="Image 8" descr="preencoded.png">    </p:cNvPr>
+          <p:cNvPicPr>
+            <a:picLocks noChangeAspect="1"/>
+          </p:cNvPicPr>
+          <p:nvPr/>
+        </p:nvPicPr>
+        <p:blipFill>
+          <a:blip r:embed="rId9"/>
+          <a:stretch>
+            <a:fillRect/>
+          </a:stretch>
+        </p:blipFill>
+        <p:spPr>
+          <a:xfrm>
+            <a:off x="8778240" y="4599432"/>
+            <a:ext cx="256032" cy="256032"/>
+          </a:xfrm>
+          <a:prstGeom prst="rect">
+            <a:avLst/>
+          </a:prstGeom>
+        </p:spPr>
+      </p:pic>
+      <p:sp>
+        <p:nvSpPr>
+          <p:cNvPr id="20" name="Text 9"/>
+          <p:cNvSpPr txBox="1"/>
+          <p:nvPr/>
+        </p:nvSpPr>
+        <p:spPr>
+          <a:xfrm>
+            <a:off x="9162288" y="4535424"/>
+            <a:ext cx="2606040" cy="411480"/>
+          </a:xfrm>
+          <a:prstGeom prst="rect">
+            <a:avLst/>
+          </a:prstGeom>
+          <a:noFill/>
+          <a:ln/>
+        </p:spPr>
+        <p:txBody>
+          <a:bodyPr wrap="square" lIns="0" tIns="0" rIns="0" bIns="0" rtlCol="0" anchor="ctr"/>
+          <a:lstStyle/>
+          <a:p>
+            <a:pPr indent="0" marL="0">
+              <a:buNone/>
+            </a:pPr>
+            <a:r>
+              <a:rPr lang="en-US" sz="1300" dirty="0">
+                <a:solidFill>
+                  <a:srgbClr val="1F3260"/>
+                </a:solidFill>
+              </a:rPr>
+              <a:t>Revisión técnica</a:t>
+            </a:r>
+            <a:endParaRPr lang="en-US" sz="1300" dirty="0"/>
+          </a:p>
+        </p:txBody>
+      </p:sp>
+      <p:sp>
+        <p:nvSpPr>
+          <p:cNvPr id="21" name="Shape 10"/>
+          <p:cNvSpPr/>
+          <p:nvPr/>
+        </p:nvSpPr>
+        <p:spPr>
+          <a:xfrm>
+            <a:off x="5760720" y="5257800"/>
+            <a:ext cx="5943600" cy="868680"/>
+          </a:xfrm>
+          <a:prstGeom prst="roundRect">
+            <a:avLst>
+              <a:gd name="adj" fmla="val 10526"/>
+            </a:avLst>
+          </a:prstGeom>
+          <a:solidFill>
+            <a:srgbClr val="EFF6E6"/>
+          </a:solidFill>
+          <a:ln/>
+        </p:spPr>
+      </p:sp>
+      <p:sp>
+        <p:nvSpPr>
+          <p:cNvPr id="22" name="Text 11"/>
+          <p:cNvSpPr txBox="1"/>
+          <p:nvPr/>
+        </p:nvSpPr>
+        <p:spPr>
+          <a:xfrm>
+            <a:off x="6035040" y="5257800"/>
+            <a:ext cx="5486400" cy="868680"/>
+          </a:xfrm>
+          <a:prstGeom prst="rect">
+            <a:avLst/>
+          </a:prstGeom>
+          <a:noFill/>
+          <a:ln/>
+        </p:spPr>
+        <p:txBody>
+          <a:bodyPr wrap="square" lIns="0" tIns="0" rIns="0" bIns="0" rtlCol="0" anchor="ctr"/>
+          <a:lstStyle/>
+          <a:p>
+            <a:pPr indent="0" marL="0">
+              <a:buNone/>
+            </a:pPr>
+            <a:r>
+              <a:rPr lang="en-US" sz="1600" dirty="0">
+                <a:solidFill>
+                  <a:srgbClr val="1F3260"/>
+                </a:solidFill>
+              </a:rPr>
+              <a:t>Todo ello </a:t>
+            </a:r>
             <a:pPr indent="0" marL="0">
               <a:buNone/>
             </a:pPr>
             <a:r>
               <a:rPr lang="en-US" sz="1600" b="1" dirty="0">
                 <a:solidFill>
-                  <a:srgbClr val="1F3260"/>
-                </a:solidFill>
-              </a:rPr>
-              <a:t>Operadoras</a:t>
+                  <a:srgbClr val="4E8A2B"/>
+                </a:solidFill>
+              </a:rPr>
+              <a:t>sin ningún coste y para siempre.</a:t>
             </a:r>
             <a:endParaRPr lang="en-US" sz="1600" dirty="0"/>
-          </a:p>
-        </p:txBody>
-      </p:sp>
-      <p:sp>
-        <p:nvSpPr>
-          <p:cNvPr id="25" name="Text 18"/>
-          <p:cNvSpPr txBox="1"/>
-          <p:nvPr/>
-        </p:nvSpPr>
-        <p:spPr>
-          <a:xfrm>
-            <a:off x="9281160" y="5417820"/>
-            <a:ext cx="2286000" cy="388620"/>
-          </a:xfrm>
-          <a:prstGeom prst="rect">
-            <a:avLst/>
-          </a:prstGeom>
-          <a:noFill/>
-          <a:ln/>
-        </p:spPr>
-        <p:txBody>
-          <a:bodyPr wrap="square" lIns="0" tIns="0" rIns="0" bIns="0" rtlCol="0" anchor="t"/>
-          <a:lstStyle/>
-          <a:p>
-            <a:pPr indent="0" marL="0">
-              <a:buNone/>
-            </a:pPr>
-            <a:r>
-              <a:rPr lang="en-US" sz="1200" dirty="0">
-                <a:solidFill>
-                  <a:srgbClr val="1F3260"/>
-                </a:solidFill>
-              </a:rPr>
-              <a:t>Fibra y móvil</a:t>
-            </a:r>
-            <a:endParaRPr lang="en-US" sz="1200" dirty="0"/>
-          </a:p>
-        </p:txBody>
-      </p:sp>
-      <p:sp>
-        <p:nvSpPr>
-          <p:cNvPr id="26" name="Shape 19"/>
-          <p:cNvSpPr/>
-          <p:nvPr/>
-        </p:nvSpPr>
-        <p:spPr>
-          <a:xfrm>
-            <a:off x="7498080" y="3931920"/>
-            <a:ext cx="822960" cy="1440180"/>
-          </a:xfrm>
-          <a:prstGeom prst="line">
-            <a:avLst/>
-          </a:prstGeom>
-          <a:noFill/>
-          <a:ln w="25400">
-            <a:solidFill>
-              <a:srgbClr val="B8C2D3"/>
-            </a:solidFill>
-            <a:prstDash val="solid"/>
-            <a:tailEnd type="triangle"/>
-          </a:ln>
-        </p:spPr>
-      </p:sp>
-      <p:sp>
-        <p:nvSpPr>
-          <p:cNvPr id="27" name="Shape 20"/>
-          <p:cNvSpPr/>
-          <p:nvPr/>
-        </p:nvSpPr>
-        <p:spPr>
-          <a:xfrm>
-            <a:off x="3383280" y="3931920"/>
-            <a:ext cx="822960" cy="0"/>
-          </a:xfrm>
-          <a:prstGeom prst="line">
-            <a:avLst/>
-          </a:prstGeom>
-          <a:noFill/>
-          <a:ln w="25400">
-            <a:solidFill>
-              <a:srgbClr val="B8C2D3"/>
-            </a:solidFill>
-            <a:prstDash val="solid"/>
-            <a:tailEnd type="triangle"/>
-          </a:ln>
-        </p:spPr>
-      </p:sp>
-      <p:sp>
-        <p:nvSpPr>
-          <p:cNvPr id="28" name="Text 21"/>
-          <p:cNvSpPr txBox="1"/>
-          <p:nvPr/>
-        </p:nvSpPr>
-        <p:spPr>
-          <a:xfrm>
-            <a:off x="457200" y="5852160"/>
-            <a:ext cx="11247120" cy="365760"/>
-          </a:xfrm>
-          <a:prstGeom prst="rect">
-            <a:avLst/>
-          </a:prstGeom>
-          <a:noFill/>
-          <a:ln/>
-        </p:spPr>
-        <p:txBody>
-          <a:bodyPr wrap="square" lIns="0" tIns="0" rIns="0" bIns="0" rtlCol="0" anchor="ctr"/>
-          <a:lstStyle/>
-          <a:p>
-            <a:pPr indent="0" marL="0">
-              <a:buNone/>
-            </a:pPr>
-            <a:r>
-              <a:rPr lang="en-US" sz="1400" b="1" dirty="0">
-                <a:solidFill>
-                  <a:srgbClr val="4E8A2B"/>
-                </a:solidFill>
-              </a:rPr>
-              <a:t>Resultado: incidencias resueltas antes y seguimiento durante toda la vida del contrato.</a:t>
-            </a:r>
-            <a:endParaRPr lang="en-US" sz="1400" dirty="0"/>
           </a:p>
         </p:txBody>
       </p:sp>
@@ -4751,7 +4495,7 @@
                   <a:schemeClr val="tx2"/>
                 </a:solidFill>
               </a:rPr>
-              <a:t>¿Por qué elegir MESENERGIA?</a:t>
+              <a:t>Asesoramiento energético y en telecomunicaciones</a:t>
             </a:r>
             <a:endParaRPr lang="en-US" sz="3000" dirty="0"/>
           </a:p>
@@ -4765,8 +4509,8 @@
         </p:nvSpPr>
         <p:spPr>
           <a:xfrm>
-            <a:off x="457200" y="1828800"/>
-            <a:ext cx="3520440" cy="1005840"/>
+            <a:off x="457200" y="1600200"/>
+            <a:ext cx="10972800" cy="365760"/>
           </a:xfrm>
           <a:prstGeom prst="rect">
             <a:avLst/>
@@ -4782,48 +4526,12 @@
               <a:buNone/>
             </a:pPr>
             <a:r>
-              <a:rPr lang="en-US" sz="6000" b="1" dirty="0">
-                <a:solidFill>
-                  <a:srgbClr val="4E8A2B"/>
-                </a:solidFill>
-              </a:rPr>
-              <a:t>+10</a:t>
-            </a:r>
-            <a:endParaRPr lang="en-US" sz="6000" dirty="0"/>
-          </a:p>
-        </p:txBody>
-      </p:sp>
-      <p:sp>
-        <p:nvSpPr>
-          <p:cNvPr id="4" name="Text 2"/>
-          <p:cNvSpPr txBox="1"/>
-          <p:nvPr/>
-        </p:nvSpPr>
-        <p:spPr>
-          <a:xfrm>
-            <a:off x="457200" y="2834640"/>
-            <a:ext cx="3291840" cy="640080"/>
-          </a:xfrm>
-          <a:prstGeom prst="rect">
-            <a:avLst/>
-          </a:prstGeom>
-          <a:noFill/>
-          <a:ln/>
-        </p:spPr>
-        <p:txBody>
-          <a:bodyPr wrap="square" lIns="0" tIns="0" rIns="0" bIns="0" rtlCol="0" anchor="t"/>
-          <a:lstStyle/>
-          <a:p>
-            <a:pPr indent="0" marL="0">
-              <a:buNone/>
-            </a:pPr>
-            <a:r>
               <a:rPr lang="en-US" sz="1500" dirty="0">
                 <a:solidFill>
                   <a:srgbClr val="5D6472"/>
                 </a:solidFill>
               </a:rPr>
-              <a:t>años de experiencia</a:t>
+              <a:t>Un único interlocutor para todos los suministros de tu empresa o tu hogar</a:t>
             </a:r>
             <a:endParaRPr lang="en-US" sz="1500" dirty="0"/>
           </a:p>
@@ -4831,173 +4539,70 @@
       </p:sp>
       <p:sp>
         <p:nvSpPr>
-          <p:cNvPr id="5" name="Text 3"/>
-          <p:cNvSpPr txBox="1"/>
-          <p:nvPr/>
-        </p:nvSpPr>
-        <p:spPr>
-          <a:xfrm>
-            <a:off x="4251960" y="1828800"/>
-            <a:ext cx="3520440" cy="1005840"/>
-          </a:xfrm>
-          <a:prstGeom prst="rect">
-            <a:avLst/>
-          </a:prstGeom>
-          <a:noFill/>
-          <a:ln/>
-        </p:spPr>
-        <p:txBody>
-          <a:bodyPr wrap="square" lIns="0" tIns="0" rIns="0" bIns="0" rtlCol="0" anchor="ctr"/>
-          <a:lstStyle/>
-          <a:p>
-            <a:pPr indent="0" marL="0">
-              <a:buNone/>
-            </a:pPr>
-            <a:r>
-              <a:rPr lang="en-US" sz="6000" b="1" dirty="0">
-                <a:solidFill>
-                  <a:srgbClr val="C46E17"/>
-                </a:solidFill>
-              </a:rPr>
-              <a:t>+10.000</a:t>
-            </a:r>
-            <a:endParaRPr lang="en-US" sz="6000" dirty="0"/>
-          </a:p>
-        </p:txBody>
-      </p:sp>
-      <p:sp>
-        <p:nvSpPr>
-          <p:cNvPr id="6" name="Text 4"/>
-          <p:cNvSpPr txBox="1"/>
-          <p:nvPr/>
-        </p:nvSpPr>
-        <p:spPr>
-          <a:xfrm>
-            <a:off x="4251960" y="2834640"/>
-            <a:ext cx="3291840" cy="640080"/>
-          </a:xfrm>
-          <a:prstGeom prst="rect">
-            <a:avLst/>
-          </a:prstGeom>
-          <a:noFill/>
-          <a:ln/>
-        </p:spPr>
-        <p:txBody>
-          <a:bodyPr wrap="square" lIns="0" tIns="0" rIns="0" bIns="0" rtlCol="0" anchor="t"/>
-          <a:lstStyle/>
-          <a:p>
-            <a:pPr indent="0" marL="0">
-              <a:buNone/>
-            </a:pPr>
-            <a:r>
-              <a:rPr lang="en-US" sz="1500" dirty="0">
-                <a:solidFill>
-                  <a:srgbClr val="5D6472"/>
-                </a:solidFill>
-              </a:rPr>
-              <a:t>clientes entre empresas y autónomos</a:t>
-            </a:r>
-            <a:endParaRPr lang="en-US" sz="1500" dirty="0"/>
-          </a:p>
-        </p:txBody>
-      </p:sp>
-      <p:sp>
-        <p:nvSpPr>
-          <p:cNvPr id="7" name="Text 5"/>
-          <p:cNvSpPr txBox="1"/>
-          <p:nvPr/>
-        </p:nvSpPr>
-        <p:spPr>
-          <a:xfrm>
-            <a:off x="8046720" y="1828800"/>
-            <a:ext cx="3520440" cy="1005840"/>
-          </a:xfrm>
-          <a:prstGeom prst="rect">
-            <a:avLst/>
-          </a:prstGeom>
-          <a:noFill/>
-          <a:ln/>
-        </p:spPr>
-        <p:txBody>
-          <a:bodyPr wrap="square" lIns="0" tIns="0" rIns="0" bIns="0" rtlCol="0" anchor="ctr"/>
-          <a:lstStyle/>
-          <a:p>
-            <a:pPr indent="0" marL="0">
-              <a:buNone/>
-            </a:pPr>
-            <a:r>
-              <a:rPr lang="en-US" sz="6000" b="1" dirty="0">
-                <a:solidFill>
-                  <a:srgbClr val="1F3260"/>
-                </a:solidFill>
-              </a:rPr>
-              <a:t>&lt;4%</a:t>
-            </a:r>
-            <a:endParaRPr lang="en-US" sz="6000" dirty="0"/>
-          </a:p>
-        </p:txBody>
-      </p:sp>
-      <p:sp>
-        <p:nvSpPr>
-          <p:cNvPr id="8" name="Text 6"/>
-          <p:cNvSpPr txBox="1"/>
-          <p:nvPr/>
-        </p:nvSpPr>
-        <p:spPr>
-          <a:xfrm>
-            <a:off x="8046720" y="2834640"/>
-            <a:ext cx="3291840" cy="640080"/>
-          </a:xfrm>
-          <a:prstGeom prst="rect">
-            <a:avLst/>
-          </a:prstGeom>
-          <a:noFill/>
-          <a:ln/>
-        </p:spPr>
-        <p:txBody>
-          <a:bodyPr wrap="square" lIns="0" tIns="0" rIns="0" bIns="0" rtlCol="0" anchor="t"/>
-          <a:lstStyle/>
-          <a:p>
-            <a:pPr indent="0" marL="0">
-              <a:buNone/>
-            </a:pPr>
-            <a:r>
-              <a:rPr lang="en-US" sz="1500" dirty="0">
-                <a:solidFill>
-                  <a:srgbClr val="5D6472"/>
-                </a:solidFill>
-              </a:rPr>
-              <a:t>índice de bajas gracias a la postventa</a:t>
-            </a:r>
-            <a:endParaRPr lang="en-US" sz="1500" dirty="0"/>
-          </a:p>
-        </p:txBody>
-      </p:sp>
-      <p:sp>
-        <p:nvSpPr>
-          <p:cNvPr id="9" name="Shape 7"/>
+          <p:cNvPr id="4" name="Shape 2"/>
           <p:cNvSpPr/>
           <p:nvPr/>
         </p:nvSpPr>
         <p:spPr>
           <a:xfrm>
-            <a:off x="457200" y="3931920"/>
-            <a:ext cx="3520440" cy="868680"/>
+            <a:off x="457200" y="2148840"/>
+            <a:ext cx="5486400" cy="4023360"/>
           </a:xfrm>
           <a:prstGeom prst="roundRect">
             <a:avLst>
-              <a:gd name="adj" fmla="val 10526"/>
+              <a:gd name="adj" fmla="val 3409"/>
             </a:avLst>
           </a:prstGeom>
           <a:solidFill>
             <a:srgbClr val="F4F6F9"/>
           </a:solidFill>
-          <a:ln/>
-        </p:spPr>
+          <a:ln w="12700">
+            <a:solidFill>
+              <a:srgbClr val="DCE3EC"/>
+            </a:solidFill>
+            <a:prstDash val="solid"/>
+          </a:ln>
+        </p:spPr>
+      </p:sp>
+      <p:sp>
+        <p:nvSpPr>
+          <p:cNvPr id="5" name="Text 3"/>
+          <p:cNvSpPr txBox="1"/>
+          <p:nvPr/>
+        </p:nvSpPr>
+        <p:spPr>
+          <a:xfrm>
+            <a:off x="822960" y="2331720"/>
+            <a:ext cx="4572000" cy="365760"/>
+          </a:xfrm>
+          <a:prstGeom prst="rect">
+            <a:avLst/>
+          </a:prstGeom>
+          <a:noFill/>
+          <a:ln/>
+        </p:spPr>
+        <p:txBody>
+          <a:bodyPr wrap="square" lIns="0" tIns="0" rIns="0" bIns="0" rtlCol="0" anchor="ctr"/>
+          <a:lstStyle/>
+          <a:p>
+            <a:pPr indent="0" marL="0">
+              <a:buNone/>
+            </a:pPr>
+            <a:r>
+              <a:rPr lang="en-US" sz="1600" b="1" spc="300" kern="0" dirty="0">
+                <a:solidFill>
+                  <a:srgbClr val="4E8A2B"/>
+                </a:solidFill>
+              </a:rPr>
+              <a:t>ENERGÍA</a:t>
+            </a:r>
+            <a:endParaRPr lang="en-US" sz="1600" dirty="0"/>
+          </a:p>
+        </p:txBody>
       </p:sp>
       <p:pic>
         <p:nvPicPr>
-          <p:cNvPr id="10" name="Image 0" descr="preencoded.png">    </p:cNvPr>
+          <p:cNvPr id="6" name="Image 0" descr="logos/solar.png">    </p:cNvPr>
           <p:cNvPicPr>
             <a:picLocks noChangeAspect="1"/>
           </p:cNvPicPr>
@@ -5005,14 +4610,13 @@
         </p:nvPicPr>
         <p:blipFill>
           <a:blip r:embed="rId1"/>
-          <a:stretch>
-            <a:fillRect/>
-          </a:stretch>
+          <a:srcRect l="0" r="0" t="0" b="0"/>
+          <a:stretch/>
         </p:blipFill>
         <p:spPr>
           <a:xfrm>
-            <a:off x="685800" y="4160520"/>
-            <a:ext cx="411480" cy="411480"/>
+            <a:off x="822960" y="2788920"/>
+            <a:ext cx="4754880" cy="1600200"/>
           </a:xfrm>
           <a:prstGeom prst="rect">
             <a:avLst/>
@@ -5021,65 +4625,27 @@
       </p:pic>
       <p:sp>
         <p:nvSpPr>
-          <p:cNvPr id="11" name="Text 8"/>
-          <p:cNvSpPr txBox="1"/>
-          <p:nvPr/>
-        </p:nvSpPr>
-        <p:spPr>
-          <a:xfrm>
-            <a:off x="1280160" y="3931920"/>
-            <a:ext cx="2560320" cy="868680"/>
-          </a:xfrm>
-          <a:prstGeom prst="rect">
-            <a:avLst/>
-          </a:prstGeom>
-          <a:noFill/>
-          <a:ln/>
-        </p:spPr>
-        <p:txBody>
-          <a:bodyPr wrap="square" lIns="0" tIns="0" rIns="0" bIns="0" rtlCol="0" anchor="ctr"/>
-          <a:lstStyle/>
-          <a:p>
-            <a:pPr indent="0" marL="0">
-              <a:buNone/>
-            </a:pPr>
-            <a:r>
-              <a:rPr lang="en-US" sz="1400" b="1" dirty="0">
-                <a:solidFill>
-                  <a:srgbClr val="1F3260"/>
-                </a:solidFill>
-              </a:rPr>
-              <a:t>Innovación permanente de ofertas</a:t>
-            </a:r>
-            <a:endParaRPr lang="en-US" sz="1400" dirty="0"/>
-          </a:p>
-        </p:txBody>
-      </p:sp>
-      <p:sp>
-        <p:nvSpPr>
-          <p:cNvPr id="12" name="Shape 9"/>
+          <p:cNvPr id="7" name="Shape 4"/>
           <p:cNvSpPr/>
           <p:nvPr/>
         </p:nvSpPr>
         <p:spPr>
           <a:xfrm>
-            <a:off x="4251960" y="3931920"/>
-            <a:ext cx="3520440" cy="868680"/>
-          </a:xfrm>
-          <a:prstGeom prst="roundRect">
-            <a:avLst>
-              <a:gd name="adj" fmla="val 10526"/>
-            </a:avLst>
+            <a:off x="822960" y="4572000"/>
+            <a:ext cx="594360" cy="594360"/>
+          </a:xfrm>
+          <a:prstGeom prst="ellipse">
+            <a:avLst/>
           </a:prstGeom>
           <a:solidFill>
-            <a:srgbClr val="F4F6F9"/>
+            <a:srgbClr val="4E8A2B"/>
           </a:solidFill>
           <a:ln/>
         </p:spPr>
       </p:sp>
       <p:pic>
         <p:nvPicPr>
-          <p:cNvPr id="13" name="Image 1" descr="preencoded.png">    </p:cNvPr>
+          <p:cNvPr id="8" name="Image 1" descr="preencoded.png">    </p:cNvPr>
           <p:cNvPicPr>
             <a:picLocks noChangeAspect="1"/>
           </p:cNvPicPr>
@@ -5093,8 +4659,8 @@
         </p:blipFill>
         <p:spPr>
           <a:xfrm>
-            <a:off x="4480560" y="4160520"/>
-            <a:ext cx="411480" cy="411480"/>
+            <a:off x="969264" y="4718304"/>
+            <a:ext cx="301752" cy="301752"/>
           </a:xfrm>
           <a:prstGeom prst="rect">
             <a:avLst/>
@@ -5103,14 +4669,14 @@
       </p:pic>
       <p:sp>
         <p:nvSpPr>
-          <p:cNvPr id="14" name="Text 10"/>
+          <p:cNvPr id="9" name="Text 5"/>
           <p:cNvSpPr txBox="1"/>
           <p:nvPr/>
         </p:nvSpPr>
         <p:spPr>
           <a:xfrm>
-            <a:off x="5074920" y="3931920"/>
-            <a:ext cx="2560320" cy="868680"/>
+            <a:off x="1600200" y="4544568"/>
+            <a:ext cx="4114800" cy="329184"/>
           </a:xfrm>
           <a:prstGeom prst="rect">
             <a:avLst/>
@@ -5126,42 +4692,76 @@
               <a:buNone/>
             </a:pPr>
             <a:r>
-              <a:rPr lang="en-US" sz="1400" b="1" dirty="0">
+              <a:rPr lang="en-US" sz="1600" b="1" dirty="0">
                 <a:solidFill>
                   <a:srgbClr val="1F3260"/>
                 </a:solidFill>
               </a:rPr>
-              <a:t>Ofertas personalizadas de luz y gas</a:t>
-            </a:r>
-            <a:endParaRPr lang="en-US" sz="1400" dirty="0"/>
-          </a:p>
-        </p:txBody>
-      </p:sp>
-      <p:sp>
-        <p:nvSpPr>
-          <p:cNvPr id="15" name="Shape 11"/>
+              <a:t>Electricidad y gas</a:t>
+            </a:r>
+            <a:endParaRPr lang="en-US" sz="1600" dirty="0"/>
+          </a:p>
+        </p:txBody>
+      </p:sp>
+      <p:sp>
+        <p:nvSpPr>
+          <p:cNvPr id="10" name="Text 6"/>
+          <p:cNvSpPr txBox="1"/>
+          <p:nvPr/>
+        </p:nvSpPr>
+        <p:spPr>
+          <a:xfrm>
+            <a:off x="1600200" y="4873752"/>
+            <a:ext cx="4114800" cy="301752"/>
+          </a:xfrm>
+          <a:prstGeom prst="rect">
+            <a:avLst/>
+          </a:prstGeom>
+          <a:noFill/>
+          <a:ln/>
+        </p:spPr>
+        <p:txBody>
+          <a:bodyPr wrap="square" lIns="0" tIns="0" rIns="0" bIns="0" rtlCol="0" anchor="ctr"/>
+          <a:lstStyle/>
+          <a:p>
+            <a:pPr indent="0" marL="0">
+              <a:buNone/>
+            </a:pPr>
+            <a:r>
+              <a:rPr lang="en-US" sz="1300" dirty="0">
+                <a:solidFill>
+                  <a:srgbClr val="5D6472"/>
+                </a:solidFill>
+              </a:rPr>
+              <a:t>Tarifa fija o indexada, ofertas personalizadas</a:t>
+            </a:r>
+            <a:endParaRPr lang="en-US" sz="1300" dirty="0"/>
+          </a:p>
+        </p:txBody>
+      </p:sp>
+      <p:sp>
+        <p:nvSpPr>
+          <p:cNvPr id="11" name="Shape 7"/>
           <p:cNvSpPr/>
           <p:nvPr/>
         </p:nvSpPr>
         <p:spPr>
           <a:xfrm>
-            <a:off x="8046720" y="3931920"/>
-            <a:ext cx="3520440" cy="868680"/>
-          </a:xfrm>
-          <a:prstGeom prst="roundRect">
-            <a:avLst>
-              <a:gd name="adj" fmla="val 10526"/>
-            </a:avLst>
+            <a:off x="822960" y="5349240"/>
+            <a:ext cx="594360" cy="594360"/>
+          </a:xfrm>
+          <a:prstGeom prst="ellipse">
+            <a:avLst/>
           </a:prstGeom>
           <a:solidFill>
-            <a:srgbClr val="F4F6F9"/>
+            <a:srgbClr val="4E8A2B"/>
           </a:solidFill>
           <a:ln/>
         </p:spPr>
       </p:sp>
       <p:pic>
         <p:nvPicPr>
-          <p:cNvPr id="16" name="Image 2" descr="preencoded.png">    </p:cNvPr>
+          <p:cNvPr id="12" name="Image 2" descr="preencoded.png">    </p:cNvPr>
           <p:cNvPicPr>
             <a:picLocks noChangeAspect="1"/>
           </p:cNvPicPr>
@@ -5175,8 +4775,8 @@
         </p:blipFill>
         <p:spPr>
           <a:xfrm>
-            <a:off x="8275320" y="4160520"/>
-            <a:ext cx="411480" cy="411480"/>
+            <a:off x="969264" y="5495544"/>
+            <a:ext cx="301752" cy="301752"/>
           </a:xfrm>
           <a:prstGeom prst="rect">
             <a:avLst/>
@@ -5185,14 +4785,14 @@
       </p:pic>
       <p:sp>
         <p:nvSpPr>
-          <p:cNvPr id="17" name="Text 12"/>
+          <p:cNvPr id="13" name="Text 8"/>
           <p:cNvSpPr txBox="1"/>
           <p:nvPr/>
         </p:nvSpPr>
         <p:spPr>
           <a:xfrm>
-            <a:off x="8869680" y="3931920"/>
-            <a:ext cx="2560320" cy="868680"/>
+            <a:off x="1600200" y="5321808"/>
+            <a:ext cx="4114800" cy="329184"/>
           </a:xfrm>
           <a:prstGeom prst="rect">
             <a:avLst/>
@@ -5208,42 +4808,119 @@
               <a:buNone/>
             </a:pPr>
             <a:r>
-              <a:rPr lang="en-US" sz="1400" b="1" dirty="0">
+              <a:rPr lang="en-US" sz="1600" b="1" dirty="0">
                 <a:solidFill>
                   <a:srgbClr val="1F3260"/>
                 </a:solidFill>
               </a:rPr>
-              <a:t>Atención durante toda la vigencia</a:t>
-            </a:r>
-            <a:endParaRPr lang="en-US" sz="1400" dirty="0"/>
-          </a:p>
-        </p:txBody>
-      </p:sp>
-      <p:sp>
-        <p:nvSpPr>
-          <p:cNvPr id="18" name="Shape 13"/>
+              <a:t>Fotovoltaica y baterías</a:t>
+            </a:r>
+            <a:endParaRPr lang="en-US" sz="1600" dirty="0"/>
+          </a:p>
+        </p:txBody>
+      </p:sp>
+      <p:sp>
+        <p:nvSpPr>
+          <p:cNvPr id="14" name="Text 9"/>
+          <p:cNvSpPr txBox="1"/>
+          <p:nvPr/>
+        </p:nvSpPr>
+        <p:spPr>
+          <a:xfrm>
+            <a:off x="1600200" y="5650992"/>
+            <a:ext cx="4114800" cy="301752"/>
+          </a:xfrm>
+          <a:prstGeom prst="rect">
+            <a:avLst/>
+          </a:prstGeom>
+          <a:noFill/>
+          <a:ln/>
+        </p:spPr>
+        <p:txBody>
+          <a:bodyPr wrap="square" lIns="0" tIns="0" rIns="0" bIns="0" rtlCol="0" anchor="ctr"/>
+          <a:lstStyle/>
+          <a:p>
+            <a:pPr indent="0" marL="0">
+              <a:buNone/>
+            </a:pPr>
+            <a:r>
+              <a:rPr lang="en-US" sz="1300" dirty="0">
+                <a:solidFill>
+                  <a:srgbClr val="5D6472"/>
+                </a:solidFill>
+              </a:rPr>
+              <a:t>Red de colaboradores en todo el territorio</a:t>
+            </a:r>
+            <a:endParaRPr lang="en-US" sz="1300" dirty="0"/>
+          </a:p>
+        </p:txBody>
+      </p:sp>
+      <p:sp>
+        <p:nvSpPr>
+          <p:cNvPr id="15" name="Shape 10"/>
           <p:cNvSpPr/>
           <p:nvPr/>
         </p:nvSpPr>
         <p:spPr>
           <a:xfrm>
-            <a:off x="457200" y="4983480"/>
-            <a:ext cx="3520440" cy="868680"/>
+            <a:off x="6172200" y="2148840"/>
+            <a:ext cx="5486400" cy="4023360"/>
           </a:xfrm>
           <a:prstGeom prst="roundRect">
             <a:avLst>
-              <a:gd name="adj" fmla="val 10526"/>
+              <a:gd name="adj" fmla="val 3409"/>
             </a:avLst>
           </a:prstGeom>
           <a:solidFill>
             <a:srgbClr val="F4F6F9"/>
           </a:solidFill>
-          <a:ln/>
-        </p:spPr>
+          <a:ln w="12700">
+            <a:solidFill>
+              <a:srgbClr val="DCE3EC"/>
+            </a:solidFill>
+            <a:prstDash val="solid"/>
+          </a:ln>
+        </p:spPr>
+      </p:sp>
+      <p:sp>
+        <p:nvSpPr>
+          <p:cNvPr id="16" name="Text 11"/>
+          <p:cNvSpPr txBox="1"/>
+          <p:nvPr/>
+        </p:nvSpPr>
+        <p:spPr>
+          <a:xfrm>
+            <a:off x="6537960" y="2331720"/>
+            <a:ext cx="4572000" cy="365760"/>
+          </a:xfrm>
+          <a:prstGeom prst="rect">
+            <a:avLst/>
+          </a:prstGeom>
+          <a:noFill/>
+          <a:ln/>
+        </p:spPr>
+        <p:txBody>
+          <a:bodyPr wrap="square" lIns="0" tIns="0" rIns="0" bIns="0" rtlCol="0" anchor="ctr"/>
+          <a:lstStyle/>
+          <a:p>
+            <a:pPr indent="0" marL="0">
+              <a:buNone/>
+            </a:pPr>
+            <a:r>
+              <a:rPr lang="en-US" sz="1600" b="1" spc="300" kern="0" dirty="0">
+                <a:solidFill>
+                  <a:srgbClr val="C46E17"/>
+                </a:solidFill>
+              </a:rPr>
+              <a:t>TELECOMUNICACIONES</a:t>
+            </a:r>
+            <a:endParaRPr lang="en-US" sz="1600" dirty="0"/>
+          </a:p>
+        </p:txBody>
       </p:sp>
       <p:pic>
         <p:nvPicPr>
-          <p:cNvPr id="19" name="Image 3" descr="preencoded.png">    </p:cNvPr>
+          <p:cNvPr id="17" name="Image 3" descr="logos/operadoras.png">    </p:cNvPr>
           <p:cNvPicPr>
             <a:picLocks noChangeAspect="1"/>
           </p:cNvPicPr>
@@ -5251,14 +4928,13 @@
         </p:nvPicPr>
         <p:blipFill>
           <a:blip r:embed="rId4"/>
-          <a:stretch>
-            <a:fillRect/>
-          </a:stretch>
+          <a:srcRect l="0" r="0" t="0" b="0"/>
+          <a:stretch/>
         </p:blipFill>
         <p:spPr>
           <a:xfrm>
-            <a:off x="685800" y="5212080"/>
-            <a:ext cx="411480" cy="411480"/>
+            <a:off x="6537960" y="2788920"/>
+            <a:ext cx="4754880" cy="1600200"/>
           </a:xfrm>
           <a:prstGeom prst="rect">
             <a:avLst/>
@@ -5267,65 +4943,27 @@
       </p:pic>
       <p:sp>
         <p:nvSpPr>
-          <p:cNvPr id="20" name="Text 14"/>
-          <p:cNvSpPr txBox="1"/>
-          <p:nvPr/>
-        </p:nvSpPr>
-        <p:spPr>
-          <a:xfrm>
-            <a:off x="1280160" y="4983480"/>
-            <a:ext cx="2560320" cy="868680"/>
-          </a:xfrm>
-          <a:prstGeom prst="rect">
-            <a:avLst/>
-          </a:prstGeom>
-          <a:noFill/>
-          <a:ln/>
-        </p:spPr>
-        <p:txBody>
-          <a:bodyPr wrap="square" lIns="0" tIns="0" rIns="0" bIns="0" rtlCol="0" anchor="ctr"/>
-          <a:lstStyle/>
-          <a:p>
-            <a:pPr indent="0" marL="0">
-              <a:buNone/>
-            </a:pPr>
-            <a:r>
-              <a:rPr lang="en-US" sz="1400" b="1" dirty="0">
-                <a:solidFill>
-                  <a:srgbClr val="1F3260"/>
-                </a:solidFill>
-              </a:rPr>
-              <a:t>Análisis de medidas de ahorro</a:t>
-            </a:r>
-            <a:endParaRPr lang="en-US" sz="1400" dirty="0"/>
-          </a:p>
-        </p:txBody>
-      </p:sp>
-      <p:sp>
-        <p:nvSpPr>
-          <p:cNvPr id="21" name="Shape 15"/>
+          <p:cNvPr id="18" name="Shape 12"/>
           <p:cNvSpPr/>
           <p:nvPr/>
         </p:nvSpPr>
         <p:spPr>
           <a:xfrm>
-            <a:off x="4251960" y="4983480"/>
-            <a:ext cx="3520440" cy="868680"/>
-          </a:xfrm>
-          <a:prstGeom prst="roundRect">
-            <a:avLst>
-              <a:gd name="adj" fmla="val 10526"/>
-            </a:avLst>
+            <a:off x="6537960" y="4572000"/>
+            <a:ext cx="594360" cy="594360"/>
+          </a:xfrm>
+          <a:prstGeom prst="ellipse">
+            <a:avLst/>
           </a:prstGeom>
           <a:solidFill>
-            <a:srgbClr val="F4F6F9"/>
+            <a:srgbClr val="C46E17"/>
           </a:solidFill>
           <a:ln/>
         </p:spPr>
       </p:sp>
       <p:pic>
         <p:nvPicPr>
-          <p:cNvPr id="22" name="Image 4" descr="preencoded.png">    </p:cNvPr>
+          <p:cNvPr id="19" name="Image 4" descr="preencoded.png">    </p:cNvPr>
           <p:cNvPicPr>
             <a:picLocks noChangeAspect="1"/>
           </p:cNvPicPr>
@@ -5339,8 +4977,8 @@
         </p:blipFill>
         <p:spPr>
           <a:xfrm>
-            <a:off x="4480560" y="5212080"/>
-            <a:ext cx="411480" cy="411480"/>
+            <a:off x="6684264" y="4718304"/>
+            <a:ext cx="301752" cy="301752"/>
           </a:xfrm>
           <a:prstGeom prst="rect">
             <a:avLst/>
@@ -5349,14 +4987,14 @@
       </p:pic>
       <p:sp>
         <p:nvSpPr>
-          <p:cNvPr id="23" name="Text 16"/>
+          <p:cNvPr id="20" name="Text 13"/>
           <p:cNvSpPr txBox="1"/>
           <p:nvPr/>
         </p:nvSpPr>
         <p:spPr>
           <a:xfrm>
-            <a:off x="5074920" y="4983480"/>
-            <a:ext cx="2560320" cy="868680"/>
+            <a:off x="7315200" y="4544568"/>
+            <a:ext cx="4114800" cy="329184"/>
           </a:xfrm>
           <a:prstGeom prst="rect">
             <a:avLst/>
@@ -5372,42 +5010,76 @@
               <a:buNone/>
             </a:pPr>
             <a:r>
-              <a:rPr lang="en-US" sz="1400" b="1" dirty="0">
+              <a:rPr lang="en-US" sz="1600" b="1" dirty="0">
                 <a:solidFill>
                   <a:srgbClr val="1F3260"/>
                 </a:solidFill>
               </a:rPr>
-              <a:t>Oficina virtual para tus facturas</a:t>
-            </a:r>
-            <a:endParaRPr lang="en-US" sz="1400" dirty="0"/>
-          </a:p>
-        </p:txBody>
-      </p:sp>
-      <p:sp>
-        <p:nvSpPr>
-          <p:cNvPr id="24" name="Shape 17"/>
+              <a:t>Fibra, móvil y TV</a:t>
+            </a:r>
+            <a:endParaRPr lang="en-US" sz="1600" dirty="0"/>
+          </a:p>
+        </p:txBody>
+      </p:sp>
+      <p:sp>
+        <p:nvSpPr>
+          <p:cNvPr id="21" name="Text 14"/>
+          <p:cNvSpPr txBox="1"/>
+          <p:nvPr/>
+        </p:nvSpPr>
+        <p:spPr>
+          <a:xfrm>
+            <a:off x="7315200" y="4873752"/>
+            <a:ext cx="4114800" cy="301752"/>
+          </a:xfrm>
+          <a:prstGeom prst="rect">
+            <a:avLst/>
+          </a:prstGeom>
+          <a:noFill/>
+          <a:ln/>
+        </p:spPr>
+        <p:txBody>
+          <a:bodyPr wrap="square" lIns="0" tIns="0" rIns="0" bIns="0" rtlCol="0" anchor="ctr"/>
+          <a:lstStyle/>
+          <a:p>
+            <a:pPr indent="0" marL="0">
+              <a:buNone/>
+            </a:pPr>
+            <a:r>
+              <a:rPr lang="en-US" sz="1300" dirty="0">
+                <a:solidFill>
+                  <a:srgbClr val="5D6472"/>
+                </a:solidFill>
+              </a:rPr>
+              <a:t>Paquetes adaptados a tu negocio</a:t>
+            </a:r>
+            <a:endParaRPr lang="en-US" sz="1300" dirty="0"/>
+          </a:p>
+        </p:txBody>
+      </p:sp>
+      <p:sp>
+        <p:nvSpPr>
+          <p:cNvPr id="22" name="Shape 15"/>
           <p:cNvSpPr/>
           <p:nvPr/>
         </p:nvSpPr>
         <p:spPr>
           <a:xfrm>
-            <a:off x="8046720" y="4983480"/>
-            <a:ext cx="3520440" cy="868680"/>
-          </a:xfrm>
-          <a:prstGeom prst="roundRect">
-            <a:avLst>
-              <a:gd name="adj" fmla="val 10526"/>
-            </a:avLst>
+            <a:off x="6537960" y="5349240"/>
+            <a:ext cx="594360" cy="594360"/>
+          </a:xfrm>
+          <a:prstGeom prst="ellipse">
+            <a:avLst/>
           </a:prstGeom>
           <a:solidFill>
-            <a:srgbClr val="F4F6F9"/>
+            <a:srgbClr val="C46E17"/>
           </a:solidFill>
           <a:ln/>
         </p:spPr>
       </p:sp>
       <p:pic>
         <p:nvPicPr>
-          <p:cNvPr id="25" name="Image 5" descr="preencoded.png">    </p:cNvPr>
+          <p:cNvPr id="23" name="Image 5" descr="preencoded.png">    </p:cNvPr>
           <p:cNvPicPr>
             <a:picLocks noChangeAspect="1"/>
           </p:cNvPicPr>
@@ -5421,8 +5093,8 @@
         </p:blipFill>
         <p:spPr>
           <a:xfrm>
-            <a:off x="8275320" y="5212080"/>
-            <a:ext cx="411480" cy="411480"/>
+            <a:off x="6684264" y="5495544"/>
+            <a:ext cx="301752" cy="301752"/>
           </a:xfrm>
           <a:prstGeom prst="rect">
             <a:avLst/>
@@ -5431,14 +5103,14 @@
       </p:pic>
       <p:sp>
         <p:nvSpPr>
-          <p:cNvPr id="26" name="Text 18"/>
+          <p:cNvPr id="24" name="Text 16"/>
           <p:cNvSpPr txBox="1"/>
           <p:nvPr/>
         </p:nvSpPr>
         <p:spPr>
           <a:xfrm>
-            <a:off x="8869680" y="4983480"/>
-            <a:ext cx="2560320" cy="868680"/>
+            <a:off x="7315200" y="5321808"/>
+            <a:ext cx="4114800" cy="329184"/>
           </a:xfrm>
           <a:prstGeom prst="rect">
             <a:avLst/>
@@ -5454,14 +5126,50 @@
               <a:buNone/>
             </a:pPr>
             <a:r>
-              <a:rPr lang="en-US" sz="1400" b="1" dirty="0">
+              <a:rPr lang="en-US" sz="1600" b="1" dirty="0">
                 <a:solidFill>
                   <a:srgbClr val="1F3260"/>
                 </a:solidFill>
               </a:rPr>
-              <a:t>Información continua del sector</a:t>
-            </a:r>
-            <a:endParaRPr lang="en-US" sz="1400" dirty="0"/>
+              <a:t>Todas las operadoras</a:t>
+            </a:r>
+            <a:endParaRPr lang="en-US" sz="1600" dirty="0"/>
+          </a:p>
+        </p:txBody>
+      </p:sp>
+      <p:sp>
+        <p:nvSpPr>
+          <p:cNvPr id="25" name="Text 17"/>
+          <p:cNvSpPr txBox="1"/>
+          <p:nvPr/>
+        </p:nvSpPr>
+        <p:spPr>
+          <a:xfrm>
+            <a:off x="7315200" y="5650992"/>
+            <a:ext cx="4114800" cy="301752"/>
+          </a:xfrm>
+          <a:prstGeom prst="rect">
+            <a:avLst/>
+          </a:prstGeom>
+          <a:noFill/>
+          <a:ln/>
+        </p:spPr>
+        <p:txBody>
+          <a:bodyPr wrap="square" lIns="0" tIns="0" rIns="0" bIns="0" rtlCol="0" anchor="ctr"/>
+          <a:lstStyle/>
+          <a:p>
+            <a:pPr indent="0" marL="0">
+              <a:buNone/>
+            </a:pPr>
+            <a:r>
+              <a:rPr lang="en-US" sz="1300" dirty="0">
+                <a:solidFill>
+                  <a:srgbClr val="5D6472"/>
+                </a:solidFill>
+              </a:rPr>
+              <a:t>Trabajamos con todo el mercado</a:t>
+            </a:r>
+            <a:endParaRPr lang="en-US" sz="1300" dirty="0"/>
           </a:p>
         </p:txBody>
       </p:sp>
@@ -5521,6 +5229,1688 @@
 <file path=ppt/slides/slide7.xml><?xml version="1.0" encoding="utf-8"?>
 <p:sld xmlns:a="http://schemas.openxmlformats.org/drawingml/2006/main" xmlns:r="http://schemas.openxmlformats.org/officeDocument/2006/relationships" xmlns:p="http://schemas.openxmlformats.org/presentationml/2006/main">
   <p:cSld name="Slide 7">
+    <p:spTree>
+      <p:nvGrpSpPr>
+        <p:cNvPr id="1" name=""/>
+        <p:cNvGrpSpPr/>
+        <p:nvPr/>
+      </p:nvGrpSpPr>
+      <p:grpSpPr>
+        <a:xfrm>
+          <a:off x="0" y="0"/>
+          <a:ext cx="0" cy="0"/>
+          <a:chOff x="0" y="0"/>
+          <a:chExt cx="0" cy="0"/>
+        </a:xfrm>
+      </p:grpSpPr>
+      <p:sp>
+        <p:nvSpPr>
+          <p:cNvPr id="2" name="Text 1"/>
+          <p:cNvSpPr/>
+          <p:nvPr>
+            <p:ph idx="102" type="title" hasCustomPrompt="1"/>
+          </p:nvPr>
+        </p:nvSpPr>
+        <p:spPr>
+          <a:xfrm>
+            <a:off x="457200" y="868680"/>
+            <a:ext cx="11247120" cy="731520"/>
+          </a:xfrm>
+          <a:prstGeom prst="rect">
+            <a:avLst/>
+          </a:prstGeom>
+          <a:noFill/>
+          <a:ln/>
+        </p:spPr>
+        <p:txBody>
+          <a:bodyPr wrap="square" rtlCol="0" anchor="ctr"/>
+          <a:lstStyle/>
+          <a:p>
+            <a:pPr algn="l" indent="0" marL="0">
+              <a:buNone/>
+            </a:pPr>
+            <a:r>
+              <a:rPr lang="en-US" sz="3000" b="1" dirty="0">
+                <a:solidFill>
+                  <a:schemeClr val="tx2"/>
+                </a:solidFill>
+              </a:rPr>
+              <a:t>Contacto directo con distribución y canales principales</a:t>
+            </a:r>
+            <a:endParaRPr lang="en-US" sz="3000" dirty="0"/>
+          </a:p>
+        </p:txBody>
+      </p:sp>
+      <p:sp>
+        <p:nvSpPr>
+          <p:cNvPr id="3" name="Text 1"/>
+          <p:cNvSpPr txBox="1"/>
+          <p:nvPr/>
+        </p:nvSpPr>
+        <p:spPr>
+          <a:xfrm>
+            <a:off x="457200" y="1600200"/>
+            <a:ext cx="10972800" cy="365760"/>
+          </a:xfrm>
+          <a:prstGeom prst="rect">
+            <a:avLst/>
+          </a:prstGeom>
+          <a:noFill/>
+          <a:ln/>
+        </p:spPr>
+        <p:txBody>
+          <a:bodyPr wrap="square" lIns="0" tIns="0" rIns="0" bIns="0" rtlCol="0" anchor="ctr"/>
+          <a:lstStyle/>
+          <a:p>
+            <a:pPr indent="0" marL="0">
+              <a:buNone/>
+            </a:pPr>
+            <a:r>
+              <a:rPr lang="en-US" sz="1500" dirty="0">
+                <a:solidFill>
+                  <a:srgbClr val="5D6472"/>
+                </a:solidFill>
+              </a:rPr>
+              <a:t>Sin intermediarios innecesarios: tus gestiones llegan directas a quien las resuelve</a:t>
+            </a:r>
+            <a:endParaRPr lang="en-US" sz="1500" dirty="0"/>
+          </a:p>
+        </p:txBody>
+      </p:sp>
+      <p:sp>
+        <p:nvSpPr>
+          <p:cNvPr id="4" name="Shape 2"/>
+          <p:cNvSpPr/>
+          <p:nvPr/>
+        </p:nvSpPr>
+        <p:spPr>
+          <a:xfrm>
+            <a:off x="457200" y="3291840"/>
+            <a:ext cx="2926080" cy="1280160"/>
+          </a:xfrm>
+          <a:prstGeom prst="roundRect">
+            <a:avLst>
+              <a:gd name="adj" fmla="val 10714"/>
+            </a:avLst>
+          </a:prstGeom>
+          <a:solidFill>
+            <a:srgbClr val="F4F6F9"/>
+          </a:solidFill>
+          <a:ln/>
+        </p:spPr>
+      </p:sp>
+      <p:pic>
+        <p:nvPicPr>
+          <p:cNvPr id="5" name="Image 0" descr="preencoded.png">    </p:cNvPr>
+          <p:cNvPicPr>
+            <a:picLocks noChangeAspect="1"/>
+          </p:cNvPicPr>
+          <p:nvPr/>
+        </p:nvPicPr>
+        <p:blipFill>
+          <a:blip r:embed="rId1"/>
+          <a:stretch>
+            <a:fillRect/>
+          </a:stretch>
+        </p:blipFill>
+        <p:spPr>
+          <a:xfrm>
+            <a:off x="731520" y="3680460"/>
+            <a:ext cx="502920" cy="502920"/>
+          </a:xfrm>
+          <a:prstGeom prst="rect">
+            <a:avLst/>
+          </a:prstGeom>
+        </p:spPr>
+      </p:pic>
+      <p:sp>
+        <p:nvSpPr>
+          <p:cNvPr id="6" name="Text 3"/>
+          <p:cNvSpPr txBox="1"/>
+          <p:nvPr/>
+        </p:nvSpPr>
+        <p:spPr>
+          <a:xfrm>
+            <a:off x="1417320" y="3429000"/>
+            <a:ext cx="1828800" cy="548640"/>
+          </a:xfrm>
+          <a:prstGeom prst="rect">
+            <a:avLst/>
+          </a:prstGeom>
+          <a:noFill/>
+          <a:ln/>
+        </p:spPr>
+        <p:txBody>
+          <a:bodyPr wrap="square" lIns="0" tIns="0" rIns="0" bIns="0" rtlCol="0" anchor="b"/>
+          <a:lstStyle/>
+          <a:p>
+            <a:pPr indent="0" marL="0">
+              <a:buNone/>
+            </a:pPr>
+            <a:r>
+              <a:rPr lang="en-US" sz="1600" b="1" dirty="0">
+                <a:solidFill>
+                  <a:srgbClr val="1F3260"/>
+                </a:solidFill>
+              </a:rPr>
+              <a:t>Tú, cliente</a:t>
+            </a:r>
+            <a:endParaRPr lang="en-US" sz="1600" dirty="0"/>
+          </a:p>
+        </p:txBody>
+      </p:sp>
+      <p:sp>
+        <p:nvSpPr>
+          <p:cNvPr id="7" name="Text 4"/>
+          <p:cNvSpPr txBox="1"/>
+          <p:nvPr/>
+        </p:nvSpPr>
+        <p:spPr>
+          <a:xfrm>
+            <a:off x="1417320" y="3977640"/>
+            <a:ext cx="1828800" cy="457200"/>
+          </a:xfrm>
+          <a:prstGeom prst="rect">
+            <a:avLst/>
+          </a:prstGeom>
+          <a:noFill/>
+          <a:ln/>
+        </p:spPr>
+        <p:txBody>
+          <a:bodyPr wrap="square" lIns="0" tIns="0" rIns="0" bIns="0" rtlCol="0" anchor="t"/>
+          <a:lstStyle/>
+          <a:p>
+            <a:pPr indent="0" marL="0">
+              <a:buNone/>
+            </a:pPr>
+            <a:r>
+              <a:rPr lang="en-US" sz="1200" dirty="0">
+                <a:solidFill>
+                  <a:srgbClr val="1F3260"/>
+                </a:solidFill>
+              </a:rPr>
+              <a:t>Una sola llamada</a:t>
+            </a:r>
+            <a:endParaRPr lang="en-US" sz="1200" dirty="0"/>
+          </a:p>
+        </p:txBody>
+      </p:sp>
+      <p:sp>
+        <p:nvSpPr>
+          <p:cNvPr id="8" name="Shape 5"/>
+          <p:cNvSpPr/>
+          <p:nvPr/>
+        </p:nvSpPr>
+        <p:spPr>
+          <a:xfrm>
+            <a:off x="4206240" y="3108960"/>
+            <a:ext cx="3291840" cy="1645920"/>
+          </a:xfrm>
+          <a:prstGeom prst="roundRect">
+            <a:avLst>
+              <a:gd name="adj" fmla="val 8333"/>
+            </a:avLst>
+          </a:prstGeom>
+          <a:solidFill>
+            <a:srgbClr val="1F3260"/>
+          </a:solidFill>
+          <a:ln/>
+        </p:spPr>
+      </p:sp>
+      <p:pic>
+        <p:nvPicPr>
+          <p:cNvPr id="9" name="Image 1" descr="preencoded.png">    </p:cNvPr>
+          <p:cNvPicPr>
+            <a:picLocks noChangeAspect="1"/>
+          </p:cNvPicPr>
+          <p:nvPr/>
+        </p:nvPicPr>
+        <p:blipFill>
+          <a:blip r:embed="rId2"/>
+          <a:stretch>
+            <a:fillRect/>
+          </a:stretch>
+        </p:blipFill>
+        <p:spPr>
+          <a:xfrm>
+            <a:off x="4480560" y="3680460"/>
+            <a:ext cx="502920" cy="502920"/>
+          </a:xfrm>
+          <a:prstGeom prst="rect">
+            <a:avLst/>
+          </a:prstGeom>
+        </p:spPr>
+      </p:pic>
+      <p:sp>
+        <p:nvSpPr>
+          <p:cNvPr id="10" name="Text 6"/>
+          <p:cNvSpPr txBox="1"/>
+          <p:nvPr/>
+        </p:nvSpPr>
+        <p:spPr>
+          <a:xfrm>
+            <a:off x="5166360" y="3246120"/>
+            <a:ext cx="2194560" cy="731520"/>
+          </a:xfrm>
+          <a:prstGeom prst="rect">
+            <a:avLst/>
+          </a:prstGeom>
+          <a:noFill/>
+          <a:ln/>
+        </p:spPr>
+        <p:txBody>
+          <a:bodyPr wrap="square" lIns="0" tIns="0" rIns="0" bIns="0" rtlCol="0" anchor="b"/>
+          <a:lstStyle/>
+          <a:p>
+            <a:pPr indent="0" marL="0">
+              <a:buNone/>
+            </a:pPr>
+            <a:r>
+              <a:rPr lang="en-US" sz="1600" b="1" dirty="0">
+                <a:solidFill>
+                  <a:srgbClr val="FFFFFF"/>
+                </a:solidFill>
+              </a:rPr>
+              <a:t>MESENERGIA</a:t>
+            </a:r>
+            <a:endParaRPr lang="en-US" sz="1600" dirty="0"/>
+          </a:p>
+        </p:txBody>
+      </p:sp>
+      <p:sp>
+        <p:nvSpPr>
+          <p:cNvPr id="11" name="Text 7"/>
+          <p:cNvSpPr txBox="1"/>
+          <p:nvPr/>
+        </p:nvSpPr>
+        <p:spPr>
+          <a:xfrm>
+            <a:off x="5166360" y="3977640"/>
+            <a:ext cx="2194560" cy="640080"/>
+          </a:xfrm>
+          <a:prstGeom prst="rect">
+            <a:avLst/>
+          </a:prstGeom>
+          <a:noFill/>
+          <a:ln/>
+        </p:spPr>
+        <p:txBody>
+          <a:bodyPr wrap="square" lIns="0" tIns="0" rIns="0" bIns="0" rtlCol="0" anchor="t"/>
+          <a:lstStyle/>
+          <a:p>
+            <a:pPr indent="0" marL="0">
+              <a:buNone/>
+            </a:pPr>
+            <a:r>
+              <a:rPr lang="en-US" sz="1200" dirty="0">
+                <a:solidFill>
+                  <a:srgbClr val="FFFFFF"/>
+                </a:solidFill>
+              </a:rPr>
+              <a:t>Tu asesor de referencia</a:t>
+            </a:r>
+            <a:endParaRPr lang="en-US" sz="1200" dirty="0"/>
+          </a:p>
+        </p:txBody>
+      </p:sp>
+      <p:sp>
+        <p:nvSpPr>
+          <p:cNvPr id="12" name="Shape 8"/>
+          <p:cNvSpPr/>
+          <p:nvPr/>
+        </p:nvSpPr>
+        <p:spPr>
+          <a:xfrm>
+            <a:off x="8321040" y="2148840"/>
+            <a:ext cx="3383280" cy="1143000"/>
+          </a:xfrm>
+          <a:prstGeom prst="roundRect">
+            <a:avLst>
+              <a:gd name="adj" fmla="val 12000"/>
+            </a:avLst>
+          </a:prstGeom>
+          <a:solidFill>
+            <a:srgbClr val="EFF6E6"/>
+          </a:solidFill>
+          <a:ln/>
+        </p:spPr>
+      </p:sp>
+      <p:pic>
+        <p:nvPicPr>
+          <p:cNvPr id="13" name="Image 2" descr="preencoded.png">    </p:cNvPr>
+          <p:cNvPicPr>
+            <a:picLocks noChangeAspect="1"/>
+          </p:cNvPicPr>
+          <p:nvPr/>
+        </p:nvPicPr>
+        <p:blipFill>
+          <a:blip r:embed="rId3"/>
+          <a:stretch>
+            <a:fillRect/>
+          </a:stretch>
+        </p:blipFill>
+        <p:spPr>
+          <a:xfrm>
+            <a:off x="8595360" y="2468880"/>
+            <a:ext cx="502920" cy="502920"/>
+          </a:xfrm>
+          <a:prstGeom prst="rect">
+            <a:avLst/>
+          </a:prstGeom>
+        </p:spPr>
+      </p:pic>
+      <p:sp>
+        <p:nvSpPr>
+          <p:cNvPr id="14" name="Text 9"/>
+          <p:cNvSpPr txBox="1"/>
+          <p:nvPr/>
+        </p:nvSpPr>
+        <p:spPr>
+          <a:xfrm>
+            <a:off x="9281160" y="2286000"/>
+            <a:ext cx="2286000" cy="480060"/>
+          </a:xfrm>
+          <a:prstGeom prst="rect">
+            <a:avLst/>
+          </a:prstGeom>
+          <a:noFill/>
+          <a:ln/>
+        </p:spPr>
+        <p:txBody>
+          <a:bodyPr wrap="square" lIns="0" tIns="0" rIns="0" bIns="0" rtlCol="0" anchor="b"/>
+          <a:lstStyle/>
+          <a:p>
+            <a:pPr indent="0" marL="0">
+              <a:buNone/>
+            </a:pPr>
+            <a:r>
+              <a:rPr lang="en-US" sz="1600" b="1" dirty="0">
+                <a:solidFill>
+                  <a:srgbClr val="4E8A2B"/>
+                </a:solidFill>
+              </a:rPr>
+              <a:t>Distribuidoras</a:t>
+            </a:r>
+            <a:endParaRPr lang="en-US" sz="1600" dirty="0"/>
+          </a:p>
+        </p:txBody>
+      </p:sp>
+      <p:sp>
+        <p:nvSpPr>
+          <p:cNvPr id="15" name="Text 10"/>
+          <p:cNvSpPr txBox="1"/>
+          <p:nvPr/>
+        </p:nvSpPr>
+        <p:spPr>
+          <a:xfrm>
+            <a:off x="9281160" y="2766060"/>
+            <a:ext cx="2286000" cy="388620"/>
+          </a:xfrm>
+          <a:prstGeom prst="rect">
+            <a:avLst/>
+          </a:prstGeom>
+          <a:noFill/>
+          <a:ln/>
+        </p:spPr>
+        <p:txBody>
+          <a:bodyPr wrap="square" lIns="0" tIns="0" rIns="0" bIns="0" rtlCol="0" anchor="t"/>
+          <a:lstStyle/>
+          <a:p>
+            <a:pPr indent="0" marL="0">
+              <a:buNone/>
+            </a:pPr>
+            <a:r>
+              <a:rPr lang="en-US" sz="1200" dirty="0">
+                <a:solidFill>
+                  <a:srgbClr val="4E8A2B"/>
+                </a:solidFill>
+              </a:rPr>
+              <a:t>Altas, potencias, averías</a:t>
+            </a:r>
+            <a:endParaRPr lang="en-US" sz="1200" dirty="0"/>
+          </a:p>
+        </p:txBody>
+      </p:sp>
+      <p:sp>
+        <p:nvSpPr>
+          <p:cNvPr id="16" name="Shape 11"/>
+          <p:cNvSpPr/>
+          <p:nvPr/>
+        </p:nvSpPr>
+        <p:spPr>
+          <a:xfrm flipV="1">
+            <a:off x="7498080" y="2720340"/>
+            <a:ext cx="822960" cy="1211580"/>
+          </a:xfrm>
+          <a:prstGeom prst="line">
+            <a:avLst/>
+          </a:prstGeom>
+          <a:noFill/>
+          <a:ln w="25400">
+            <a:solidFill>
+              <a:srgbClr val="B8C2D3"/>
+            </a:solidFill>
+            <a:prstDash val="solid"/>
+            <a:tailEnd type="triangle"/>
+          </a:ln>
+        </p:spPr>
+      </p:sp>
+      <p:sp>
+        <p:nvSpPr>
+          <p:cNvPr id="17" name="Shape 12"/>
+          <p:cNvSpPr/>
+          <p:nvPr/>
+        </p:nvSpPr>
+        <p:spPr>
+          <a:xfrm>
+            <a:off x="8321040" y="3474720"/>
+            <a:ext cx="3383280" cy="1143000"/>
+          </a:xfrm>
+          <a:prstGeom prst="roundRect">
+            <a:avLst>
+              <a:gd name="adj" fmla="val 12000"/>
+            </a:avLst>
+          </a:prstGeom>
+          <a:solidFill>
+            <a:srgbClr val="FDF1E3"/>
+          </a:solidFill>
+          <a:ln/>
+        </p:spPr>
+      </p:sp>
+      <p:pic>
+        <p:nvPicPr>
+          <p:cNvPr id="18" name="Image 3" descr="preencoded.png">    </p:cNvPr>
+          <p:cNvPicPr>
+            <a:picLocks noChangeAspect="1"/>
+          </p:cNvPicPr>
+          <p:nvPr/>
+        </p:nvPicPr>
+        <p:blipFill>
+          <a:blip r:embed="rId4"/>
+          <a:stretch>
+            <a:fillRect/>
+          </a:stretch>
+        </p:blipFill>
+        <p:spPr>
+          <a:xfrm>
+            <a:off x="8595360" y="3794760"/>
+            <a:ext cx="502920" cy="502920"/>
+          </a:xfrm>
+          <a:prstGeom prst="rect">
+            <a:avLst/>
+          </a:prstGeom>
+        </p:spPr>
+      </p:pic>
+      <p:sp>
+        <p:nvSpPr>
+          <p:cNvPr id="19" name="Text 13"/>
+          <p:cNvSpPr txBox="1"/>
+          <p:nvPr/>
+        </p:nvSpPr>
+        <p:spPr>
+          <a:xfrm>
+            <a:off x="9281160" y="3611880"/>
+            <a:ext cx="2286000" cy="480060"/>
+          </a:xfrm>
+          <a:prstGeom prst="rect">
+            <a:avLst/>
+          </a:prstGeom>
+          <a:noFill/>
+          <a:ln/>
+        </p:spPr>
+        <p:txBody>
+          <a:bodyPr wrap="square" lIns="0" tIns="0" rIns="0" bIns="0" rtlCol="0" anchor="b"/>
+          <a:lstStyle/>
+          <a:p>
+            <a:pPr indent="0" marL="0">
+              <a:buNone/>
+            </a:pPr>
+            <a:r>
+              <a:rPr lang="en-US" sz="1600" b="1" dirty="0">
+                <a:solidFill>
+                  <a:srgbClr val="C46E17"/>
+                </a:solidFill>
+              </a:rPr>
+              <a:t>Comercializadoras</a:t>
+            </a:r>
+            <a:endParaRPr lang="en-US" sz="1600" dirty="0"/>
+          </a:p>
+        </p:txBody>
+      </p:sp>
+      <p:sp>
+        <p:nvSpPr>
+          <p:cNvPr id="20" name="Text 14"/>
+          <p:cNvSpPr txBox="1"/>
+          <p:nvPr/>
+        </p:nvSpPr>
+        <p:spPr>
+          <a:xfrm>
+            <a:off x="9281160" y="4091940"/>
+            <a:ext cx="2286000" cy="388620"/>
+          </a:xfrm>
+          <a:prstGeom prst="rect">
+            <a:avLst/>
+          </a:prstGeom>
+          <a:noFill/>
+          <a:ln/>
+        </p:spPr>
+        <p:txBody>
+          <a:bodyPr wrap="square" lIns="0" tIns="0" rIns="0" bIns="0" rtlCol="0" anchor="t"/>
+          <a:lstStyle/>
+          <a:p>
+            <a:pPr indent="0" marL="0">
+              <a:buNone/>
+            </a:pPr>
+            <a:r>
+              <a:rPr lang="en-US" sz="1200" dirty="0">
+                <a:solidFill>
+                  <a:srgbClr val="C46E17"/>
+                </a:solidFill>
+              </a:rPr>
+              <a:t>Acuerdos y mejores condiciones</a:t>
+            </a:r>
+            <a:endParaRPr lang="en-US" sz="1200" dirty="0"/>
+          </a:p>
+        </p:txBody>
+      </p:sp>
+      <p:sp>
+        <p:nvSpPr>
+          <p:cNvPr id="21" name="Shape 15"/>
+          <p:cNvSpPr/>
+          <p:nvPr/>
+        </p:nvSpPr>
+        <p:spPr>
+          <a:xfrm>
+            <a:off x="7498080" y="3931920"/>
+            <a:ext cx="822960" cy="114300"/>
+          </a:xfrm>
+          <a:prstGeom prst="line">
+            <a:avLst/>
+          </a:prstGeom>
+          <a:noFill/>
+          <a:ln w="25400">
+            <a:solidFill>
+              <a:srgbClr val="B8C2D3"/>
+            </a:solidFill>
+            <a:prstDash val="solid"/>
+            <a:tailEnd type="triangle"/>
+          </a:ln>
+        </p:spPr>
+      </p:sp>
+      <p:sp>
+        <p:nvSpPr>
+          <p:cNvPr id="22" name="Shape 16"/>
+          <p:cNvSpPr/>
+          <p:nvPr/>
+        </p:nvSpPr>
+        <p:spPr>
+          <a:xfrm>
+            <a:off x="8321040" y="4800600"/>
+            <a:ext cx="3383280" cy="1143000"/>
+          </a:xfrm>
+          <a:prstGeom prst="roundRect">
+            <a:avLst>
+              <a:gd name="adj" fmla="val 12000"/>
+            </a:avLst>
+          </a:prstGeom>
+          <a:solidFill>
+            <a:srgbClr val="F4F6F9"/>
+          </a:solidFill>
+          <a:ln/>
+        </p:spPr>
+      </p:sp>
+      <p:pic>
+        <p:nvPicPr>
+          <p:cNvPr id="23" name="Image 4" descr="preencoded.png">    </p:cNvPr>
+          <p:cNvPicPr>
+            <a:picLocks noChangeAspect="1"/>
+          </p:cNvPicPr>
+          <p:nvPr/>
+        </p:nvPicPr>
+        <p:blipFill>
+          <a:blip r:embed="rId5"/>
+          <a:stretch>
+            <a:fillRect/>
+          </a:stretch>
+        </p:blipFill>
+        <p:spPr>
+          <a:xfrm>
+            <a:off x="8595360" y="5120640"/>
+            <a:ext cx="502920" cy="502920"/>
+          </a:xfrm>
+          <a:prstGeom prst="rect">
+            <a:avLst/>
+          </a:prstGeom>
+        </p:spPr>
+      </p:pic>
+      <p:sp>
+        <p:nvSpPr>
+          <p:cNvPr id="24" name="Text 17"/>
+          <p:cNvSpPr txBox="1"/>
+          <p:nvPr/>
+        </p:nvSpPr>
+        <p:spPr>
+          <a:xfrm>
+            <a:off x="9281160" y="4937760"/>
+            <a:ext cx="2286000" cy="480060"/>
+          </a:xfrm>
+          <a:prstGeom prst="rect">
+            <a:avLst/>
+          </a:prstGeom>
+          <a:noFill/>
+          <a:ln/>
+        </p:spPr>
+        <p:txBody>
+          <a:bodyPr wrap="square" lIns="0" tIns="0" rIns="0" bIns="0" rtlCol="0" anchor="b"/>
+          <a:lstStyle/>
+          <a:p>
+            <a:pPr indent="0" marL="0">
+              <a:buNone/>
+            </a:pPr>
+            <a:r>
+              <a:rPr lang="en-US" sz="1600" b="1" dirty="0">
+                <a:solidFill>
+                  <a:srgbClr val="1F3260"/>
+                </a:solidFill>
+              </a:rPr>
+              <a:t>Operadoras</a:t>
+            </a:r>
+            <a:endParaRPr lang="en-US" sz="1600" dirty="0"/>
+          </a:p>
+        </p:txBody>
+      </p:sp>
+      <p:sp>
+        <p:nvSpPr>
+          <p:cNvPr id="25" name="Text 18"/>
+          <p:cNvSpPr txBox="1"/>
+          <p:nvPr/>
+        </p:nvSpPr>
+        <p:spPr>
+          <a:xfrm>
+            <a:off x="9281160" y="5417820"/>
+            <a:ext cx="2286000" cy="388620"/>
+          </a:xfrm>
+          <a:prstGeom prst="rect">
+            <a:avLst/>
+          </a:prstGeom>
+          <a:noFill/>
+          <a:ln/>
+        </p:spPr>
+        <p:txBody>
+          <a:bodyPr wrap="square" lIns="0" tIns="0" rIns="0" bIns="0" rtlCol="0" anchor="t"/>
+          <a:lstStyle/>
+          <a:p>
+            <a:pPr indent="0" marL="0">
+              <a:buNone/>
+            </a:pPr>
+            <a:r>
+              <a:rPr lang="en-US" sz="1200" dirty="0">
+                <a:solidFill>
+                  <a:srgbClr val="1F3260"/>
+                </a:solidFill>
+              </a:rPr>
+              <a:t>Fibra y móvil</a:t>
+            </a:r>
+            <a:endParaRPr lang="en-US" sz="1200" dirty="0"/>
+          </a:p>
+        </p:txBody>
+      </p:sp>
+      <p:sp>
+        <p:nvSpPr>
+          <p:cNvPr id="26" name="Shape 19"/>
+          <p:cNvSpPr/>
+          <p:nvPr/>
+        </p:nvSpPr>
+        <p:spPr>
+          <a:xfrm>
+            <a:off x="7498080" y="3931920"/>
+            <a:ext cx="822960" cy="1440180"/>
+          </a:xfrm>
+          <a:prstGeom prst="line">
+            <a:avLst/>
+          </a:prstGeom>
+          <a:noFill/>
+          <a:ln w="25400">
+            <a:solidFill>
+              <a:srgbClr val="B8C2D3"/>
+            </a:solidFill>
+            <a:prstDash val="solid"/>
+            <a:tailEnd type="triangle"/>
+          </a:ln>
+        </p:spPr>
+      </p:sp>
+      <p:sp>
+        <p:nvSpPr>
+          <p:cNvPr id="27" name="Shape 20"/>
+          <p:cNvSpPr/>
+          <p:nvPr/>
+        </p:nvSpPr>
+        <p:spPr>
+          <a:xfrm>
+            <a:off x="3383280" y="3931920"/>
+            <a:ext cx="822960" cy="0"/>
+          </a:xfrm>
+          <a:prstGeom prst="line">
+            <a:avLst/>
+          </a:prstGeom>
+          <a:noFill/>
+          <a:ln w="25400">
+            <a:solidFill>
+              <a:srgbClr val="B8C2D3"/>
+            </a:solidFill>
+            <a:prstDash val="solid"/>
+            <a:tailEnd type="triangle"/>
+          </a:ln>
+        </p:spPr>
+      </p:sp>
+      <p:sp>
+        <p:nvSpPr>
+          <p:cNvPr id="28" name="Text 21"/>
+          <p:cNvSpPr txBox="1"/>
+          <p:nvPr/>
+        </p:nvSpPr>
+        <p:spPr>
+          <a:xfrm>
+            <a:off x="457200" y="5852160"/>
+            <a:ext cx="11247120" cy="365760"/>
+          </a:xfrm>
+          <a:prstGeom prst="rect">
+            <a:avLst/>
+          </a:prstGeom>
+          <a:noFill/>
+          <a:ln/>
+        </p:spPr>
+        <p:txBody>
+          <a:bodyPr wrap="square" lIns="0" tIns="0" rIns="0" bIns="0" rtlCol="0" anchor="ctr"/>
+          <a:lstStyle/>
+          <a:p>
+            <a:pPr indent="0" marL="0">
+              <a:buNone/>
+            </a:pPr>
+            <a:r>
+              <a:rPr lang="en-US" sz="1400" b="1" dirty="0">
+                <a:solidFill>
+                  <a:srgbClr val="4E8A2B"/>
+                </a:solidFill>
+              </a:rPr>
+              <a:t>Resultado: incidencias resueltas antes y seguimiento durante toda la vida del contrato.</a:t>
+            </a:r>
+            <a:endParaRPr lang="en-US" sz="1400" dirty="0"/>
+          </a:p>
+        </p:txBody>
+      </p:sp>
+      <p:sp>
+        <p:nvSpPr>
+          <p:cNvPr id="25" name="Slide Number Placeholder 0"/>
+          <p:cNvSpPr>
+            <a:spLocks noGrp="1"/>
+          </p:cNvSpPr>
+          <p:nvPr>
+            <p:ph type="sldNum" sz="quarter" idx="4294967295"/>
+          </p:nvPr>
+        </p:nvSpPr>
+        <p:spPr>
+          <a:xfrm>
+            <a:off x="11247120" y="6400800"/>
+            <a:ext cx="457200" cy="274320"/>
+          </a:xfrm>
+          <a:prstGeom prst="rect">
+            <a:avLst/>
+          </a:prstGeom>
+          <a:extLst>
+            <a:ext uri="{C572A759-6A51-4108-AA02-DFA0A04FC94B}">
+              <ma14:wrappingTextBoxFlag xmlns:ma14="http://schemas.microsoft.com/office/mac/drawingml/2011/main" val="0"/>
+            </a:ext>
+          </a:extLst>
+        </p:spPr>
+        <p:txBody>
+          <a:bodyPr/>
+          <a:lstStyle>
+            <a:lvl1pPr>
+              <a:defRPr sz="900">
+                <a:solidFill>
+                  <a:schemeClr val="accent6"/>
+                </a:solidFill>
+              </a:defRPr>
+            </a:lvl1pPr>
+          </a:lstStyle>
+          <a:p>
+            <a:pPr algn="l"/>
+            <a:fld id="{F7021451-1387-4CA6-816F-3879F97B5CBC}" type="slidenum">
+              <a:rPr b="0" lang="en-US"/>
+              <a:t>7</a:t>
+            </a:fld>
+            <a:endParaRPr lang="en-US"/>
+          </a:p>
+        </p:txBody>
+      </p:sp>
+    </p:spTree>
+  </p:cSld>
+  <p:clrMapOvr>
+    <a:masterClrMapping/>
+  </p:clrMapOvr>
+</p:sld>
+</file>
+
+<file path=ppt/slides/slide8.xml><?xml version="1.0" encoding="utf-8"?>
+<p:sld xmlns:a="http://schemas.openxmlformats.org/drawingml/2006/main" xmlns:r="http://schemas.openxmlformats.org/officeDocument/2006/relationships" xmlns:p="http://schemas.openxmlformats.org/presentationml/2006/main">
+  <p:cSld name="Slide 8">
+    <p:spTree>
+      <p:nvGrpSpPr>
+        <p:cNvPr id="1" name=""/>
+        <p:cNvGrpSpPr/>
+        <p:nvPr/>
+      </p:nvGrpSpPr>
+      <p:grpSpPr>
+        <a:xfrm>
+          <a:off x="0" y="0"/>
+          <a:ext cx="0" cy="0"/>
+          <a:chOff x="0" y="0"/>
+          <a:chExt cx="0" cy="0"/>
+        </a:xfrm>
+      </p:grpSpPr>
+      <p:sp>
+        <p:nvSpPr>
+          <p:cNvPr id="2" name="Text 1"/>
+          <p:cNvSpPr/>
+          <p:nvPr>
+            <p:ph idx="102" type="title" hasCustomPrompt="1"/>
+          </p:nvPr>
+        </p:nvSpPr>
+        <p:spPr>
+          <a:xfrm>
+            <a:off x="457200" y="868680"/>
+            <a:ext cx="11247120" cy="731520"/>
+          </a:xfrm>
+          <a:prstGeom prst="rect">
+            <a:avLst/>
+          </a:prstGeom>
+          <a:noFill/>
+          <a:ln/>
+        </p:spPr>
+        <p:txBody>
+          <a:bodyPr wrap="square" rtlCol="0" anchor="ctr"/>
+          <a:lstStyle/>
+          <a:p>
+            <a:pPr algn="l" indent="0" marL="0">
+              <a:buNone/>
+            </a:pPr>
+            <a:r>
+              <a:rPr lang="en-US" sz="3000" b="1" dirty="0">
+                <a:solidFill>
+                  <a:schemeClr val="tx2"/>
+                </a:solidFill>
+              </a:rPr>
+              <a:t>¿Por qué elegir MESENERGIA?</a:t>
+            </a:r>
+            <a:endParaRPr lang="en-US" sz="3000" dirty="0"/>
+          </a:p>
+        </p:txBody>
+      </p:sp>
+      <p:sp>
+        <p:nvSpPr>
+          <p:cNvPr id="3" name="Text 1"/>
+          <p:cNvSpPr txBox="1"/>
+          <p:nvPr/>
+        </p:nvSpPr>
+        <p:spPr>
+          <a:xfrm>
+            <a:off x="457200" y="1828800"/>
+            <a:ext cx="3520440" cy="1005840"/>
+          </a:xfrm>
+          <a:prstGeom prst="rect">
+            <a:avLst/>
+          </a:prstGeom>
+          <a:noFill/>
+          <a:ln/>
+        </p:spPr>
+        <p:txBody>
+          <a:bodyPr wrap="square" lIns="0" tIns="0" rIns="0" bIns="0" rtlCol="0" anchor="ctr"/>
+          <a:lstStyle/>
+          <a:p>
+            <a:pPr indent="0" marL="0">
+              <a:buNone/>
+            </a:pPr>
+            <a:r>
+              <a:rPr lang="en-US" sz="6000" b="1" dirty="0">
+                <a:solidFill>
+                  <a:srgbClr val="4E8A2B"/>
+                </a:solidFill>
+              </a:rPr>
+              <a:t>+10</a:t>
+            </a:r>
+            <a:endParaRPr lang="en-US" sz="6000" dirty="0"/>
+          </a:p>
+        </p:txBody>
+      </p:sp>
+      <p:sp>
+        <p:nvSpPr>
+          <p:cNvPr id="4" name="Text 2"/>
+          <p:cNvSpPr txBox="1"/>
+          <p:nvPr/>
+        </p:nvSpPr>
+        <p:spPr>
+          <a:xfrm>
+            <a:off x="457200" y="2834640"/>
+            <a:ext cx="3291840" cy="640080"/>
+          </a:xfrm>
+          <a:prstGeom prst="rect">
+            <a:avLst/>
+          </a:prstGeom>
+          <a:noFill/>
+          <a:ln/>
+        </p:spPr>
+        <p:txBody>
+          <a:bodyPr wrap="square" lIns="0" tIns="0" rIns="0" bIns="0" rtlCol="0" anchor="t"/>
+          <a:lstStyle/>
+          <a:p>
+            <a:pPr indent="0" marL="0">
+              <a:buNone/>
+            </a:pPr>
+            <a:r>
+              <a:rPr lang="en-US" sz="1500" dirty="0">
+                <a:solidFill>
+                  <a:srgbClr val="5D6472"/>
+                </a:solidFill>
+              </a:rPr>
+              <a:t>años de experiencia</a:t>
+            </a:r>
+            <a:endParaRPr lang="en-US" sz="1500" dirty="0"/>
+          </a:p>
+        </p:txBody>
+      </p:sp>
+      <p:sp>
+        <p:nvSpPr>
+          <p:cNvPr id="5" name="Text 3"/>
+          <p:cNvSpPr txBox="1"/>
+          <p:nvPr/>
+        </p:nvSpPr>
+        <p:spPr>
+          <a:xfrm>
+            <a:off x="4251960" y="1828800"/>
+            <a:ext cx="3520440" cy="1005840"/>
+          </a:xfrm>
+          <a:prstGeom prst="rect">
+            <a:avLst/>
+          </a:prstGeom>
+          <a:noFill/>
+          <a:ln/>
+        </p:spPr>
+        <p:txBody>
+          <a:bodyPr wrap="square" lIns="0" tIns="0" rIns="0" bIns="0" rtlCol="0" anchor="ctr"/>
+          <a:lstStyle/>
+          <a:p>
+            <a:pPr indent="0" marL="0">
+              <a:buNone/>
+            </a:pPr>
+            <a:r>
+              <a:rPr lang="en-US" sz="6000" b="1" dirty="0">
+                <a:solidFill>
+                  <a:srgbClr val="C46E17"/>
+                </a:solidFill>
+              </a:rPr>
+              <a:t>+10.000</a:t>
+            </a:r>
+            <a:endParaRPr lang="en-US" sz="6000" dirty="0"/>
+          </a:p>
+        </p:txBody>
+      </p:sp>
+      <p:sp>
+        <p:nvSpPr>
+          <p:cNvPr id="6" name="Text 4"/>
+          <p:cNvSpPr txBox="1"/>
+          <p:nvPr/>
+        </p:nvSpPr>
+        <p:spPr>
+          <a:xfrm>
+            <a:off x="4251960" y="2834640"/>
+            <a:ext cx="3291840" cy="640080"/>
+          </a:xfrm>
+          <a:prstGeom prst="rect">
+            <a:avLst/>
+          </a:prstGeom>
+          <a:noFill/>
+          <a:ln/>
+        </p:spPr>
+        <p:txBody>
+          <a:bodyPr wrap="square" lIns="0" tIns="0" rIns="0" bIns="0" rtlCol="0" anchor="t"/>
+          <a:lstStyle/>
+          <a:p>
+            <a:pPr indent="0" marL="0">
+              <a:buNone/>
+            </a:pPr>
+            <a:r>
+              <a:rPr lang="en-US" sz="1500" dirty="0">
+                <a:solidFill>
+                  <a:srgbClr val="5D6472"/>
+                </a:solidFill>
+              </a:rPr>
+              <a:t>clientes entre empresas y autónomos</a:t>
+            </a:r>
+            <a:endParaRPr lang="en-US" sz="1500" dirty="0"/>
+          </a:p>
+        </p:txBody>
+      </p:sp>
+      <p:sp>
+        <p:nvSpPr>
+          <p:cNvPr id="7" name="Text 5"/>
+          <p:cNvSpPr txBox="1"/>
+          <p:nvPr/>
+        </p:nvSpPr>
+        <p:spPr>
+          <a:xfrm>
+            <a:off x="8046720" y="1828800"/>
+            <a:ext cx="3520440" cy="1005840"/>
+          </a:xfrm>
+          <a:prstGeom prst="rect">
+            <a:avLst/>
+          </a:prstGeom>
+          <a:noFill/>
+          <a:ln/>
+        </p:spPr>
+        <p:txBody>
+          <a:bodyPr wrap="square" lIns="0" tIns="0" rIns="0" bIns="0" rtlCol="0" anchor="ctr"/>
+          <a:lstStyle/>
+          <a:p>
+            <a:pPr indent="0" marL="0">
+              <a:buNone/>
+            </a:pPr>
+            <a:r>
+              <a:rPr lang="en-US" sz="6000" b="1" dirty="0">
+                <a:solidFill>
+                  <a:srgbClr val="1F3260"/>
+                </a:solidFill>
+              </a:rPr>
+              <a:t>&lt;4%</a:t>
+            </a:r>
+            <a:endParaRPr lang="en-US" sz="6000" dirty="0"/>
+          </a:p>
+        </p:txBody>
+      </p:sp>
+      <p:sp>
+        <p:nvSpPr>
+          <p:cNvPr id="8" name="Text 6"/>
+          <p:cNvSpPr txBox="1"/>
+          <p:nvPr/>
+        </p:nvSpPr>
+        <p:spPr>
+          <a:xfrm>
+            <a:off x="8046720" y="2834640"/>
+            <a:ext cx="3291840" cy="640080"/>
+          </a:xfrm>
+          <a:prstGeom prst="rect">
+            <a:avLst/>
+          </a:prstGeom>
+          <a:noFill/>
+          <a:ln/>
+        </p:spPr>
+        <p:txBody>
+          <a:bodyPr wrap="square" lIns="0" tIns="0" rIns="0" bIns="0" rtlCol="0" anchor="t"/>
+          <a:lstStyle/>
+          <a:p>
+            <a:pPr indent="0" marL="0">
+              <a:buNone/>
+            </a:pPr>
+            <a:r>
+              <a:rPr lang="en-US" sz="1500" dirty="0">
+                <a:solidFill>
+                  <a:srgbClr val="5D6472"/>
+                </a:solidFill>
+              </a:rPr>
+              <a:t>índice de bajas gracias a la postventa</a:t>
+            </a:r>
+            <a:endParaRPr lang="en-US" sz="1500" dirty="0"/>
+          </a:p>
+        </p:txBody>
+      </p:sp>
+      <p:sp>
+        <p:nvSpPr>
+          <p:cNvPr id="9" name="Shape 7"/>
+          <p:cNvSpPr/>
+          <p:nvPr/>
+        </p:nvSpPr>
+        <p:spPr>
+          <a:xfrm>
+            <a:off x="457200" y="3931920"/>
+            <a:ext cx="3520440" cy="868680"/>
+          </a:xfrm>
+          <a:prstGeom prst="roundRect">
+            <a:avLst>
+              <a:gd name="adj" fmla="val 10526"/>
+            </a:avLst>
+          </a:prstGeom>
+          <a:solidFill>
+            <a:srgbClr val="F4F6F9"/>
+          </a:solidFill>
+          <a:ln/>
+        </p:spPr>
+      </p:sp>
+      <p:pic>
+        <p:nvPicPr>
+          <p:cNvPr id="10" name="Image 0" descr="preencoded.png">    </p:cNvPr>
+          <p:cNvPicPr>
+            <a:picLocks noChangeAspect="1"/>
+          </p:cNvPicPr>
+          <p:nvPr/>
+        </p:nvPicPr>
+        <p:blipFill>
+          <a:blip r:embed="rId1"/>
+          <a:stretch>
+            <a:fillRect/>
+          </a:stretch>
+        </p:blipFill>
+        <p:spPr>
+          <a:xfrm>
+            <a:off x="685800" y="4160520"/>
+            <a:ext cx="411480" cy="411480"/>
+          </a:xfrm>
+          <a:prstGeom prst="rect">
+            <a:avLst/>
+          </a:prstGeom>
+        </p:spPr>
+      </p:pic>
+      <p:sp>
+        <p:nvSpPr>
+          <p:cNvPr id="11" name="Text 8"/>
+          <p:cNvSpPr txBox="1"/>
+          <p:nvPr/>
+        </p:nvSpPr>
+        <p:spPr>
+          <a:xfrm>
+            <a:off x="1280160" y="3931920"/>
+            <a:ext cx="2560320" cy="868680"/>
+          </a:xfrm>
+          <a:prstGeom prst="rect">
+            <a:avLst/>
+          </a:prstGeom>
+          <a:noFill/>
+          <a:ln/>
+        </p:spPr>
+        <p:txBody>
+          <a:bodyPr wrap="square" lIns="0" tIns="0" rIns="0" bIns="0" rtlCol="0" anchor="ctr"/>
+          <a:lstStyle/>
+          <a:p>
+            <a:pPr indent="0" marL="0">
+              <a:buNone/>
+            </a:pPr>
+            <a:r>
+              <a:rPr lang="en-US" sz="1400" b="1" dirty="0">
+                <a:solidFill>
+                  <a:srgbClr val="1F3260"/>
+                </a:solidFill>
+              </a:rPr>
+              <a:t>Innovación permanente de ofertas</a:t>
+            </a:r>
+            <a:endParaRPr lang="en-US" sz="1400" dirty="0"/>
+          </a:p>
+        </p:txBody>
+      </p:sp>
+      <p:sp>
+        <p:nvSpPr>
+          <p:cNvPr id="12" name="Shape 9"/>
+          <p:cNvSpPr/>
+          <p:nvPr/>
+        </p:nvSpPr>
+        <p:spPr>
+          <a:xfrm>
+            <a:off x="4251960" y="3931920"/>
+            <a:ext cx="3520440" cy="868680"/>
+          </a:xfrm>
+          <a:prstGeom prst="roundRect">
+            <a:avLst>
+              <a:gd name="adj" fmla="val 10526"/>
+            </a:avLst>
+          </a:prstGeom>
+          <a:solidFill>
+            <a:srgbClr val="F4F6F9"/>
+          </a:solidFill>
+          <a:ln/>
+        </p:spPr>
+      </p:sp>
+      <p:pic>
+        <p:nvPicPr>
+          <p:cNvPr id="13" name="Image 1" descr="preencoded.png">    </p:cNvPr>
+          <p:cNvPicPr>
+            <a:picLocks noChangeAspect="1"/>
+          </p:cNvPicPr>
+          <p:nvPr/>
+        </p:nvPicPr>
+        <p:blipFill>
+          <a:blip r:embed="rId2"/>
+          <a:stretch>
+            <a:fillRect/>
+          </a:stretch>
+        </p:blipFill>
+        <p:spPr>
+          <a:xfrm>
+            <a:off x="4480560" y="4160520"/>
+            <a:ext cx="411480" cy="411480"/>
+          </a:xfrm>
+          <a:prstGeom prst="rect">
+            <a:avLst/>
+          </a:prstGeom>
+        </p:spPr>
+      </p:pic>
+      <p:sp>
+        <p:nvSpPr>
+          <p:cNvPr id="14" name="Text 10"/>
+          <p:cNvSpPr txBox="1"/>
+          <p:nvPr/>
+        </p:nvSpPr>
+        <p:spPr>
+          <a:xfrm>
+            <a:off x="5074920" y="3931920"/>
+            <a:ext cx="2560320" cy="868680"/>
+          </a:xfrm>
+          <a:prstGeom prst="rect">
+            <a:avLst/>
+          </a:prstGeom>
+          <a:noFill/>
+          <a:ln/>
+        </p:spPr>
+        <p:txBody>
+          <a:bodyPr wrap="square" lIns="0" tIns="0" rIns="0" bIns="0" rtlCol="0" anchor="ctr"/>
+          <a:lstStyle/>
+          <a:p>
+            <a:pPr indent="0" marL="0">
+              <a:buNone/>
+            </a:pPr>
+            <a:r>
+              <a:rPr lang="en-US" sz="1400" b="1" dirty="0">
+                <a:solidFill>
+                  <a:srgbClr val="1F3260"/>
+                </a:solidFill>
+              </a:rPr>
+              <a:t>Ofertas personalizadas de luz y gas</a:t>
+            </a:r>
+            <a:endParaRPr lang="en-US" sz="1400" dirty="0"/>
+          </a:p>
+        </p:txBody>
+      </p:sp>
+      <p:sp>
+        <p:nvSpPr>
+          <p:cNvPr id="15" name="Shape 11"/>
+          <p:cNvSpPr/>
+          <p:nvPr/>
+        </p:nvSpPr>
+        <p:spPr>
+          <a:xfrm>
+            <a:off x="8046720" y="3931920"/>
+            <a:ext cx="3520440" cy="868680"/>
+          </a:xfrm>
+          <a:prstGeom prst="roundRect">
+            <a:avLst>
+              <a:gd name="adj" fmla="val 10526"/>
+            </a:avLst>
+          </a:prstGeom>
+          <a:solidFill>
+            <a:srgbClr val="F4F6F9"/>
+          </a:solidFill>
+          <a:ln/>
+        </p:spPr>
+      </p:sp>
+      <p:pic>
+        <p:nvPicPr>
+          <p:cNvPr id="16" name="Image 2" descr="preencoded.png">    </p:cNvPr>
+          <p:cNvPicPr>
+            <a:picLocks noChangeAspect="1"/>
+          </p:cNvPicPr>
+          <p:nvPr/>
+        </p:nvPicPr>
+        <p:blipFill>
+          <a:blip r:embed="rId3"/>
+          <a:stretch>
+            <a:fillRect/>
+          </a:stretch>
+        </p:blipFill>
+        <p:spPr>
+          <a:xfrm>
+            <a:off x="8275320" y="4160520"/>
+            <a:ext cx="411480" cy="411480"/>
+          </a:xfrm>
+          <a:prstGeom prst="rect">
+            <a:avLst/>
+          </a:prstGeom>
+        </p:spPr>
+      </p:pic>
+      <p:sp>
+        <p:nvSpPr>
+          <p:cNvPr id="17" name="Text 12"/>
+          <p:cNvSpPr txBox="1"/>
+          <p:nvPr/>
+        </p:nvSpPr>
+        <p:spPr>
+          <a:xfrm>
+            <a:off x="8869680" y="3931920"/>
+            <a:ext cx="2560320" cy="868680"/>
+          </a:xfrm>
+          <a:prstGeom prst="rect">
+            <a:avLst/>
+          </a:prstGeom>
+          <a:noFill/>
+          <a:ln/>
+        </p:spPr>
+        <p:txBody>
+          <a:bodyPr wrap="square" lIns="0" tIns="0" rIns="0" bIns="0" rtlCol="0" anchor="ctr"/>
+          <a:lstStyle/>
+          <a:p>
+            <a:pPr indent="0" marL="0">
+              <a:buNone/>
+            </a:pPr>
+            <a:r>
+              <a:rPr lang="en-US" sz="1400" b="1" dirty="0">
+                <a:solidFill>
+                  <a:srgbClr val="1F3260"/>
+                </a:solidFill>
+              </a:rPr>
+              <a:t>Atención durante toda la vigencia</a:t>
+            </a:r>
+            <a:endParaRPr lang="en-US" sz="1400" dirty="0"/>
+          </a:p>
+        </p:txBody>
+      </p:sp>
+      <p:sp>
+        <p:nvSpPr>
+          <p:cNvPr id="18" name="Shape 13"/>
+          <p:cNvSpPr/>
+          <p:nvPr/>
+        </p:nvSpPr>
+        <p:spPr>
+          <a:xfrm>
+            <a:off x="457200" y="4983480"/>
+            <a:ext cx="3520440" cy="868680"/>
+          </a:xfrm>
+          <a:prstGeom prst="roundRect">
+            <a:avLst>
+              <a:gd name="adj" fmla="val 10526"/>
+            </a:avLst>
+          </a:prstGeom>
+          <a:solidFill>
+            <a:srgbClr val="F4F6F9"/>
+          </a:solidFill>
+          <a:ln/>
+        </p:spPr>
+      </p:sp>
+      <p:pic>
+        <p:nvPicPr>
+          <p:cNvPr id="19" name="Image 3" descr="preencoded.png">    </p:cNvPr>
+          <p:cNvPicPr>
+            <a:picLocks noChangeAspect="1"/>
+          </p:cNvPicPr>
+          <p:nvPr/>
+        </p:nvPicPr>
+        <p:blipFill>
+          <a:blip r:embed="rId4"/>
+          <a:stretch>
+            <a:fillRect/>
+          </a:stretch>
+        </p:blipFill>
+        <p:spPr>
+          <a:xfrm>
+            <a:off x="685800" y="5212080"/>
+            <a:ext cx="411480" cy="411480"/>
+          </a:xfrm>
+          <a:prstGeom prst="rect">
+            <a:avLst/>
+          </a:prstGeom>
+        </p:spPr>
+      </p:pic>
+      <p:sp>
+        <p:nvSpPr>
+          <p:cNvPr id="20" name="Text 14"/>
+          <p:cNvSpPr txBox="1"/>
+          <p:nvPr/>
+        </p:nvSpPr>
+        <p:spPr>
+          <a:xfrm>
+            <a:off x="1280160" y="4983480"/>
+            <a:ext cx="2560320" cy="868680"/>
+          </a:xfrm>
+          <a:prstGeom prst="rect">
+            <a:avLst/>
+          </a:prstGeom>
+          <a:noFill/>
+          <a:ln/>
+        </p:spPr>
+        <p:txBody>
+          <a:bodyPr wrap="square" lIns="0" tIns="0" rIns="0" bIns="0" rtlCol="0" anchor="ctr"/>
+          <a:lstStyle/>
+          <a:p>
+            <a:pPr indent="0" marL="0">
+              <a:buNone/>
+            </a:pPr>
+            <a:r>
+              <a:rPr lang="en-US" sz="1400" b="1" dirty="0">
+                <a:solidFill>
+                  <a:srgbClr val="1F3260"/>
+                </a:solidFill>
+              </a:rPr>
+              <a:t>Análisis de medidas de ahorro</a:t>
+            </a:r>
+            <a:endParaRPr lang="en-US" sz="1400" dirty="0"/>
+          </a:p>
+        </p:txBody>
+      </p:sp>
+      <p:sp>
+        <p:nvSpPr>
+          <p:cNvPr id="21" name="Shape 15"/>
+          <p:cNvSpPr/>
+          <p:nvPr/>
+        </p:nvSpPr>
+        <p:spPr>
+          <a:xfrm>
+            <a:off x="4251960" y="4983480"/>
+            <a:ext cx="3520440" cy="868680"/>
+          </a:xfrm>
+          <a:prstGeom prst="roundRect">
+            <a:avLst>
+              <a:gd name="adj" fmla="val 10526"/>
+            </a:avLst>
+          </a:prstGeom>
+          <a:solidFill>
+            <a:srgbClr val="F4F6F9"/>
+          </a:solidFill>
+          <a:ln/>
+        </p:spPr>
+      </p:sp>
+      <p:pic>
+        <p:nvPicPr>
+          <p:cNvPr id="22" name="Image 4" descr="preencoded.png">    </p:cNvPr>
+          <p:cNvPicPr>
+            <a:picLocks noChangeAspect="1"/>
+          </p:cNvPicPr>
+          <p:nvPr/>
+        </p:nvPicPr>
+        <p:blipFill>
+          <a:blip r:embed="rId5"/>
+          <a:stretch>
+            <a:fillRect/>
+          </a:stretch>
+        </p:blipFill>
+        <p:spPr>
+          <a:xfrm>
+            <a:off x="4480560" y="5212080"/>
+            <a:ext cx="411480" cy="411480"/>
+          </a:xfrm>
+          <a:prstGeom prst="rect">
+            <a:avLst/>
+          </a:prstGeom>
+        </p:spPr>
+      </p:pic>
+      <p:sp>
+        <p:nvSpPr>
+          <p:cNvPr id="23" name="Text 16"/>
+          <p:cNvSpPr txBox="1"/>
+          <p:nvPr/>
+        </p:nvSpPr>
+        <p:spPr>
+          <a:xfrm>
+            <a:off x="5074920" y="4983480"/>
+            <a:ext cx="2560320" cy="868680"/>
+          </a:xfrm>
+          <a:prstGeom prst="rect">
+            <a:avLst/>
+          </a:prstGeom>
+          <a:noFill/>
+          <a:ln/>
+        </p:spPr>
+        <p:txBody>
+          <a:bodyPr wrap="square" lIns="0" tIns="0" rIns="0" bIns="0" rtlCol="0" anchor="ctr"/>
+          <a:lstStyle/>
+          <a:p>
+            <a:pPr indent="0" marL="0">
+              <a:buNone/>
+            </a:pPr>
+            <a:r>
+              <a:rPr lang="en-US" sz="1400" b="1" dirty="0">
+                <a:solidFill>
+                  <a:srgbClr val="1F3260"/>
+                </a:solidFill>
+              </a:rPr>
+              <a:t>Oficina virtual para tus facturas</a:t>
+            </a:r>
+            <a:endParaRPr lang="en-US" sz="1400" dirty="0"/>
+          </a:p>
+        </p:txBody>
+      </p:sp>
+      <p:sp>
+        <p:nvSpPr>
+          <p:cNvPr id="24" name="Shape 17"/>
+          <p:cNvSpPr/>
+          <p:nvPr/>
+        </p:nvSpPr>
+        <p:spPr>
+          <a:xfrm>
+            <a:off x="8046720" y="4983480"/>
+            <a:ext cx="3520440" cy="868680"/>
+          </a:xfrm>
+          <a:prstGeom prst="roundRect">
+            <a:avLst>
+              <a:gd name="adj" fmla="val 10526"/>
+            </a:avLst>
+          </a:prstGeom>
+          <a:solidFill>
+            <a:srgbClr val="F4F6F9"/>
+          </a:solidFill>
+          <a:ln/>
+        </p:spPr>
+      </p:sp>
+      <p:pic>
+        <p:nvPicPr>
+          <p:cNvPr id="25" name="Image 5" descr="preencoded.png">    </p:cNvPr>
+          <p:cNvPicPr>
+            <a:picLocks noChangeAspect="1"/>
+          </p:cNvPicPr>
+          <p:nvPr/>
+        </p:nvPicPr>
+        <p:blipFill>
+          <a:blip r:embed="rId6"/>
+          <a:stretch>
+            <a:fillRect/>
+          </a:stretch>
+        </p:blipFill>
+        <p:spPr>
+          <a:xfrm>
+            <a:off x="8275320" y="5212080"/>
+            <a:ext cx="411480" cy="411480"/>
+          </a:xfrm>
+          <a:prstGeom prst="rect">
+            <a:avLst/>
+          </a:prstGeom>
+        </p:spPr>
+      </p:pic>
+      <p:sp>
+        <p:nvSpPr>
+          <p:cNvPr id="26" name="Text 18"/>
+          <p:cNvSpPr txBox="1"/>
+          <p:nvPr/>
+        </p:nvSpPr>
+        <p:spPr>
+          <a:xfrm>
+            <a:off x="8869680" y="4983480"/>
+            <a:ext cx="2560320" cy="868680"/>
+          </a:xfrm>
+          <a:prstGeom prst="rect">
+            <a:avLst/>
+          </a:prstGeom>
+          <a:noFill/>
+          <a:ln/>
+        </p:spPr>
+        <p:txBody>
+          <a:bodyPr wrap="square" lIns="0" tIns="0" rIns="0" bIns="0" rtlCol="0" anchor="ctr"/>
+          <a:lstStyle/>
+          <a:p>
+            <a:pPr indent="0" marL="0">
+              <a:buNone/>
+            </a:pPr>
+            <a:r>
+              <a:rPr lang="en-US" sz="1400" b="1" dirty="0">
+                <a:solidFill>
+                  <a:srgbClr val="1F3260"/>
+                </a:solidFill>
+              </a:rPr>
+              <a:t>Información continua del sector</a:t>
+            </a:r>
+            <a:endParaRPr lang="en-US" sz="1400" dirty="0"/>
+          </a:p>
+        </p:txBody>
+      </p:sp>
+      <p:sp>
+        <p:nvSpPr>
+          <p:cNvPr id="25" name="Slide Number Placeholder 0"/>
+          <p:cNvSpPr>
+            <a:spLocks noGrp="1"/>
+          </p:cNvSpPr>
+          <p:nvPr>
+            <p:ph type="sldNum" sz="quarter" idx="4294967295"/>
+          </p:nvPr>
+        </p:nvSpPr>
+        <p:spPr>
+          <a:xfrm>
+            <a:off x="11247120" y="6400800"/>
+            <a:ext cx="457200" cy="274320"/>
+          </a:xfrm>
+          <a:prstGeom prst="rect">
+            <a:avLst/>
+          </a:prstGeom>
+          <a:extLst>
+            <a:ext uri="{C572A759-6A51-4108-AA02-DFA0A04FC94B}">
+              <ma14:wrappingTextBoxFlag xmlns:ma14="http://schemas.microsoft.com/office/mac/drawingml/2011/main" val="0"/>
+            </a:ext>
+          </a:extLst>
+        </p:spPr>
+        <p:txBody>
+          <a:bodyPr/>
+          <a:lstStyle>
+            <a:lvl1pPr>
+              <a:defRPr sz="900">
+                <a:solidFill>
+                  <a:schemeClr val="accent6"/>
+                </a:solidFill>
+              </a:defRPr>
+            </a:lvl1pPr>
+          </a:lstStyle>
+          <a:p>
+            <a:pPr algn="l"/>
+            <a:fld id="{F7021451-1387-4CA6-816F-3879F97B5CBC}" type="slidenum">
+              <a:rPr b="0" lang="en-US"/>
+              <a:t>8</a:t>
+            </a:fld>
+            <a:endParaRPr lang="en-US"/>
+          </a:p>
+        </p:txBody>
+      </p:sp>
+    </p:spTree>
+  </p:cSld>
+  <p:clrMapOvr>
+    <a:masterClrMapping/>
+  </p:clrMapOvr>
+</p:sld>
+</file>
+
+<file path=ppt/slides/slide9.xml><?xml version="1.0" encoding="utf-8"?>
+<p:sld xmlns:a="http://schemas.openxmlformats.org/drawingml/2006/main" xmlns:r="http://schemas.openxmlformats.org/officeDocument/2006/relationships" xmlns:p="http://schemas.openxmlformats.org/presentationml/2006/main">
+  <p:cSld name="Slide 9">
     <p:spTree>
       <p:nvGrpSpPr>
         <p:cNvPr id="1" name=""/>
